--- a/coaching-intelligence-pro/Coaching_Calibration_TSX_Cairo.pptx
+++ b/coaching-intelligence-pro/Coaching_Calibration_TSX_Cairo.pptx
@@ -111,23 +111,23 @@
   <p:extLst>
     <p:ext uri="{521415D9-36F7-43E2-AB2F-B90AF26B5E84}">
       <p14:sectionLst xmlns:p14="http://schemas.microsoft.com/office/powerpoint/2010/main">
-        <p14:section name="Open" id="{103715ab-983e-130c-600e-645f3bc2bb47}">
+        <p14:section name="Open" id="{5aa92946-83a2-67f2-b826-5565a9a2b69b}">
           <p14:sldIdLst>
             <p14:sldId id="256"/>
           </p14:sldIdLst>
         </p14:section>
-        <p14:section name="Where the team stands" id="{1fa67a12-8946-89fb-f0a6-3180a3260594}">
+        <p14:section name="Where the team stands" id="{3f0c440a-335b-65cc-8a5b-354bb6feae93}">
           <p14:sldIdLst>
             <p14:sldId id="257"/>
           </p14:sldIdLst>
         </p14:section>
-        <p14:section name="How I coach" id="{481d4a2c-827c-02e9-981d-d0367daf48a5}">
+        <p14:section name="How I coach" id="{3e3ba79c-7172-3587-e79a-f0c4a2439bd6}">
           <p14:sldIdLst>
             <p14:sldId id="258"/>
             <p14:sldId id="259"/>
           </p14:sldIdLst>
         </p14:section>
-        <p14:section name="Next 30 days" id="{b5cb716c-f5fc-7d12-456b-084e2feff705}">
+        <p14:section name="Next 30 days" id="{3f9ed6d5-535e-5cc5-23b9-5caf7aed50f5}">
           <p14:sldIdLst>
             <p14:sldId id="260"/>
           </p14:sldIdLst>
@@ -139,6 +139,467 @@
     </p:ext>
   </p:extLst>
 </p:presentation>
+</file>
+
+<file path=ppt/charts/chart1.xml><?xml version="1.0" encoding="utf-8"?>
+<c:chartSpace xmlns:c="http://schemas.openxmlformats.org/drawingml/2006/chart" xmlns:a="http://schemas.openxmlformats.org/drawingml/2006/main" xmlns:r="http://schemas.openxmlformats.org/officeDocument/2006/relationships">
+  <c:date1904 val="0"/>
+  <c:roundedCorners val="1"/>
+  <c:chart>
+    <c:autoTitleDeleted val="1"/>
+    <c:plotArea>
+      <c:layout/>
+      <c:barChart>
+        <c:barDir val="col"/>
+        <c:grouping val="clustered"/>
+        <c:varyColors val="0"/>
+        <c:ser>
+          <c:idx val="0"/>
+          <c:order val="0"/>
+          <c:tx>
+            <c:strRef>
+              <c:f>Sheet1!$B$1</c:f>
+              <c:strCache>
+                <c:ptCount val="1"/>
+                <c:pt idx="0">
+                  <c:v>tNPS</c:v>
+                </c:pt>
+              </c:strCache>
+            </c:strRef>
+          </c:tx>
+          <c:spPr>
+            <a:solidFill>
+              <a:srgbClr val="F26522"/>
+            </a:solidFill>
+            <a:effectLst/>
+          </c:spPr>
+          <c:invertIfNegative val="0"/>
+          <c:dLbls>
+            <c:numFmt formatCode="0.0;−0.0" sourceLinked="0"/>
+            <c:txPr>
+              <a:bodyPr/>
+              <a:lstStyle/>
+              <a:p>
+                <a:pPr>
+                  <a:defRPr b="1" i="0" strike="noStrike" sz="1100" u="none">
+                    <a:solidFill>
+                      <a:srgbClr val="121826"/>
+                    </a:solidFill>
+                    <a:latin typeface="+mn-lt"/>
+                  </a:defRPr>
+                </a:pPr>
+              </a:p>
+            </c:txPr>
+            <c:dLblPos val="outEnd"/>
+            <c:showLegendKey val="0"/>
+            <c:showVal val="1"/>
+            <c:showCatName val="0"/>
+            <c:showSerName val="0"/>
+            <c:showPercent val="0"/>
+            <c:showBubbleSize val="0"/>
+            <c:showLeaderLines val="0"/>
+          </c:dLbls>
+          <c:dPt>
+            <c:idx val="0"/>
+            <c:invertIfNegative val="0"/>
+            <c:bubble3D val="0"/>
+            <c:spPr>
+              <a:solidFill>
+                <a:srgbClr val="F26522"/>
+              </a:solidFill>
+              <a:effectLst/>
+            </c:spPr>
+          </c:dPt>
+          <c:dPt>
+            <c:idx val="1"/>
+            <c:invertIfNegative val="0"/>
+            <c:bubble3D val="0"/>
+            <c:spPr>
+              <a:solidFill>
+                <a:srgbClr val="8C96AC"/>
+              </a:solidFill>
+              <a:effectLst/>
+            </c:spPr>
+          </c:dPt>
+          <c:dPt>
+            <c:idx val="2"/>
+            <c:invertIfNegative val="0"/>
+            <c:bubble3D val="0"/>
+            <c:spPr>
+              <a:solidFill>
+                <a:srgbClr val="8C96AC"/>
+              </a:solidFill>
+              <a:effectLst/>
+            </c:spPr>
+          </c:dPt>
+          <c:dPt>
+            <c:idx val="3"/>
+            <c:invertIfNegative val="0"/>
+            <c:bubble3D val="0"/>
+            <c:spPr>
+              <a:solidFill>
+                <a:srgbClr val="8C96AC"/>
+              </a:solidFill>
+              <a:effectLst/>
+            </c:spPr>
+          </c:dPt>
+          <c:dPt>
+            <c:idx val="4"/>
+            <c:invertIfNegative val="0"/>
+            <c:bubble3D val="0"/>
+            <c:spPr>
+              <a:solidFill>
+                <a:srgbClr val="121826"/>
+              </a:solidFill>
+              <a:effectLst/>
+            </c:spPr>
+          </c:dPt>
+          <c:cat>
+            <c:multiLvlStrRef>
+              <c:f>Sheet1!$A$2:$A$6</c:f>
+              <c:multiLvlStrCache>
+                <c:ptCount val="5"/>
+                <c:lvl>
+                  <c:pt idx="0">
+                    <c:v>My team</c:v>
+                  </c:pt>
+                  <c:pt idx="1">
+                    <c:v>Wave Temp 2</c:v>
+                  </c:pt>
+                  <c:pt idx="2">
+                    <c:v>Wave Temp 3</c:v>
+                  </c:pt>
+                  <c:pt idx="3">
+                    <c:v>Temp 2 + 33</c:v>
+                  </c:pt>
+                  <c:pt idx="4">
+                    <c:v>Whole LOB</c:v>
+                  </c:pt>
+                </c:lvl>
+              </c:multiLvlStrCache>
+            </c:multiLvlStrRef>
+          </c:cat>
+          <c:val>
+            <c:numRef>
+              <c:f>Sheet1!$B$2:$B$6</c:f>
+              <c:numCache>
+                <c:formatCode>General</c:formatCode>
+                <c:ptCount val="5"/>
+                <c:pt idx="0">
+                  <c:v>10.4</c:v>
+                </c:pt>
+                <c:pt idx="1">
+                  <c:v>11.5</c:v>
+                </c:pt>
+                <c:pt idx="2">
+                  <c:v>8.2</c:v>
+                </c:pt>
+                <c:pt idx="3">
+                  <c:v>-14.6</c:v>
+                </c:pt>
+                <c:pt idx="4">
+                  <c:v>17.6</c:v>
+                </c:pt>
+              </c:numCache>
+            </c:numRef>
+          </c:val>
+        </c:ser>
+        <c:dLbls>
+          <c:numFmt formatCode="0.0;−0.0" sourceLinked="0"/>
+          <c:txPr>
+            <a:bodyPr/>
+            <a:lstStyle/>
+            <a:p>
+              <a:pPr>
+                <a:defRPr b="1" i="0" strike="noStrike" sz="1100" u="none">
+                  <a:solidFill>
+                    <a:srgbClr val="121826"/>
+                  </a:solidFill>
+                  <a:latin typeface="+mn-lt"/>
+                </a:defRPr>
+              </a:pPr>
+            </a:p>
+          </c:txPr>
+          <c:dLblPos val="outEnd"/>
+          <c:showLegendKey val="0"/>
+          <c:showVal val="1"/>
+          <c:showCatName val="0"/>
+          <c:showSerName val="0"/>
+          <c:showPercent val="0"/>
+          <c:showBubbleSize val="0"/>
+          <c:showLeaderLines val="0"/>
+        </c:dLbls>
+        <c:gapWidth val="55"/>
+        <c:overlap val="0"/>
+        <c:axId val="2094734554"/>
+        <c:axId val="2094734552"/>
+        <c:axId val="2094734556"/>
+      </c:barChart>
+      <c:lineChart>
+        <c:varyColors val="0"/>
+        <c:ser>
+          <c:idx val="1"/>
+          <c:order val="1"/>
+          <c:tx>
+            <c:strRef>
+              <c:f>Sheet1!$C$1</c:f>
+              <c:strCache>
+                <c:ptCount val="1"/>
+                <c:pt idx="0">
+                  <c:v>Agent target 33</c:v>
+                </c:pt>
+              </c:strCache>
+            </c:strRef>
+          </c:tx>
+          <c:spPr>
+            <a:solidFill>
+              <a:srgbClr val="1E7F5C"/>
+            </a:solidFill>
+            <a:ln w="25400" cap="flat">
+              <a:solidFill>
+                <a:srgbClr val="1E7F5C"/>
+              </a:solidFill>
+              <a:prstDash val="dash"/>
+              <a:round/>
+            </a:ln>
+            <a:effectLst/>
+          </c:spPr>
+          <c:invertIfNegative val="0"/>
+          <c:dLbls>
+            <c:numFmt formatCode="#,##0" sourceLinked="0"/>
+            <c:txPr>
+              <a:bodyPr/>
+              <a:lstStyle/>
+              <a:p>
+                <a:pPr>
+                  <a:defRPr b="0" i="0" strike="noStrike" sz="1200" u="none">
+                    <a:solidFill>
+                      <a:srgbClr val="000000"/>
+                    </a:solidFill>
+                    <a:latin typeface="Arial"/>
+                  </a:defRPr>
+                </a:pPr>
+              </a:p>
+            </c:txPr>
+            <c:showLegendKey val="0"/>
+            <c:showVal val="0"/>
+            <c:showCatName val="0"/>
+            <c:showSerName val="0"/>
+            <c:showPercent val="0"/>
+            <c:showBubbleSize val="0"/>
+            <c:showLeaderLines val="0"/>
+          </c:dLbls>
+          <c:marker>
+            <c:symbol val="none"/>
+            <c:size val="6"/>
+            <c:spPr>
+              <a:solidFill>
+                <a:srgbClr val="1E7F5C"/>
+              </a:solidFill>
+              <a:ln w="9525" cap="flat">
+                <a:solidFill>
+                  <a:srgbClr val="1E7F5C"/>
+                </a:solidFill>
+                <a:prstDash val="solid"/>
+                <a:round/>
+              </a:ln>
+              <a:effectLst/>
+            </c:spPr>
+          </c:marker>
+          <c:cat>
+            <c:multiLvlStrRef>
+              <c:f>Sheet1!$A$2:$A$6</c:f>
+              <c:multiLvlStrCache>
+                <c:ptCount val="5"/>
+                <c:lvl>
+                  <c:pt idx="0">
+                    <c:v>My team</c:v>
+                  </c:pt>
+                  <c:pt idx="1">
+                    <c:v>Wave Temp 2</c:v>
+                  </c:pt>
+                  <c:pt idx="2">
+                    <c:v>Wave Temp 3</c:v>
+                  </c:pt>
+                  <c:pt idx="3">
+                    <c:v>Temp 2 + 33</c:v>
+                  </c:pt>
+                  <c:pt idx="4">
+                    <c:v>Whole LOB</c:v>
+                  </c:pt>
+                </c:lvl>
+              </c:multiLvlStrCache>
+            </c:multiLvlStrRef>
+          </c:cat>
+          <c:val>
+            <c:numRef>
+              <c:f>Sheet1!$C$2:$C$6</c:f>
+              <c:numCache>
+                <c:formatCode>General</c:formatCode>
+                <c:ptCount val="5"/>
+                <c:pt idx="0">
+                  <c:v>33</c:v>
+                </c:pt>
+                <c:pt idx="1">
+                  <c:v>33</c:v>
+                </c:pt>
+                <c:pt idx="2">
+                  <c:v>33</c:v>
+                </c:pt>
+                <c:pt idx="3">
+                  <c:v>33</c:v>
+                </c:pt>
+                <c:pt idx="4">
+                  <c:v>33</c:v>
+                </c:pt>
+              </c:numCache>
+            </c:numRef>
+          </c:val>
+          <c:smooth val="0"/>
+        </c:ser>
+        <c:dLbls>
+          <c:numFmt formatCode="#,##0" sourceLinked="0"/>
+          <c:txPr>
+            <a:bodyPr/>
+            <a:lstStyle/>
+            <a:p>
+              <a:pPr>
+                <a:defRPr b="0" i="0" strike="noStrike" sz="1200" u="none">
+                  <a:solidFill>
+                    <a:srgbClr val="000000"/>
+                  </a:solidFill>
+                  <a:latin typeface="Arial"/>
+                </a:defRPr>
+              </a:pPr>
+            </a:p>
+          </c:txPr>
+          <c:showLegendKey val="0"/>
+          <c:showVal val="0"/>
+          <c:showCatName val="0"/>
+          <c:showSerName val="0"/>
+          <c:showPercent val="0"/>
+          <c:showBubbleSize val="0"/>
+          <c:showLeaderLines val="0"/>
+        </c:dLbls>
+        <c:marker val="1"/>
+        <c:axId val="2094734554"/>
+        <c:axId val="2094734552"/>
+        <c:axId val="2094734556"/>
+      </c:lineChart>
+      <c:catAx>
+        <c:axId val="2094734554"/>
+        <c:scaling>
+          <c:orientation val="minMax"/>
+        </c:scaling>
+        <c:delete val="0"/>
+        <c:axPos val="b"/>
+        <c:numFmt formatCode="General" sourceLinked="1"/>
+        <c:majorTickMark val="out"/>
+        <c:minorTickMark val="none"/>
+        <c:tickLblPos val="low"/>
+        <c:spPr>
+          <a:ln w="12700" cap="flat">
+            <a:solidFill>
+              <a:srgbClr val="E3DED7"/>
+            </a:solidFill>
+            <a:prstDash val="solid"/>
+            <a:round/>
+          </a:ln>
+        </c:spPr>
+        <c:txPr>
+          <a:bodyPr/>
+          <a:lstStyle/>
+          <a:p>
+            <a:pPr>
+              <a:defRPr sz="950" b="0" i="0" u="none" strike="noStrike">
+                <a:solidFill>
+                  <a:srgbClr val="3D4453"/>
+                </a:solidFill>
+                <a:latin typeface="+mn-lt"/>
+              </a:defRPr>
+            </a:pPr>
+            <a:endParaRPr lang="en-US"/>
+          </a:p>
+        </c:txPr>
+        <c:crossAx val="2094734552"/>
+        <c:crosses val="autoZero"/>
+        <c:auto val="1"/>
+        <c:lblAlgn val="ctr"/>
+        <c:noMultiLvlLbl val="1"/>
+      </c:catAx>
+      <c:valAx>
+        <c:axId val="2094734552"/>
+        <c:scaling>
+          <c:orientation val="minMax"/>
+          <c:max val="40"/>
+          <c:min val="-20"/>
+        </c:scaling>
+        <c:delete val="0"/>
+        <c:axPos val="l"/>
+        <c:majorGridlines>
+          <c:spPr>
+            <a:ln w="6350" cap="flat">
+              <a:solidFill>
+                <a:srgbClr val="E3DED7"/>
+              </a:solidFill>
+              <a:prstDash val="solid"/>
+              <a:round/>
+            </a:ln>
+          </c:spPr>
+        </c:majorGridlines>
+        <c:numFmt formatCode="0;−0" sourceLinked="0"/>
+        <c:majorTickMark val="out"/>
+        <c:minorTickMark val="none"/>
+        <c:tickLblPos val="nextTo"/>
+        <c:spPr>
+          <a:ln w="12700" cap="flat">
+            <a:noFill/>
+            <a:prstDash val="solid"/>
+            <a:round/>
+          </a:ln>
+        </c:spPr>
+        <c:txPr>
+          <a:bodyPr/>
+          <a:lstStyle/>
+          <a:p>
+            <a:pPr>
+              <a:defRPr sz="1000" b="0" i="0" u="none" strike="noStrike">
+                <a:solidFill>
+                  <a:srgbClr val="6B7280"/>
+                </a:solidFill>
+                <a:latin typeface="+mn-lt"/>
+              </a:defRPr>
+            </a:pPr>
+            <a:endParaRPr lang="en-US"/>
+          </a:p>
+        </c:txPr>
+        <c:crossAx val="2094734554"/>
+        <c:crosses val="autoZero"/>
+        <c:crossBetween val="between"/>
+        <c:majorUnit val="10"/>
+      </c:valAx>
+      <c:spPr>
+        <a:noFill/>
+        <a:ln>
+          <a:noFill/>
+        </a:ln>
+        <a:effectLst/>
+      </c:spPr>
+    </c:plotArea>
+    <c:plotVisOnly val="1"/>
+    <c:dispBlanksAs val="span"/>
+  </c:chart>
+  <c:spPr>
+    <a:noFill/>
+    <a:ln>
+      <a:noFill/>
+    </a:ln>
+    <a:effectLst/>
+  </c:spPr>
+  <c:externalData r:id="rId1">
+    <c:autoUpdate val="0"/>
+  </c:externalData>
+</c:chartSpace>
 </file>
 
 <file path=ppt/notesMasters/notesMaster1.xml><?xml version="1.0" encoding="utf-8"?>
@@ -624,7 +1085,7 @@
           <a:p>
             <a:r>
               <a:rPr lang="en-US" dirty="0"/>
-              <a:t>tNPS is rank 11 of 15 and that is the gap. aiCR and GSR are rank 4, XM 3-plus rate rank 5. Context, not excuse: all three new-hire cohorts sit between minus 15 and plus 12 on tNPS. Surveys per agent are 7 to 18, so one survey moves an agent 6 to 14 points.</a:t>
+              <a:t>tNPS is rank 11 of 15 and that is the gap. aiCR and GSR are rank 4, XM 3-plus rate rank 5. The chart puts the team against the other new-hire cohorts and the whole LOB at 17.6: all three cohorts under 30 days sit between minus 15 and plus 12 on tNPS, and the agent target is 33. Context, not excuse. Surveys per agent are 7 to 18, so one survey moves an agent 6 to 14 points.</a:t>
             </a:r>
             <a:endParaRPr lang="en-US" dirty="0"/>
           </a:p>
@@ -712,7 +1173,7 @@
           <a:p>
             <a:r>
               <a:rPr lang="en-US" dirty="0"/>
-              <a:t>Walk the four steps left to right. The two stories in step four are mine: the mute case and the tentative-wording case. Both looked like attitude and both were knowledge. End with the new-hire adaptation: most blame the customer when asked to self-assess, so I let them try, then I direct, and I check the next calls fast.</a:t>
+              <a:t>Walk the four steps left to right. The two stories in step four are mine: the mute case and the tentative-wording case. Both looked like attitude and both were knowledge. End with the new-hire adaptation: most blame the customer when asked to self-assess, so I let them try, then I direct, and I check the next calls fast. The cadence numbers on the band: 15 to 30 minutes per session, follow-up calls the same day or the next, two to three follow-ups for the bottom quartile.</a:t>
             </a:r>
             <a:endParaRPr lang="en-US" dirty="0"/>
           </a:p>
@@ -800,7 +1261,7 @@
           <a:p>
             <a:r>
               <a:rPr lang="en-US" dirty="0"/>
-              <a:t>The real record for one agent, anonymized. Point at four things: the agent’s own words, the root cause with the question that found it, commitments on both sides, and measures that are calls first and KPI second. The tNPS line is deliberate: minus 20 to 33 in a week is not a promise anyone can keep on 15 surveys, so we commit to direction and set the number once ten new surveys are in. Everything else is parked, including sales, because an offer before the fix costs a repeat.</a:t>
+              <a:t>Kareem Gharib’s real record, 25 days on the floor. Point at four things: his own words, the root cause with the question that found it, commitments on both sides, and measures that are calls first and KPI second. The tiles are his October month to date: tNPS minus 20 on 15 surveys, aiCR 53.4 against 62, XM 0 against 4, GSR 1.4 against 8, rank 205 of 220. The tNPS line is deliberate: minus 20 to 33 in a week is not a promise anyone can keep on 15 surveys, so we commit to direction and set the number once ten new surveys are in. Everything else is parked, including sales, because an offer before the fix costs a repeat.</a:t>
             </a:r>
             <a:endParaRPr lang="en-US" dirty="0"/>
           </a:p>
@@ -888,7 +1349,7 @@
           <a:p>
             <a:r>
               <a:rPr lang="en-US" dirty="0"/>
-              <a:t>Close with the math and the cadence. Six agents are negative on 78 surveys; if they simply reach zero, the team moves from 10.4 to about 20 without a single new promoter. Agent A and Agent B show the same KPI needs two different conversations. Then the two asks, and stop talking after the asks.</a:t>
+              <a:t>Close with the math and the cadence. Six agents are negative on 78 surveys; if they simply reach zero, the team moves from 10.4 to about 20 without a single new promoter. Kareem Gharib and Mohammed Ammar show that the same KPI needs two different conversations: Kareem is rank 205 of 220 and below target on all four, a knowledge gap; Mohammed is rank 54 of 220, resolves at 61.3 percent and sells 5 lines, yet sits at minus 37.5 on 16 surveys, a behavior gap on the call, expectation setting and the close. Then the two asks, and stop talking after the asks.</a:t>
             </a:r>
             <a:endParaRPr lang="en-US" dirty="0"/>
           </a:p>
@@ -1640,99 +2101,307 @@
       </p:grpSpPr>
       <p:sp>
         <p:nvSpPr>
-          <p:cNvPr id="2" name="Shape 0"/>
+          <p:cNvPr id="2" name="Eyebrow"/>
+          <p:cNvSpPr txBox="1"/>
+          <p:nvPr/>
+        </p:nvSpPr>
+        <p:spPr>
+          <a:xfrm>
+            <a:off x="548640" y="1280160"/>
+            <a:ext cx="8229600" cy="274320"/>
+          </a:xfrm>
+          <a:prstGeom prst="rect">
+            <a:avLst/>
+          </a:prstGeom>
+          <a:noFill/>
+          <a:ln/>
+        </p:spPr>
+        <p:txBody>
+          <a:bodyPr wrap="square" lIns="0" tIns="0" rIns="0" bIns="0" rtlCol="0" anchor="ctr"/>
+          <a:lstStyle/>
+          <a:p>
+            <a:pPr indent="0" marL="0">
+              <a:buNone/>
+            </a:pPr>
+            <a:r>
+              <a:rPr lang="en-US" sz="1200" b="1" spc="300" kern="0" dirty="0">
+                <a:solidFill>
+                  <a:srgbClr val="F26522"/>
+                </a:solidFill>
+              </a:rPr>
+              <a:t>VXI · TSX CAIRO · COMCAST REPAIR</a:t>
+            </a:r>
+            <a:endParaRPr lang="en-US" sz="1200" dirty="0"/>
+          </a:p>
+        </p:txBody>
+      </p:sp>
+      <p:sp>
+        <p:nvSpPr>
+          <p:cNvPr id="3" name="Deck title"/>
+          <p:cNvSpPr txBox="1"/>
+          <p:nvPr/>
+        </p:nvSpPr>
+        <p:spPr>
+          <a:xfrm>
+            <a:off x="548640" y="1783080"/>
+            <a:ext cx="6949440" cy="1371600"/>
+          </a:xfrm>
+          <a:prstGeom prst="rect">
+            <a:avLst/>
+          </a:prstGeom>
+          <a:noFill/>
+          <a:ln/>
+        </p:spPr>
+        <p:txBody>
+          <a:bodyPr wrap="square" lIns="0" tIns="0" rIns="0" bIns="0" rtlCol="0" anchor="ctr"/>
+          <a:lstStyle/>
+          <a:p>
+            <a:pPr indent="0" marL="0">
+              <a:buNone/>
+            </a:pPr>
+            <a:r>
+              <a:rPr lang="en-US" sz="6000" b="1" spc="-100" kern="0" dirty="0">
+                <a:solidFill>
+                  <a:srgbClr val="FFFFFF"/>
+                </a:solidFill>
+              </a:rPr>
+              <a:t>Coaching Calibration</a:t>
+            </a:r>
+            <a:endParaRPr lang="en-US" sz="6000" dirty="0"/>
+          </a:p>
+        </p:txBody>
+      </p:sp>
+      <p:sp>
+        <p:nvSpPr>
+          <p:cNvPr id="4" name="Subtitle"/>
+          <p:cNvSpPr txBox="1"/>
+          <p:nvPr/>
+        </p:nvSpPr>
+        <p:spPr>
+          <a:xfrm>
+            <a:off x="548640" y="3246120"/>
+            <a:ext cx="6583680" cy="914400"/>
+          </a:xfrm>
+          <a:prstGeom prst="rect">
+            <a:avLst/>
+          </a:prstGeom>
+          <a:noFill/>
+          <a:ln/>
+        </p:spPr>
+        <p:txBody>
+          <a:bodyPr wrap="square" lIns="0" tIns="0" rIns="0" bIns="0" rtlCol="0" anchor="ctr"/>
+          <a:lstStyle/>
+          <a:p>
+            <a:pPr indent="0" marL="0">
+              <a:buNone/>
+            </a:pPr>
+            <a:r>
+              <a:rPr lang="en-US" sz="2000" dirty="0">
+                <a:solidFill>
+                  <a:srgbClr val="D9DDE6"/>
+                </a:solidFill>
+              </a:rPr>
+              <a:t>How I prepare, how I find the root cause, and how I coach one behavior at a time.</a:t>
+            </a:r>
+            <a:endParaRPr lang="en-US" sz="2000" dirty="0"/>
+          </a:p>
+        </p:txBody>
+      </p:sp>
+      <p:sp>
+        <p:nvSpPr>
+          <p:cNvPr id="5" name="Agenda card"/>
           <p:cNvSpPr/>
           <p:nvPr/>
         </p:nvSpPr>
         <p:spPr>
           <a:xfrm>
-            <a:off x="8412480" y="1097280"/>
-            <a:ext cx="2834640" cy="2834640"/>
+            <a:off x="7863840" y="1371600"/>
+            <a:ext cx="3779215" cy="3154680"/>
           </a:xfrm>
           <a:prstGeom prst="roundRect">
             <a:avLst>
-              <a:gd name="adj" fmla="val 16129"/>
+              <a:gd name="adj" fmla="val 5797"/>
             </a:avLst>
           </a:prstGeom>
           <a:solidFill>
-            <a:srgbClr val="F26522">
-              <a:alpha val="14000"/>
-            </a:srgbClr>
+            <a:srgbClr val="1C2437"/>
           </a:solidFill>
-          <a:ln w="12700">
-            <a:solidFill>
-              <a:srgbClr val="F26522">
-                <a:alpha val="0"/>
-              </a:srgbClr>
-            </a:solidFill>
-            <a:prstDash val="solid"/>
-          </a:ln>
-        </p:spPr>
-      </p:sp>
-      <p:sp>
-        <p:nvSpPr>
-          <p:cNvPr id="3" name="Shape 1"/>
+          <a:ln/>
+        </p:spPr>
+      </p:sp>
+      <p:sp>
+        <p:nvSpPr>
+          <p:cNvPr id="6" name="Icon circle"/>
           <p:cNvSpPr/>
           <p:nvPr/>
         </p:nvSpPr>
         <p:spPr>
-          <a:xfrm rot="2700000">
-            <a:off x="8961120" y="2366924"/>
-            <a:ext cx="1737360" cy="295351"/>
-          </a:xfrm>
-          <a:prstGeom prst="roundRect">
-            <a:avLst>
-              <a:gd name="adj" fmla="val 50000"/>
-            </a:avLst>
+          <a:xfrm>
+            <a:off x="8147304" y="1655064"/>
+            <a:ext cx="566928" cy="566928"/>
+          </a:xfrm>
+          <a:prstGeom prst="ellipse">
+            <a:avLst/>
           </a:prstGeom>
           <a:solidFill>
             <a:srgbClr val="F26522"/>
           </a:solidFill>
-          <a:ln w="12700">
-            <a:solidFill>
-              <a:srgbClr val="F26522"/>
-            </a:solidFill>
-            <a:prstDash val="solid"/>
-          </a:ln>
-        </p:spPr>
-      </p:sp>
-      <p:sp>
-        <p:nvSpPr>
-          <p:cNvPr id="4" name="Shape 2"/>
+          <a:ln/>
+        </p:spPr>
+      </p:sp>
+      <p:pic>
+        <p:nvPicPr>
+          <p:cNvPr id="7" name="Icon" descr="preencoded.png">    </p:cNvPr>
+          <p:cNvPicPr>
+            <a:picLocks noChangeAspect="1"/>
+          </p:cNvPicPr>
+          <p:nvPr/>
+        </p:nvPicPr>
+        <p:blipFill>
+          <a:blip r:embed="rId1"/>
+          <a:stretch>
+            <a:fillRect/>
+          </a:stretch>
+        </p:blipFill>
+        <p:spPr>
+          <a:xfrm>
+            <a:off x="8283367" y="1791127"/>
+            <a:ext cx="294803" cy="294803"/>
+          </a:xfrm>
+          <a:prstGeom prst="rect">
+            <a:avLst/>
+          </a:prstGeom>
+        </p:spPr>
+      </p:pic>
+      <p:sp>
+        <p:nvSpPr>
+          <p:cNvPr id="8" name="Agenda title"/>
+          <p:cNvSpPr txBox="1"/>
+          <p:nvPr/>
+        </p:nvSpPr>
+        <p:spPr>
+          <a:xfrm>
+            <a:off x="8869680" y="1591056"/>
+            <a:ext cx="2544775" cy="329184"/>
+          </a:xfrm>
+          <a:prstGeom prst="rect">
+            <a:avLst/>
+          </a:prstGeom>
+          <a:noFill/>
+          <a:ln/>
+        </p:spPr>
+        <p:txBody>
+          <a:bodyPr wrap="square" lIns="0" tIns="0" rIns="0" bIns="0" rtlCol="0" anchor="ctr"/>
+          <a:lstStyle/>
+          <a:p>
+            <a:pPr indent="0" marL="0">
+              <a:buNone/>
+            </a:pPr>
+            <a:r>
+              <a:rPr lang="en-US" sz="1600" b="1" dirty="0">
+                <a:solidFill>
+                  <a:srgbClr val="FFFFFF"/>
+                </a:solidFill>
+              </a:rPr>
+              <a:t>Prepare</a:t>
+            </a:r>
+            <a:endParaRPr lang="en-US" sz="1600" dirty="0"/>
+          </a:p>
+        </p:txBody>
+      </p:sp>
+      <p:sp>
+        <p:nvSpPr>
+          <p:cNvPr id="9" name="Paragraph"/>
+          <p:cNvSpPr txBox="1"/>
+          <p:nvPr/>
+        </p:nvSpPr>
+        <p:spPr>
+          <a:xfrm>
+            <a:off x="8869680" y="1938528"/>
+            <a:ext cx="2544775" cy="457200"/>
+          </a:xfrm>
+          <a:prstGeom prst="rect">
+            <a:avLst/>
+          </a:prstGeom>
+          <a:noFill/>
+          <a:ln/>
+        </p:spPr>
+        <p:txBody>
+          <a:bodyPr wrap="square" lIns="0" tIns="0" rIns="0" bIns="0" rtlCol="0" anchor="t"/>
+          <a:lstStyle/>
+          <a:p>
+            <a:pPr indent="0" marL="0">
+              <a:spcAft>
+                <a:spcPts val="400"/>
+              </a:spcAft>
+              <a:buNone/>
+            </a:pPr>
+            <a:r>
+              <a:rPr lang="en-US" sz="1200" dirty="0">
+                <a:solidFill>
+                  <a:srgbClr val="D9DDE6"/>
+                </a:solidFill>
+              </a:rPr>
+              <a:t>Data and calls before every session</a:t>
+            </a:r>
+            <a:endParaRPr lang="en-US" sz="1200" dirty="0"/>
+          </a:p>
+        </p:txBody>
+      </p:sp>
+      <p:sp>
+        <p:nvSpPr>
+          <p:cNvPr id="10" name="Icon circle"/>
           <p:cNvSpPr/>
           <p:nvPr/>
         </p:nvSpPr>
         <p:spPr>
-          <a:xfrm rot="-2700000">
-            <a:off x="8961120" y="2366924"/>
-            <a:ext cx="1737360" cy="295351"/>
-          </a:xfrm>
-          <a:prstGeom prst="roundRect">
-            <a:avLst>
-              <a:gd name="adj" fmla="val 50000"/>
-            </a:avLst>
+          <a:xfrm>
+            <a:off x="8147304" y="2642616"/>
+            <a:ext cx="566928" cy="566928"/>
+          </a:xfrm>
+          <a:prstGeom prst="ellipse">
+            <a:avLst/>
           </a:prstGeom>
           <a:solidFill>
             <a:srgbClr val="F26522"/>
           </a:solidFill>
-          <a:ln w="12700">
-            <a:solidFill>
-              <a:srgbClr val="F26522"/>
-            </a:solidFill>
-            <a:prstDash val="solid"/>
-          </a:ln>
-        </p:spPr>
-      </p:sp>
-      <p:sp>
-        <p:nvSpPr>
-          <p:cNvPr id="5" name="Text 3"/>
+          <a:ln/>
+        </p:spPr>
+      </p:sp>
+      <p:pic>
+        <p:nvPicPr>
+          <p:cNvPr id="11" name="Icon" descr="preencoded.png">    </p:cNvPr>
+          <p:cNvPicPr>
+            <a:picLocks noChangeAspect="1"/>
+          </p:cNvPicPr>
+          <p:nvPr/>
+        </p:nvPicPr>
+        <p:blipFill>
+          <a:blip r:embed="rId2"/>
+          <a:stretch>
+            <a:fillRect/>
+          </a:stretch>
+        </p:blipFill>
+        <p:spPr>
+          <a:xfrm>
+            <a:off x="8283367" y="2778679"/>
+            <a:ext cx="294803" cy="294803"/>
+          </a:xfrm>
+          <a:prstGeom prst="rect">
+            <a:avLst/>
+          </a:prstGeom>
+        </p:spPr>
+      </p:pic>
+      <p:sp>
+        <p:nvSpPr>
+          <p:cNvPr id="12" name="Agenda title"/>
           <p:cNvSpPr txBox="1"/>
           <p:nvPr/>
         </p:nvSpPr>
         <p:spPr>
           <a:xfrm>
-            <a:off x="548640" y="1371600"/>
-            <a:ext cx="7315200" cy="274320"/>
+            <a:off x="8869680" y="2578608"/>
+            <a:ext cx="2544775" cy="329184"/>
           </a:xfrm>
           <a:prstGeom prst="rect">
             <a:avLst/>
@@ -1748,12 +2417,51 @@
               <a:buNone/>
             </a:pPr>
             <a:r>
-              <a:rPr lang="en-US" sz="1200" b="1" spc="300" kern="0" dirty="0">
-                <a:solidFill>
-                  <a:srgbClr val="F26522"/>
-                </a:solidFill>
-              </a:rPr>
-              <a:t>VXI · TSX CAIRO · COMCAST REPAIR</a:t>
+              <a:rPr lang="en-US" sz="1600" b="1" dirty="0">
+                <a:solidFill>
+                  <a:srgbClr val="FFFFFF"/>
+                </a:solidFill>
+              </a:rPr>
+              <a:t>Find the cause</a:t>
+            </a:r>
+            <a:endParaRPr lang="en-US" sz="1600" dirty="0"/>
+          </a:p>
+        </p:txBody>
+      </p:sp>
+      <p:sp>
+        <p:nvSpPr>
+          <p:cNvPr id="13" name="Paragraph"/>
+          <p:cNvSpPr txBox="1"/>
+          <p:nvPr/>
+        </p:nvSpPr>
+        <p:spPr>
+          <a:xfrm>
+            <a:off x="8869680" y="2926080"/>
+            <a:ext cx="2544775" cy="457200"/>
+          </a:xfrm>
+          <a:prstGeom prst="rect">
+            <a:avLst/>
+          </a:prstGeom>
+          <a:noFill/>
+          <a:ln/>
+        </p:spPr>
+        <p:txBody>
+          <a:bodyPr wrap="square" lIns="0" tIns="0" rIns="0" bIns="0" rtlCol="0" anchor="t"/>
+          <a:lstStyle/>
+          <a:p>
+            <a:pPr indent="0" marL="0">
+              <a:spcAft>
+                <a:spcPts val="400"/>
+              </a:spcAft>
+              <a:buNone/>
+            </a:pPr>
+            <a:r>
+              <a:rPr lang="en-US" sz="1200" dirty="0">
+                <a:solidFill>
+                  <a:srgbClr val="D9DDE6"/>
+                </a:solidFill>
+              </a:rPr>
+              <a:t>Ask before I tell, and fix the cause, not the symptom</a:t>
             </a:r>
             <a:endParaRPr lang="en-US" sz="1200" dirty="0"/>
           </a:p>
@@ -1761,14 +2469,58 @@
       </p:sp>
       <p:sp>
         <p:nvSpPr>
-          <p:cNvPr id="6" name="Text 4"/>
+          <p:cNvPr id="14" name="Icon circle"/>
+          <p:cNvSpPr/>
+          <p:nvPr/>
+        </p:nvSpPr>
+        <p:spPr>
+          <a:xfrm>
+            <a:off x="8147304" y="3630168"/>
+            <a:ext cx="566928" cy="566928"/>
+          </a:xfrm>
+          <a:prstGeom prst="ellipse">
+            <a:avLst/>
+          </a:prstGeom>
+          <a:solidFill>
+            <a:srgbClr val="F26522"/>
+          </a:solidFill>
+          <a:ln/>
+        </p:spPr>
+      </p:sp>
+      <p:pic>
+        <p:nvPicPr>
+          <p:cNvPr id="15" name="Icon" descr="preencoded.png">    </p:cNvPr>
+          <p:cNvPicPr>
+            <a:picLocks noChangeAspect="1"/>
+          </p:cNvPicPr>
+          <p:nvPr/>
+        </p:nvPicPr>
+        <p:blipFill>
+          <a:blip r:embed="rId3"/>
+          <a:stretch>
+            <a:fillRect/>
+          </a:stretch>
+        </p:blipFill>
+        <p:spPr>
+          <a:xfrm>
+            <a:off x="8283367" y="3766231"/>
+            <a:ext cx="294803" cy="294803"/>
+          </a:xfrm>
+          <a:prstGeom prst="rect">
+            <a:avLst/>
+          </a:prstGeom>
+        </p:spPr>
+      </p:pic>
+      <p:sp>
+        <p:nvSpPr>
+          <p:cNvPr id="16" name="Agenda title"/>
           <p:cNvSpPr txBox="1"/>
           <p:nvPr/>
         </p:nvSpPr>
         <p:spPr>
           <a:xfrm>
-            <a:off x="548640" y="1783080"/>
-            <a:ext cx="7680960" cy="1371600"/>
+            <a:off x="8869680" y="3566160"/>
+            <a:ext cx="2544775" cy="329184"/>
           </a:xfrm>
           <a:prstGeom prst="rect">
             <a:avLst/>
@@ -1784,27 +2536,27 @@
               <a:buNone/>
             </a:pPr>
             <a:r>
-              <a:rPr lang="en-US" sz="6000" b="1" spc="-100" kern="0" dirty="0">
+              <a:rPr lang="en-US" sz="1600" b="1" dirty="0">
                 <a:solidFill>
                   <a:srgbClr val="FFFFFF"/>
                 </a:solidFill>
               </a:rPr>
-              <a:t>Coaching Calibration</a:t>
-            </a:r>
-            <a:endParaRPr lang="en-US" sz="6000" dirty="0"/>
-          </a:p>
-        </p:txBody>
-      </p:sp>
-      <p:sp>
-        <p:nvSpPr>
-          <p:cNvPr id="7" name="Text 5"/>
+              <a:t>Coach one behavior</a:t>
+            </a:r>
+            <a:endParaRPr lang="en-US" sz="1600" dirty="0"/>
+          </a:p>
+        </p:txBody>
+      </p:sp>
+      <p:sp>
+        <p:nvSpPr>
+          <p:cNvPr id="17" name="Paragraph"/>
           <p:cNvSpPr txBox="1"/>
           <p:nvPr/>
         </p:nvSpPr>
         <p:spPr>
           <a:xfrm>
-            <a:off x="548640" y="3246120"/>
-            <a:ext cx="6949440" cy="914400"/>
+            <a:off x="8869680" y="3913632"/>
+            <a:ext cx="2544775" cy="457200"/>
           </a:xfrm>
           <a:prstGeom prst="rect">
             <a:avLst/>
@@ -1813,27 +2565,30 @@
           <a:ln/>
         </p:spPr>
         <p:txBody>
-          <a:bodyPr wrap="square" lIns="0" tIns="0" rIns="0" bIns="0" rtlCol="0" anchor="ctr"/>
+          <a:bodyPr wrap="square" lIns="0" tIns="0" rIns="0" bIns="0" rtlCol="0" anchor="t"/>
           <a:lstStyle/>
           <a:p>
             <a:pPr indent="0" marL="0">
-              <a:buNone/>
-            </a:pPr>
-            <a:r>
-              <a:rPr lang="en-US" sz="2000" dirty="0">
+              <a:spcAft>
+                <a:spcPts val="400"/>
+              </a:spcAft>
+              <a:buNone/>
+            </a:pPr>
+            <a:r>
+              <a:rPr lang="en-US" sz="1200" dirty="0">
                 <a:solidFill>
                   <a:srgbClr val="D9DDE6"/>
                 </a:solidFill>
               </a:rPr>
-              <a:t>How I prepare, how I find the root cause, and how I coach one behavior at a time.</a:t>
-            </a:r>
-            <a:endParaRPr lang="en-US" sz="2000" dirty="0"/>
-          </a:p>
-        </p:txBody>
-      </p:sp>
-      <p:sp>
-        <p:nvSpPr>
-          <p:cNvPr id="8" name="Text 6"/>
+              <a:t>One focus per session, dated, measured on calls first</a:t>
+            </a:r>
+            <a:endParaRPr lang="en-US" sz="1200" dirty="0"/>
+          </a:p>
+        </p:txBody>
+      </p:sp>
+      <p:sp>
+        <p:nvSpPr>
+          <p:cNvPr id="18" name="Label"/>
           <p:cNvSpPr txBox="1"/>
           <p:nvPr/>
         </p:nvSpPr>
@@ -1869,7 +2624,7 @@
       </p:sp>
       <p:sp>
         <p:nvSpPr>
-          <p:cNvPr id="9" name="Text 7"/>
+          <p:cNvPr id="19" name="Cover detail"/>
           <p:cNvSpPr txBox="1"/>
           <p:nvPr/>
         </p:nvSpPr>
@@ -1905,7 +2660,7 @@
       </p:sp>
       <p:sp>
         <p:nvSpPr>
-          <p:cNvPr id="10" name="Text 8"/>
+          <p:cNvPr id="20" name="Label"/>
           <p:cNvSpPr txBox="1"/>
           <p:nvPr/>
         </p:nvSpPr>
@@ -1941,7 +2696,7 @@
       </p:sp>
       <p:sp>
         <p:nvSpPr>
-          <p:cNvPr id="11" name="Text 9"/>
+          <p:cNvPr id="21" name="Cover detail"/>
           <p:cNvSpPr txBox="1"/>
           <p:nvPr/>
         </p:nvSpPr>
@@ -1977,7 +2732,7 @@
       </p:sp>
       <p:sp>
         <p:nvSpPr>
-          <p:cNvPr id="12" name="Text 10"/>
+          <p:cNvPr id="22" name="Label"/>
           <p:cNvSpPr txBox="1"/>
           <p:nvPr/>
         </p:nvSpPr>
@@ -2013,7 +2768,7 @@
       </p:sp>
       <p:sp>
         <p:nvSpPr>
-          <p:cNvPr id="13" name="Text 11"/>
+          <p:cNvPr id="23" name="Cover detail"/>
           <p:cNvSpPr txBox="1"/>
           <p:nvPr/>
         </p:nvSpPr>
@@ -2074,14 +2829,14 @@
       </p:grpSpPr>
       <p:sp>
         <p:nvSpPr>
-          <p:cNvPr id="2" name="Text 0"/>
+          <p:cNvPr id="2" name="Eyebrow"/>
           <p:cNvSpPr txBox="1"/>
           <p:nvPr/>
         </p:nvSpPr>
         <p:spPr>
           <a:xfrm>
             <a:off x="548640" y="457200"/>
-            <a:ext cx="7315200" cy="274320"/>
+            <a:ext cx="8229600" cy="274320"/>
           </a:xfrm>
           <a:prstGeom prst="rect">
             <a:avLst/>
@@ -2140,7 +2895,21 @@
                   <a:schemeClr val="tx1"/>
                 </a:solidFill>
               </a:rPr>
-              <a:t>tNPS is the one real gap. Resolution and sales are top four on the floor</a:t>
+              <a:t>tNPS is the one real gap.</a:t>
+            </a:r>
+            <a:endParaRPr lang="en-US" sz="3200" dirty="0"/>
+          </a:p>
+          <a:p>
+            <a:pPr algn="l" indent="0" marL="0">
+              <a:buNone/>
+            </a:pPr>
+            <a:r>
+              <a:rPr lang="en-US" sz="3200" b="1" dirty="0">
+                <a:solidFill>
+                  <a:schemeClr val="tx1"/>
+                </a:solidFill>
+              </a:rPr>
+              <a:t>Resolution and GSR are top four on the floor</a:t>
             </a:r>
             <a:endParaRPr lang="en-US" sz="3200" dirty="0"/>
           </a:p>
@@ -2148,7 +2917,7 @@
       </p:sp>
       <p:graphicFrame>
         <p:nvGraphicFramePr>
-          <p:cNvPr id="3" name="Table 0"/>
+          <p:cNvPr id="3" name="KPI table"/>
           <p:cNvGraphicFramePr>
             <a:graphicFrameLocks noGrp="1"/>
           </p:cNvGraphicFramePr>
@@ -2162,20 +2931,20 @@
         </p:nvGraphicFramePr>
         <p:xfrm>
           <a:off x="548640" y="2011680"/>
-          <a:ext cx="6949440" cy="914400"/>
+          <a:ext cx="6400800" cy="914400"/>
         </p:xfrm>
         <a:graphic>
           <a:graphicData uri="http://schemas.openxmlformats.org/drawingml/2006/table">
             <a:tbl>
               <a:tblPr/>
               <a:tblGrid>
-                <a:gridCol w="1737360"/>
-                <a:gridCol w="1097280"/>
                 <a:gridCol w="1554480"/>
-                <a:gridCol w="1280160"/>
-                <a:gridCol w="1280160"/>
+                <a:gridCol w="960120"/>
+                <a:gridCol w="1508760"/>
+                <a:gridCol w="1188720"/>
+                <a:gridCol w="1188720"/>
               </a:tblGrid>
-              <a:tr h="475488">
+              <a:tr h="438912">
                 <a:tc>
                   <a:txBody>
                     <a:bodyPr/>
@@ -2185,7 +2954,7 @@
                         <a:buNone/>
                       </a:pPr>
                       <a:r>
-                        <a:rPr lang="en-US" sz="1300" b="1" dirty="0">
+                        <a:rPr lang="en-US" sz="1250" b="1" dirty="0">
                           <a:solidFill>
                             <a:srgbClr val="FFFFFF"/>
                           </a:solidFill>
@@ -2195,14 +2964,14 @@
                         </a:rPr>
                         <a:t>KPI</a:t>
                       </a:r>
-                      <a:endParaRPr lang="en-US" sz="1300" dirty="0">
+                      <a:endParaRPr lang="en-US" sz="1250" dirty="0">
                         <a:latin typeface="Calibri" charset="0"/>
                         <a:ea typeface="Calibri" charset="0"/>
                         <a:cs typeface="Calibri" charset="0"/>
                       </a:endParaRPr>
                     </a:p>
                   </a:txBody>
-                  <a:tcPr marL="128016" marR="128016" marT="73152" marB="73152">
+                  <a:tcPr marL="109728" marR="109728" marT="54864" marB="54864">
                     <a:lnL w="9525" cap="flat" cmpd="sng" algn="ctr">
                       <a:solidFill>
                         <a:srgbClr val="E3DED7"/>
@@ -2253,7 +3022,7 @@
                         <a:buNone/>
                       </a:pPr>
                       <a:r>
-                        <a:rPr lang="en-US" sz="1300" b="1" dirty="0">
+                        <a:rPr lang="en-US" sz="1250" b="1" dirty="0">
                           <a:solidFill>
                             <a:srgbClr val="FFFFFF"/>
                           </a:solidFill>
@@ -2263,14 +3032,14 @@
                         </a:rPr>
                         <a:t>Team</a:t>
                       </a:r>
-                      <a:endParaRPr lang="en-US" sz="1300" dirty="0">
+                      <a:endParaRPr lang="en-US" sz="1250" dirty="0">
                         <a:latin typeface="Calibri" charset="0"/>
                         <a:ea typeface="Calibri" charset="0"/>
                         <a:cs typeface="Calibri" charset="0"/>
                       </a:endParaRPr>
                     </a:p>
                   </a:txBody>
-                  <a:tcPr marL="128016" marR="128016" marT="73152" marB="73152">
+                  <a:tcPr marL="109728" marR="109728" marT="54864" marB="54864">
                     <a:lnL w="9525" cap="flat" cmpd="sng" algn="ctr">
                       <a:solidFill>
                         <a:srgbClr val="E3DED7"/>
@@ -2321,7 +3090,7 @@
                         <a:buNone/>
                       </a:pPr>
                       <a:r>
-                        <a:rPr lang="en-US" sz="1300" b="1" dirty="0">
+                        <a:rPr lang="en-US" sz="1250" b="1" dirty="0">
                           <a:solidFill>
                             <a:srgbClr val="FFFFFF"/>
                           </a:solidFill>
@@ -2331,14 +3100,14 @@
                         </a:rPr>
                         <a:t>Target</a:t>
                       </a:r>
-                      <a:endParaRPr lang="en-US" sz="1300" dirty="0">
+                      <a:endParaRPr lang="en-US" sz="1250" dirty="0">
                         <a:latin typeface="Calibri" charset="0"/>
                         <a:ea typeface="Calibri" charset="0"/>
                         <a:cs typeface="Calibri" charset="0"/>
                       </a:endParaRPr>
                     </a:p>
                   </a:txBody>
-                  <a:tcPr marL="128016" marR="128016" marT="73152" marB="73152">
+                  <a:tcPr marL="109728" marR="109728" marT="54864" marB="54864">
                     <a:lnL w="9525" cap="flat" cmpd="sng" algn="ctr">
                       <a:solidFill>
                         <a:srgbClr val="E3DED7"/>
@@ -2389,7 +3158,7 @@
                         <a:buNone/>
                       </a:pPr>
                       <a:r>
-                        <a:rPr lang="en-US" sz="1300" b="1" dirty="0">
+                        <a:rPr lang="en-US" sz="1250" b="1" dirty="0">
                           <a:solidFill>
                             <a:srgbClr val="FFFFFF"/>
                           </a:solidFill>
@@ -2399,14 +3168,14 @@
                         </a:rPr>
                         <a:t>Rank of 15</a:t>
                       </a:r>
-                      <a:endParaRPr lang="en-US" sz="1300" dirty="0">
+                      <a:endParaRPr lang="en-US" sz="1250" dirty="0">
                         <a:latin typeface="Calibri" charset="0"/>
                         <a:ea typeface="Calibri" charset="0"/>
                         <a:cs typeface="Calibri" charset="0"/>
                       </a:endParaRPr>
                     </a:p>
                   </a:txBody>
-                  <a:tcPr marL="128016" marR="128016" marT="73152" marB="73152">
+                  <a:tcPr marL="109728" marR="109728" marT="54864" marB="54864">
                     <a:lnL w="9525" cap="flat" cmpd="sng" algn="ctr">
                       <a:solidFill>
                         <a:srgbClr val="E3DED7"/>
@@ -2457,7 +3226,7 @@
                         <a:buNone/>
                       </a:pPr>
                       <a:r>
-                        <a:rPr lang="en-US" sz="1300" b="1" dirty="0">
+                        <a:rPr lang="en-US" sz="1250" b="1" dirty="0">
                           <a:solidFill>
                             <a:srgbClr val="FFFFFF"/>
                           </a:solidFill>
@@ -2467,14 +3236,14 @@
                         </a:rPr>
                         <a:t>On target</a:t>
                       </a:r>
-                      <a:endParaRPr lang="en-US" sz="1300" dirty="0">
+                      <a:endParaRPr lang="en-US" sz="1250" dirty="0">
                         <a:latin typeface="Calibri" charset="0"/>
                         <a:ea typeface="Calibri" charset="0"/>
                         <a:cs typeface="Calibri" charset="0"/>
                       </a:endParaRPr>
                     </a:p>
                   </a:txBody>
-                  <a:tcPr marL="128016" marR="128016" marT="73152" marB="73152">
+                  <a:tcPr marL="109728" marR="109728" marT="54864" marB="54864">
                     <a:lnL w="9525" cap="flat" cmpd="sng" algn="ctr">
                       <a:solidFill>
                         <a:srgbClr val="E3DED7"/>
@@ -2517,7 +3286,7 @@
                   </a:tcPr>
                 </a:tc>
               </a:tr>
-              <a:tr h="475488">
+              <a:tr h="438912">
                 <a:tc>
                   <a:txBody>
                     <a:bodyPr/>
@@ -2527,7 +3296,7 @@
                         <a:buNone/>
                       </a:pPr>
                       <a:r>
-                        <a:rPr lang="en-US" sz="1300" b="1" dirty="0">
+                        <a:rPr lang="en-US" sz="1250" b="1" dirty="0">
                           <a:solidFill>
                             <a:srgbClr val="121826"/>
                           </a:solidFill>
@@ -2537,14 +3306,14 @@
                         </a:rPr>
                         <a:t>tNPS</a:t>
                       </a:r>
-                      <a:endParaRPr lang="en-US" sz="1300" dirty="0">
+                      <a:endParaRPr lang="en-US" sz="1250" dirty="0">
                         <a:latin typeface="Calibri" charset="0"/>
                         <a:ea typeface="Calibri" charset="0"/>
                         <a:cs typeface="Calibri" charset="0"/>
                       </a:endParaRPr>
                     </a:p>
                   </a:txBody>
-                  <a:tcPr marL="128016" marR="128016" marT="73152" marB="73152">
+                  <a:tcPr marL="109728" marR="109728" marT="54864" marB="54864">
                     <a:lnL w="9525" cap="flat" cmpd="sng" algn="ctr">
                       <a:solidFill>
                         <a:srgbClr val="E3DED7"/>
@@ -2595,7 +3364,7 @@
                         <a:buNone/>
                       </a:pPr>
                       <a:r>
-                        <a:rPr lang="en-US" sz="1300" b="1" dirty="0">
+                        <a:rPr lang="en-US" sz="1250" b="1" dirty="0">
                           <a:solidFill>
                             <a:srgbClr val="B42318"/>
                           </a:solidFill>
@@ -2605,14 +3374,14 @@
                         </a:rPr>
                         <a:t>10.4</a:t>
                       </a:r>
-                      <a:endParaRPr lang="en-US" sz="1300" dirty="0">
+                      <a:endParaRPr lang="en-US" sz="1250" dirty="0">
                         <a:latin typeface="Calibri" charset="0"/>
                         <a:ea typeface="Calibri" charset="0"/>
                         <a:cs typeface="Calibri" charset="0"/>
                       </a:endParaRPr>
                     </a:p>
                   </a:txBody>
-                  <a:tcPr marL="128016" marR="128016" marT="73152" marB="73152">
+                  <a:tcPr marL="109728" marR="109728" marT="54864" marB="54864">
                     <a:lnL w="9525" cap="flat" cmpd="sng" algn="ctr">
                       <a:solidFill>
                         <a:srgbClr val="E3DED7"/>
@@ -2663,7 +3432,7 @@
                         <a:buNone/>
                       </a:pPr>
                       <a:r>
-                        <a:rPr lang="en-US" sz="1300" dirty="0">
+                        <a:rPr lang="en-US" sz="1250" dirty="0">
                           <a:solidFill>
                             <a:srgbClr val="121826"/>
                           </a:solidFill>
@@ -2673,14 +3442,14 @@
                         </a:rPr>
                         <a:t>33 · leader 35</a:t>
                       </a:r>
-                      <a:endParaRPr lang="en-US" sz="1300" dirty="0">
+                      <a:endParaRPr lang="en-US" sz="1250" dirty="0">
                         <a:latin typeface="Calibri" charset="0"/>
                         <a:ea typeface="Calibri" charset="0"/>
                         <a:cs typeface="Calibri" charset="0"/>
                       </a:endParaRPr>
                     </a:p>
                   </a:txBody>
-                  <a:tcPr marL="128016" marR="128016" marT="73152" marB="73152">
+                  <a:tcPr marL="109728" marR="109728" marT="54864" marB="54864">
                     <a:lnL w="9525" cap="flat" cmpd="sng" algn="ctr">
                       <a:solidFill>
                         <a:srgbClr val="E3DED7"/>
@@ -2731,7 +3500,7 @@
                         <a:buNone/>
                       </a:pPr>
                       <a:r>
-                        <a:rPr lang="en-US" sz="1300" dirty="0">
+                        <a:rPr lang="en-US" sz="1250" b="1" dirty="0">
                           <a:solidFill>
                             <a:srgbClr val="B42318"/>
                           </a:solidFill>
@@ -2741,14 +3510,14 @@
                         </a:rPr>
                         <a:t>#11, low</a:t>
                       </a:r>
-                      <a:endParaRPr lang="en-US" sz="1300" dirty="0">
+                      <a:endParaRPr lang="en-US" sz="1250" dirty="0">
                         <a:latin typeface="Calibri" charset="0"/>
                         <a:ea typeface="Calibri" charset="0"/>
                         <a:cs typeface="Calibri" charset="0"/>
                       </a:endParaRPr>
                     </a:p>
                   </a:txBody>
-                  <a:tcPr marL="128016" marR="128016" marT="73152" marB="73152">
+                  <a:tcPr marL="109728" marR="109728" marT="54864" marB="54864">
                     <a:lnL w="9525" cap="flat" cmpd="sng" algn="ctr">
                       <a:solidFill>
                         <a:srgbClr val="E3DED7"/>
@@ -2799,7 +3568,7 @@
                         <a:buNone/>
                       </a:pPr>
                       <a:r>
-                        <a:rPr lang="en-US" sz="1300" dirty="0">
+                        <a:rPr lang="en-US" sz="1250" dirty="0">
                           <a:solidFill>
                             <a:srgbClr val="121826"/>
                           </a:solidFill>
@@ -2809,14 +3578,14 @@
                         </a:rPr>
                         <a:t>5 of 18</a:t>
                       </a:r>
-                      <a:endParaRPr lang="en-US" sz="1300" dirty="0">
+                      <a:endParaRPr lang="en-US" sz="1250" dirty="0">
                         <a:latin typeface="Calibri" charset="0"/>
                         <a:ea typeface="Calibri" charset="0"/>
                         <a:cs typeface="Calibri" charset="0"/>
                       </a:endParaRPr>
                     </a:p>
                   </a:txBody>
-                  <a:tcPr marL="128016" marR="128016" marT="73152" marB="73152">
+                  <a:tcPr marL="109728" marR="109728" marT="54864" marB="54864">
                     <a:lnL w="9525" cap="flat" cmpd="sng" algn="ctr">
                       <a:solidFill>
                         <a:srgbClr val="E3DED7"/>
@@ -2859,7 +3628,7 @@
                   </a:tcPr>
                 </a:tc>
               </a:tr>
-              <a:tr h="475488">
+              <a:tr h="438912">
                 <a:tc>
                   <a:txBody>
                     <a:bodyPr/>
@@ -2869,7 +3638,7 @@
                         <a:buNone/>
                       </a:pPr>
                       <a:r>
-                        <a:rPr lang="en-US" sz="1300" b="1" dirty="0">
+                        <a:rPr lang="en-US" sz="1250" b="1" dirty="0">
                           <a:solidFill>
                             <a:srgbClr val="121826"/>
                           </a:solidFill>
@@ -2879,14 +3648,14 @@
                         </a:rPr>
                         <a:t>aiCR</a:t>
                       </a:r>
-                      <a:endParaRPr lang="en-US" sz="1300" dirty="0">
+                      <a:endParaRPr lang="en-US" sz="1250" dirty="0">
                         <a:latin typeface="Calibri" charset="0"/>
                         <a:ea typeface="Calibri" charset="0"/>
                         <a:cs typeface="Calibri" charset="0"/>
                       </a:endParaRPr>
                     </a:p>
                   </a:txBody>
-                  <a:tcPr marL="128016" marR="128016" marT="73152" marB="73152">
+                  <a:tcPr marL="109728" marR="109728" marT="54864" marB="54864">
                     <a:lnL w="9525" cap="flat" cmpd="sng" algn="ctr">
                       <a:solidFill>
                         <a:srgbClr val="E3DED7"/>
@@ -2934,7 +3703,7 @@
                         <a:buNone/>
                       </a:pPr>
                       <a:r>
-                        <a:rPr lang="en-US" sz="1300" dirty="0">
+                        <a:rPr lang="en-US" sz="1250" dirty="0">
                           <a:solidFill>
                             <a:srgbClr val="121826"/>
                           </a:solidFill>
@@ -2944,14 +3713,14 @@
                         </a:rPr>
                         <a:t>61.2%</a:t>
                       </a:r>
-                      <a:endParaRPr lang="en-US" sz="1300" dirty="0">
+                      <a:endParaRPr lang="en-US" sz="1250" dirty="0">
                         <a:latin typeface="Calibri" charset="0"/>
                         <a:ea typeface="Calibri" charset="0"/>
                         <a:cs typeface="Calibri" charset="0"/>
                       </a:endParaRPr>
                     </a:p>
                   </a:txBody>
-                  <a:tcPr marL="128016" marR="128016" marT="73152" marB="73152">
+                  <a:tcPr marL="109728" marR="109728" marT="54864" marB="54864">
                     <a:lnL w="9525" cap="flat" cmpd="sng" algn="ctr">
                       <a:solidFill>
                         <a:srgbClr val="E3DED7"/>
@@ -2999,7 +3768,7 @@
                         <a:buNone/>
                       </a:pPr>
                       <a:r>
-                        <a:rPr lang="en-US" sz="1300" dirty="0">
+                        <a:rPr lang="en-US" sz="1250" dirty="0">
                           <a:solidFill>
                             <a:srgbClr val="121826"/>
                           </a:solidFill>
@@ -3009,14 +3778,14 @@
                         </a:rPr>
                         <a:t>62%</a:t>
                       </a:r>
-                      <a:endParaRPr lang="en-US" sz="1300" dirty="0">
+                      <a:endParaRPr lang="en-US" sz="1250" dirty="0">
                         <a:latin typeface="Calibri" charset="0"/>
                         <a:ea typeface="Calibri" charset="0"/>
                         <a:cs typeface="Calibri" charset="0"/>
                       </a:endParaRPr>
                     </a:p>
                   </a:txBody>
-                  <a:tcPr marL="128016" marR="128016" marT="73152" marB="73152">
+                  <a:tcPr marL="109728" marR="109728" marT="54864" marB="54864">
                     <a:lnL w="9525" cap="flat" cmpd="sng" algn="ctr">
                       <a:solidFill>
                         <a:srgbClr val="E3DED7"/>
@@ -3064,7 +3833,7 @@
                         <a:buNone/>
                       </a:pPr>
                       <a:r>
-                        <a:rPr lang="en-US" sz="1300" dirty="0">
+                        <a:rPr lang="en-US" sz="1250" b="1" dirty="0">
                           <a:solidFill>
                             <a:srgbClr val="1E7F5C"/>
                           </a:solidFill>
@@ -3074,14 +3843,14 @@
                         </a:rPr>
                         <a:t>#4, high</a:t>
                       </a:r>
-                      <a:endParaRPr lang="en-US" sz="1300" dirty="0">
+                      <a:endParaRPr lang="en-US" sz="1250" dirty="0">
                         <a:latin typeface="Calibri" charset="0"/>
                         <a:ea typeface="Calibri" charset="0"/>
                         <a:cs typeface="Calibri" charset="0"/>
                       </a:endParaRPr>
                     </a:p>
                   </a:txBody>
-                  <a:tcPr marL="128016" marR="128016" marT="73152" marB="73152">
+                  <a:tcPr marL="109728" marR="109728" marT="54864" marB="54864">
                     <a:lnL w="9525" cap="flat" cmpd="sng" algn="ctr">
                       <a:solidFill>
                         <a:srgbClr val="E3DED7"/>
@@ -3129,7 +3898,7 @@
                         <a:buNone/>
                       </a:pPr>
                       <a:r>
-                        <a:rPr lang="en-US" sz="1300" dirty="0">
+                        <a:rPr lang="en-US" sz="1250" dirty="0">
                           <a:solidFill>
                             <a:srgbClr val="121826"/>
                           </a:solidFill>
@@ -3139,14 +3908,14 @@
                         </a:rPr>
                         <a:t>6 of 18</a:t>
                       </a:r>
-                      <a:endParaRPr lang="en-US" sz="1300" dirty="0">
+                      <a:endParaRPr lang="en-US" sz="1250" dirty="0">
                         <a:latin typeface="Calibri" charset="0"/>
                         <a:ea typeface="Calibri" charset="0"/>
                         <a:cs typeface="Calibri" charset="0"/>
                       </a:endParaRPr>
                     </a:p>
                   </a:txBody>
-                  <a:tcPr marL="128016" marR="128016" marT="73152" marB="73152">
+                  <a:tcPr marL="109728" marR="109728" marT="54864" marB="54864">
                     <a:lnL w="9525" cap="flat" cmpd="sng" algn="ctr">
                       <a:solidFill>
                         <a:srgbClr val="E3DED7"/>
@@ -3186,7 +3955,7 @@
                   </a:tcPr>
                 </a:tc>
               </a:tr>
-              <a:tr h="475488">
+              <a:tr h="438912">
                 <a:tc>
                   <a:txBody>
                     <a:bodyPr/>
@@ -3196,7 +3965,7 @@
                         <a:buNone/>
                       </a:pPr>
                       <a:r>
-                        <a:rPr lang="en-US" sz="1300" b="1" dirty="0">
+                        <a:rPr lang="en-US" sz="1250" b="1" dirty="0">
                           <a:solidFill>
                             <a:srgbClr val="121826"/>
                           </a:solidFill>
@@ -3206,14 +3975,14 @@
                         </a:rPr>
                         <a:t>GSR 2026</a:t>
                       </a:r>
-                      <a:endParaRPr lang="en-US" sz="1300" dirty="0">
+                      <a:endParaRPr lang="en-US" sz="1250" dirty="0">
                         <a:latin typeface="Calibri" charset="0"/>
                         <a:ea typeface="Calibri" charset="0"/>
                         <a:cs typeface="Calibri" charset="0"/>
                       </a:endParaRPr>
                     </a:p>
                   </a:txBody>
-                  <a:tcPr marL="128016" marR="128016" marT="73152" marB="73152">
+                  <a:tcPr marL="109728" marR="109728" marT="54864" marB="54864">
                     <a:lnL w="9525" cap="flat" cmpd="sng" algn="ctr">
                       <a:solidFill>
                         <a:srgbClr val="E3DED7"/>
@@ -3261,7 +4030,7 @@
                         <a:buNone/>
                       </a:pPr>
                       <a:r>
-                        <a:rPr lang="en-US" sz="1300" dirty="0">
+                        <a:rPr lang="en-US" sz="1250" dirty="0">
                           <a:solidFill>
                             <a:srgbClr val="121826"/>
                           </a:solidFill>
@@ -3269,16 +4038,16 @@
                           <a:ea typeface="Calibri" pitchFamily="34" charset="-122"/>
                           <a:cs typeface="Calibri" pitchFamily="34" charset="-120"/>
                         </a:rPr>
-                        <a:t>6.2%</a:t>
+                        <a:t>6.15%</a:t>
                       </a:r>
-                      <a:endParaRPr lang="en-US" sz="1300" dirty="0">
+                      <a:endParaRPr lang="en-US" sz="1250" dirty="0">
                         <a:latin typeface="Calibri" charset="0"/>
                         <a:ea typeface="Calibri" charset="0"/>
                         <a:cs typeface="Calibri" charset="0"/>
                       </a:endParaRPr>
                     </a:p>
                   </a:txBody>
-                  <a:tcPr marL="128016" marR="128016" marT="73152" marB="73152">
+                  <a:tcPr marL="109728" marR="109728" marT="54864" marB="54864">
                     <a:lnL w="9525" cap="flat" cmpd="sng" algn="ctr">
                       <a:solidFill>
                         <a:srgbClr val="E3DED7"/>
@@ -3326,7 +4095,7 @@
                         <a:buNone/>
                       </a:pPr>
                       <a:r>
-                        <a:rPr lang="en-US" sz="1300" dirty="0">
+                        <a:rPr lang="en-US" sz="1250" dirty="0">
                           <a:solidFill>
                             <a:srgbClr val="121826"/>
                           </a:solidFill>
@@ -3336,14 +4105,14 @@
                         </a:rPr>
                         <a:t>8% · leader 9%</a:t>
                       </a:r>
-                      <a:endParaRPr lang="en-US" sz="1300" dirty="0">
+                      <a:endParaRPr lang="en-US" sz="1250" dirty="0">
                         <a:latin typeface="Calibri" charset="0"/>
                         <a:ea typeface="Calibri" charset="0"/>
                         <a:cs typeface="Calibri" charset="0"/>
                       </a:endParaRPr>
                     </a:p>
                   </a:txBody>
-                  <a:tcPr marL="128016" marR="128016" marT="73152" marB="73152">
+                  <a:tcPr marL="109728" marR="109728" marT="54864" marB="54864">
                     <a:lnL w="9525" cap="flat" cmpd="sng" algn="ctr">
                       <a:solidFill>
                         <a:srgbClr val="E3DED7"/>
@@ -3391,7 +4160,7 @@
                         <a:buNone/>
                       </a:pPr>
                       <a:r>
-                        <a:rPr lang="en-US" sz="1300" dirty="0">
+                        <a:rPr lang="en-US" sz="1250" b="1" dirty="0">
                           <a:solidFill>
                             <a:srgbClr val="1E7F5C"/>
                           </a:solidFill>
@@ -3401,14 +4170,14 @@
                         </a:rPr>
                         <a:t>#4, high</a:t>
                       </a:r>
-                      <a:endParaRPr lang="en-US" sz="1300" dirty="0">
+                      <a:endParaRPr lang="en-US" sz="1250" dirty="0">
                         <a:latin typeface="Calibri" charset="0"/>
                         <a:ea typeface="Calibri" charset="0"/>
                         <a:cs typeface="Calibri" charset="0"/>
                       </a:endParaRPr>
                     </a:p>
                   </a:txBody>
-                  <a:tcPr marL="128016" marR="128016" marT="73152" marB="73152">
+                  <a:tcPr marL="109728" marR="109728" marT="54864" marB="54864">
                     <a:lnL w="9525" cap="flat" cmpd="sng" algn="ctr">
                       <a:solidFill>
                         <a:srgbClr val="E3DED7"/>
@@ -3456,7 +4225,7 @@
                         <a:buNone/>
                       </a:pPr>
                       <a:r>
-                        <a:rPr lang="en-US" sz="1300" dirty="0">
+                        <a:rPr lang="en-US" sz="1250" dirty="0">
                           <a:solidFill>
                             <a:srgbClr val="121826"/>
                           </a:solidFill>
@@ -3466,14 +4235,14 @@
                         </a:rPr>
                         <a:t>4 of 18</a:t>
                       </a:r>
-                      <a:endParaRPr lang="en-US" sz="1300" dirty="0">
+                      <a:endParaRPr lang="en-US" sz="1250" dirty="0">
                         <a:latin typeface="Calibri" charset="0"/>
                         <a:ea typeface="Calibri" charset="0"/>
                         <a:cs typeface="Calibri" charset="0"/>
                       </a:endParaRPr>
                     </a:p>
                   </a:txBody>
-                  <a:tcPr marL="128016" marR="128016" marT="73152" marB="73152">
+                  <a:tcPr marL="109728" marR="109728" marT="54864" marB="54864">
                     <a:lnL w="9525" cap="flat" cmpd="sng" algn="ctr">
                       <a:solidFill>
                         <a:srgbClr val="E3DED7"/>
@@ -3513,7 +4282,7 @@
                   </a:tcPr>
                 </a:tc>
               </a:tr>
-              <a:tr h="475488">
+              <a:tr h="438912">
                 <a:tc>
                   <a:txBody>
                     <a:bodyPr/>
@@ -3523,7 +4292,7 @@
                         <a:buNone/>
                       </a:pPr>
                       <a:r>
-                        <a:rPr lang="en-US" sz="1300" b="1" dirty="0">
+                        <a:rPr lang="en-US" sz="1250" b="1" dirty="0">
                           <a:solidFill>
                             <a:srgbClr val="121826"/>
                           </a:solidFill>
@@ -3533,14 +4302,14 @@
                         </a:rPr>
                         <a:t>XM, 3+ lines</a:t>
                       </a:r>
-                      <a:endParaRPr lang="en-US" sz="1300" dirty="0">
+                      <a:endParaRPr lang="en-US" sz="1250" dirty="0">
                         <a:latin typeface="Calibri" charset="0"/>
                         <a:ea typeface="Calibri" charset="0"/>
                         <a:cs typeface="Calibri" charset="0"/>
                       </a:endParaRPr>
                     </a:p>
                   </a:txBody>
-                  <a:tcPr marL="128016" marR="128016" marT="73152" marB="73152">
+                  <a:tcPr marL="109728" marR="109728" marT="54864" marB="54864">
                     <a:lnL w="9525" cap="flat" cmpd="sng" algn="ctr">
                       <a:solidFill>
                         <a:srgbClr val="E3DED7"/>
@@ -3588,7 +4357,7 @@
                         <a:buNone/>
                       </a:pPr>
                       <a:r>
-                        <a:rPr lang="en-US" sz="1300" dirty="0">
+                        <a:rPr lang="en-US" sz="1250" dirty="0">
                           <a:solidFill>
                             <a:srgbClr val="121826"/>
                           </a:solidFill>
@@ -3598,14 +4367,14 @@
                         </a:rPr>
                         <a:t>50%</a:t>
                       </a:r>
-                      <a:endParaRPr lang="en-US" sz="1300" dirty="0">
+                      <a:endParaRPr lang="en-US" sz="1250" dirty="0">
                         <a:latin typeface="Calibri" charset="0"/>
                         <a:ea typeface="Calibri" charset="0"/>
                         <a:cs typeface="Calibri" charset="0"/>
                       </a:endParaRPr>
                     </a:p>
                   </a:txBody>
-                  <a:tcPr marL="128016" marR="128016" marT="73152" marB="73152">
+                  <a:tcPr marL="109728" marR="109728" marT="54864" marB="54864">
                     <a:lnL w="9525" cap="flat" cmpd="sng" algn="ctr">
                       <a:solidFill>
                         <a:srgbClr val="E3DED7"/>
@@ -3653,7 +4422,7 @@
                         <a:buNone/>
                       </a:pPr>
                       <a:r>
-                        <a:rPr lang="en-US" sz="1300" dirty="0">
+                        <a:rPr lang="en-US" sz="1250" dirty="0">
                           <a:solidFill>
                             <a:srgbClr val="121826"/>
                           </a:solidFill>
@@ -3663,14 +4432,14 @@
                         </a:rPr>
                         <a:t>100%</a:t>
                       </a:r>
-                      <a:endParaRPr lang="en-US" sz="1300" dirty="0">
+                      <a:endParaRPr lang="en-US" sz="1250" dirty="0">
                         <a:latin typeface="Calibri" charset="0"/>
                         <a:ea typeface="Calibri" charset="0"/>
                         <a:cs typeface="Calibri" charset="0"/>
                       </a:endParaRPr>
                     </a:p>
                   </a:txBody>
-                  <a:tcPr marL="128016" marR="128016" marT="73152" marB="73152">
+                  <a:tcPr marL="109728" marR="109728" marT="54864" marB="54864">
                     <a:lnL w="9525" cap="flat" cmpd="sng" algn="ctr">
                       <a:solidFill>
                         <a:srgbClr val="E3DED7"/>
@@ -3718,7 +4487,7 @@
                         <a:buNone/>
                       </a:pPr>
                       <a:r>
-                        <a:rPr lang="en-US" sz="1300" dirty="0">
+                        <a:rPr lang="en-US" sz="1250" b="1" dirty="0">
                           <a:solidFill>
                             <a:srgbClr val="1E7F5C"/>
                           </a:solidFill>
@@ -3728,14 +4497,14 @@
                         </a:rPr>
                         <a:t>#5, high</a:t>
                       </a:r>
-                      <a:endParaRPr lang="en-US" sz="1300" dirty="0">
+                      <a:endParaRPr lang="en-US" sz="1250" dirty="0">
                         <a:latin typeface="Calibri" charset="0"/>
                         <a:ea typeface="Calibri" charset="0"/>
                         <a:cs typeface="Calibri" charset="0"/>
                       </a:endParaRPr>
                     </a:p>
                   </a:txBody>
-                  <a:tcPr marL="128016" marR="128016" marT="73152" marB="73152">
+                  <a:tcPr marL="109728" marR="109728" marT="54864" marB="54864">
                     <a:lnL w="9525" cap="flat" cmpd="sng" algn="ctr">
                       <a:solidFill>
                         <a:srgbClr val="E3DED7"/>
@@ -3783,7 +4552,7 @@
                         <a:buNone/>
                       </a:pPr>
                       <a:r>
-                        <a:rPr lang="en-US" sz="1300" dirty="0">
+                        <a:rPr lang="en-US" sz="1250" dirty="0">
                           <a:solidFill>
                             <a:srgbClr val="121826"/>
                           </a:solidFill>
@@ -3793,14 +4562,14 @@
                         </a:rPr>
                         <a:t>7 of 18 hit 4</a:t>
                       </a:r>
-                      <a:endParaRPr lang="en-US" sz="1300" dirty="0">
+                      <a:endParaRPr lang="en-US" sz="1250" dirty="0">
                         <a:latin typeface="Calibri" charset="0"/>
                         <a:ea typeface="Calibri" charset="0"/>
                         <a:cs typeface="Calibri" charset="0"/>
                       </a:endParaRPr>
                     </a:p>
                   </a:txBody>
-                  <a:tcPr marL="128016" marR="128016" marT="73152" marB="73152">
+                  <a:tcPr marL="109728" marR="109728" marT="54864" marB="54864">
                     <a:lnL w="9525" cap="flat" cmpd="sng" algn="ctr">
                       <a:solidFill>
                         <a:srgbClr val="E3DED7"/>
@@ -3846,14 +4615,14 @@
       </p:graphicFrame>
       <p:sp>
         <p:nvSpPr>
-          <p:cNvPr id="5" name="Text 2"/>
+          <p:cNvPr id="5" name="Paragraph"/>
           <p:cNvSpPr txBox="1"/>
           <p:nvPr/>
         </p:nvSpPr>
         <p:spPr>
           <a:xfrm>
-            <a:off x="548640" y="4983480"/>
-            <a:ext cx="6949440" cy="548640"/>
+            <a:off x="548640" y="4315968"/>
+            <a:ext cx="6400800" cy="411480"/>
           </a:xfrm>
           <a:prstGeom prst="rect">
             <a:avLst/>
@@ -3877,7 +4646,7 @@
                   <a:srgbClr val="6B7280"/>
                 </a:solidFill>
               </a:rPr>
-              <a:t>October month to date, September 22 to October 14, TSX dashboard. Team tNPS is survey-weighted on 221 surveys.</a:t>
+              <a:t>October month to date, September 22 to October 14, TSX dashboard. Team tNPS is survey-weighted on 221 surveys. Leader score rank 10 of 15.</a:t>
             </a:r>
             <a:endParaRPr lang="en-US" sz="1100" dirty="0"/>
           </a:p>
@@ -3885,41 +4654,161 @@
       </p:sp>
       <p:sp>
         <p:nvSpPr>
-          <p:cNvPr id="6" name="Shape 3"/>
+          <p:cNvPr id="6" name="Context card"/>
           <p:cNvSpPr/>
           <p:nvPr/>
         </p:nvSpPr>
         <p:spPr>
           <a:xfrm>
-            <a:off x="7863840" y="2011680"/>
-            <a:ext cx="3776472" cy="4023360"/>
+            <a:off x="548640" y="4846320"/>
+            <a:ext cx="6400800" cy="1280160"/>
           </a:xfrm>
           <a:prstGeom prst="roundRect">
             <a:avLst>
-              <a:gd name="adj" fmla="val 4843"/>
+              <a:gd name="adj" fmla="val 14286"/>
             </a:avLst>
           </a:prstGeom>
           <a:solidFill>
             <a:srgbClr val="121826"/>
           </a:solidFill>
-          <a:ln w="12700">
+          <a:ln/>
+        </p:spPr>
+      </p:sp>
+      <p:sp>
+        <p:nvSpPr>
+          <p:cNvPr id="7" name="Icon circle"/>
+          <p:cNvSpPr/>
+          <p:nvPr/>
+        </p:nvSpPr>
+        <p:spPr>
+          <a:xfrm>
+            <a:off x="768096" y="5202936"/>
+            <a:ext cx="566928" cy="566928"/>
+          </a:xfrm>
+          <a:prstGeom prst="ellipse">
+            <a:avLst/>
+          </a:prstGeom>
+          <a:solidFill>
+            <a:srgbClr val="F26522"/>
+          </a:solidFill>
+          <a:ln/>
+        </p:spPr>
+      </p:sp>
+      <p:pic>
+        <p:nvPicPr>
+          <p:cNvPr id="8" name="Icon" descr="preencoded.png">    </p:cNvPr>
+          <p:cNvPicPr>
+            <a:picLocks noChangeAspect="1"/>
+          </p:cNvPicPr>
+          <p:nvPr/>
+        </p:nvPicPr>
+        <p:blipFill>
+          <a:blip r:embed="rId1"/>
+          <a:stretch>
+            <a:fillRect/>
+          </a:stretch>
+        </p:blipFill>
+        <p:spPr>
+          <a:xfrm>
+            <a:off x="904159" y="5338999"/>
+            <a:ext cx="294803" cy="294803"/>
+          </a:xfrm>
+          <a:prstGeom prst="rect">
+            <a:avLst/>
+          </a:prstGeom>
+        </p:spPr>
+      </p:pic>
+      <p:sp>
+        <p:nvSpPr>
+          <p:cNvPr id="9" name="Context text"/>
+          <p:cNvSpPr txBox="1"/>
+          <p:nvPr/>
+        </p:nvSpPr>
+        <p:spPr>
+          <a:xfrm>
+            <a:off x="1554480" y="4956048"/>
+            <a:ext cx="5166360" cy="1060704"/>
+          </a:xfrm>
+          <a:prstGeom prst="rect">
+            <a:avLst/>
+          </a:prstGeom>
+          <a:noFill/>
+          <a:ln/>
+        </p:spPr>
+        <p:txBody>
+          <a:bodyPr wrap="square" lIns="0" tIns="0" rIns="0" bIns="0" rtlCol="0" anchor="ctr"/>
+          <a:lstStyle/>
+          <a:p>
+            <a:pPr indent="0" marL="0">
+              <a:buNone/>
+            </a:pPr>
+            <a:r>
+              <a:rPr lang="en-US" sz="1250" b="1" dirty="0">
+                <a:solidFill>
+                  <a:srgbClr val="FFFFFF"/>
+                </a:solidFill>
+              </a:rPr>
+              <a:t>Context, not excuse. </a:t>
+            </a:r>
+            <a:pPr indent="0" marL="0">
+              <a:buNone/>
+            </a:pPr>
+            <a:r>
+              <a:rPr lang="en-US" sz="1250" dirty="0">
+                <a:solidFill>
+                  <a:srgbClr val="D9DDE6"/>
+                </a:solidFill>
+              </a:rPr>
+              <a:t>Every cohort under 30 days sits between −15 and +12 on tNPS, so this is a tenure-stage problem and the plan attacks it. Surveys per agent run 7 to 18, so one survey moves an agent by 6 to 14 points.</a:t>
+            </a:r>
+            <a:endParaRPr lang="en-US" sz="1250" dirty="0"/>
+          </a:p>
+        </p:txBody>
+      </p:sp>
+      <p:sp>
+        <p:nvSpPr>
+          <p:cNvPr id="10" name="Chart card"/>
+          <p:cNvSpPr/>
+          <p:nvPr/>
+        </p:nvSpPr>
+        <p:spPr>
+          <a:xfrm>
+            <a:off x="7223760" y="2011680"/>
+            <a:ext cx="4419295" cy="4114800"/>
+          </a:xfrm>
+          <a:prstGeom prst="roundRect">
+            <a:avLst>
+              <a:gd name="adj" fmla="val 4444"/>
+            </a:avLst>
+          </a:prstGeom>
+          <a:solidFill>
+            <a:srgbClr val="FFFFFF"/>
+          </a:solidFill>
+          <a:ln w="9525">
             <a:solidFill>
-              <a:srgbClr val="121826"/>
+              <a:srgbClr val="E3DED7"/>
             </a:solidFill>
             <a:prstDash val="solid"/>
           </a:ln>
-        </p:spPr>
-      </p:sp>
-      <p:sp>
-        <p:nvSpPr>
-          <p:cNvPr id="7" name="Text 4"/>
+          <a:effectLst>
+            <a:outerShdw sx="100000" sy="100000" kx="0" ky="0" algn="bl" rotWithShape="0" blurRad="76200" dist="25400" dir="5400000">
+              <a:srgbClr val="000000">
+                <a:alpha val="8000"/>
+              </a:srgbClr>
+            </a:outerShdw>
+          </a:effectLst>
+        </p:spPr>
+      </p:sp>
+      <p:sp>
+        <p:nvSpPr>
+          <p:cNvPr id="11" name="Chart heading"/>
           <p:cNvSpPr txBox="1"/>
           <p:nvPr/>
         </p:nvSpPr>
         <p:spPr>
           <a:xfrm>
-            <a:off x="8092440" y="2176272"/>
-            <a:ext cx="3383280" cy="365760"/>
+            <a:off x="7452360" y="2176272"/>
+            <a:ext cx="3962095" cy="292608"/>
           </a:xfrm>
           <a:prstGeom prst="rect">
             <a:avLst/>
@@ -3935,27 +4824,27 @@
               <a:buNone/>
             </a:pPr>
             <a:r>
-              <a:rPr lang="en-US" sz="1500" b="1" dirty="0">
-                <a:solidFill>
-                  <a:srgbClr val="F26522"/>
-                </a:solidFill>
-              </a:rPr>
-              <a:t>Against the other new-hire cohorts</a:t>
-            </a:r>
-            <a:endParaRPr lang="en-US" sz="1500" dirty="0"/>
-          </a:p>
-        </p:txBody>
-      </p:sp>
-      <p:sp>
-        <p:nvSpPr>
-          <p:cNvPr id="8" name="Text 5"/>
+              <a:rPr lang="en-US" sz="1400" b="1" dirty="0">
+                <a:solidFill>
+                  <a:srgbClr val="121826"/>
+                </a:solidFill>
+              </a:rPr>
+              <a:t>tNPS by cohort and the whole LOB, October MTD</a:t>
+            </a:r>
+            <a:endParaRPr lang="en-US" sz="1400" dirty="0"/>
+          </a:p>
+        </p:txBody>
+      </p:sp>
+      <p:sp>
+        <p:nvSpPr>
+          <p:cNvPr id="12" name="Chart caption"/>
           <p:cNvSpPr txBox="1"/>
           <p:nvPr/>
         </p:nvSpPr>
         <p:spPr>
           <a:xfrm>
-            <a:off x="8092440" y="2578608"/>
-            <a:ext cx="3383280" cy="777240"/>
+            <a:off x="7452360" y="2468880"/>
+            <a:ext cx="3962095" cy="256032"/>
           </a:xfrm>
           <a:prstGeom prst="rect">
             <a:avLst/>
@@ -3964,1420 +4853,40 @@
           <a:ln/>
         </p:spPr>
         <p:txBody>
-          <a:bodyPr wrap="square" lIns="0" tIns="0" rIns="0" bIns="0" rtlCol="0" anchor="t"/>
+          <a:bodyPr wrap="square" lIns="0" tIns="0" rIns="0" bIns="0" rtlCol="0" anchor="ctr"/>
           <a:lstStyle/>
           <a:p>
             <a:pPr indent="0" marL="0">
-              <a:spcAft>
-                <a:spcPts val="400"/>
-              </a:spcAft>
-              <a:buNone/>
-            </a:pPr>
-            <a:r>
-              <a:rPr lang="en-US" sz="1250" dirty="0">
-                <a:solidFill>
-                  <a:srgbClr val="D9DDE6"/>
-                </a:solidFill>
-              </a:rPr>
-              <a:t>Every cohort under 30 days sits between −15 and +12 on tNPS. Mine leads the three on aiCR, GSR and XM.</a:t>
-            </a:r>
-            <a:endParaRPr lang="en-US" sz="1250" dirty="0"/>
+              <a:buNone/>
+            </a:pPr>
+            <a:r>
+              <a:rPr lang="en-US" sz="1100" dirty="0">
+                <a:solidFill>
+                  <a:srgbClr val="6B7280"/>
+                </a:solidFill>
+              </a:rPr>
+              <a:t>My team is 10.4; the dashed line is the agent target of 33</a:t>
+            </a:r>
+            <a:endParaRPr lang="en-US" sz="1100" dirty="0"/>
           </a:p>
         </p:txBody>
       </p:sp>
       <p:graphicFrame>
         <p:nvGraphicFramePr>
-          <p:cNvPr id="5" name="Table 1"/>
-          <p:cNvGraphicFramePr>
-            <a:graphicFrameLocks noGrp="1"/>
-          </p:cNvGraphicFramePr>
-          <p:nvPr>
-            <p:extLst>
-              <p:ext uri="{D42A27DB-BD31-4B8C-83A1-F6EECF244321}">
-                <p14:modId xmlns:p14="http://schemas.microsoft.com/office/powerpoint/2010/main" val="1579011935"/>
-              </p:ext>
-            </p:extLst>
-          </p:nvPr>
+          <p:cNvPr id="13" name="tNPS by cohort chart" descr=""/>
+          <p:cNvGraphicFramePr/>
+          <p:nvPr/>
         </p:nvGraphicFramePr>
         <p:xfrm>
-          <a:off x="8092440" y="3474720"/>
-          <a:ext cx="3337560" cy="914400"/>
+          <a:off x="7296912" y="2788920"/>
+          <a:ext cx="4272991" cy="3200400"/>
         </p:xfrm>
-        <a:graphic>
-          <a:graphicData uri="http://schemas.openxmlformats.org/drawingml/2006/table">
-            <a:tbl>
-              <a:tblPr/>
-              <a:tblGrid>
-                <a:gridCol w="1325880"/>
-                <a:gridCol w="640080"/>
-                <a:gridCol w="685800"/>
-                <a:gridCol w="685800"/>
-              </a:tblGrid>
-              <a:tr h="347472">
-                <a:tc>
-                  <a:txBody>
-                    <a:bodyPr/>
-                    <a:lstStyle/>
-                    <a:p>
-                      <a:pPr algn="l" indent="0" marL="0">
-                        <a:buNone/>
-                      </a:pPr>
-                      <a:r>
-                        <a:rPr lang="en-US" sz="1100" b="1" dirty="0">
-                          <a:solidFill>
-                            <a:srgbClr val="8C96AC"/>
-                          </a:solidFill>
-                          <a:latin typeface="Calibri" pitchFamily="34" charset="0"/>
-                          <a:ea typeface="Calibri" pitchFamily="34" charset="-122"/>
-                          <a:cs typeface="Calibri" pitchFamily="34" charset="-120"/>
-                        </a:rPr>
-                        <a:t>Cohort</a:t>
-                      </a:r>
-                      <a:endParaRPr lang="en-US" sz="1100" dirty="0">
-                        <a:latin typeface="Calibri" charset="0"/>
-                        <a:ea typeface="Calibri" charset="0"/>
-                        <a:cs typeface="Calibri" charset="0"/>
-                      </a:endParaRPr>
-                    </a:p>
-                  </a:txBody>
-                  <a:tcPr marL="73152" marR="73152" marT="36576" marB="36576">
-                    <a:lnL w="6350" cap="flat" cmpd="sng" algn="ctr">
-                      <a:solidFill>
-                        <a:srgbClr val="2A3449"/>
-                      </a:solidFill>
-                      <a:prstDash val="solid"/>
-                      <a:round/>
-                      <a:headEnd type="none" w="med" len="med"/>
-                      <a:tailEnd type="none" w="med" len="med"/>
-                    </a:lnL>
-                    <a:lnR w="6350" cap="flat" cmpd="sng" algn="ctr">
-                      <a:solidFill>
-                        <a:srgbClr val="2A3449"/>
-                      </a:solidFill>
-                      <a:prstDash val="solid"/>
-                      <a:round/>
-                      <a:headEnd type="none" w="med" len="med"/>
-                      <a:tailEnd type="none" w="med" len="med"/>
-                    </a:lnR>
-                    <a:lnT w="6350" cap="flat" cmpd="sng" algn="ctr">
-                      <a:solidFill>
-                        <a:srgbClr val="2A3449"/>
-                      </a:solidFill>
-                      <a:prstDash val="solid"/>
-                      <a:round/>
-                      <a:headEnd type="none" w="med" len="med"/>
-                      <a:tailEnd type="none" w="med" len="med"/>
-                    </a:lnT>
-                    <a:lnB w="6350" cap="flat" cmpd="sng" algn="ctr">
-                      <a:solidFill>
-                        <a:srgbClr val="2A3449"/>
-                      </a:solidFill>
-                      <a:prstDash val="solid"/>
-                      <a:round/>
-                      <a:headEnd type="none" w="med" len="med"/>
-                      <a:tailEnd type="none" w="med" len="med"/>
-                    </a:lnB>
-                  </a:tcPr>
-                </a:tc>
-                <a:tc>
-                  <a:txBody>
-                    <a:bodyPr/>
-                    <a:lstStyle/>
-                    <a:p>
-                      <a:pPr algn="r" indent="0" marL="0">
-                        <a:buNone/>
-                      </a:pPr>
-                      <a:r>
-                        <a:rPr lang="en-US" sz="1100" b="1" dirty="0">
-                          <a:solidFill>
-                            <a:srgbClr val="8C96AC"/>
-                          </a:solidFill>
-                          <a:latin typeface="Calibri" pitchFamily="34" charset="0"/>
-                          <a:ea typeface="Calibri" pitchFamily="34" charset="-122"/>
-                          <a:cs typeface="Calibri" pitchFamily="34" charset="-120"/>
-                        </a:rPr>
-                        <a:t>tNPS</a:t>
-                      </a:r>
-                      <a:endParaRPr lang="en-US" sz="1100" dirty="0">
-                        <a:latin typeface="Calibri" charset="0"/>
-                        <a:ea typeface="Calibri" charset="0"/>
-                        <a:cs typeface="Calibri" charset="0"/>
-                      </a:endParaRPr>
-                    </a:p>
-                  </a:txBody>
-                  <a:tcPr marL="73152" marR="73152" marT="36576" marB="36576">
-                    <a:lnL w="6350" cap="flat" cmpd="sng" algn="ctr">
-                      <a:solidFill>
-                        <a:srgbClr val="2A3449"/>
-                      </a:solidFill>
-                      <a:prstDash val="solid"/>
-                      <a:round/>
-                      <a:headEnd type="none" w="med" len="med"/>
-                      <a:tailEnd type="none" w="med" len="med"/>
-                    </a:lnL>
-                    <a:lnR w="6350" cap="flat" cmpd="sng" algn="ctr">
-                      <a:solidFill>
-                        <a:srgbClr val="2A3449"/>
-                      </a:solidFill>
-                      <a:prstDash val="solid"/>
-                      <a:round/>
-                      <a:headEnd type="none" w="med" len="med"/>
-                      <a:tailEnd type="none" w="med" len="med"/>
-                    </a:lnR>
-                    <a:lnT w="6350" cap="flat" cmpd="sng" algn="ctr">
-                      <a:solidFill>
-                        <a:srgbClr val="2A3449"/>
-                      </a:solidFill>
-                      <a:prstDash val="solid"/>
-                      <a:round/>
-                      <a:headEnd type="none" w="med" len="med"/>
-                      <a:tailEnd type="none" w="med" len="med"/>
-                    </a:lnT>
-                    <a:lnB w="6350" cap="flat" cmpd="sng" algn="ctr">
-                      <a:solidFill>
-                        <a:srgbClr val="2A3449"/>
-                      </a:solidFill>
-                      <a:prstDash val="solid"/>
-                      <a:round/>
-                      <a:headEnd type="none" w="med" len="med"/>
-                      <a:tailEnd type="none" w="med" len="med"/>
-                    </a:lnB>
-                  </a:tcPr>
-                </a:tc>
-                <a:tc>
-                  <a:txBody>
-                    <a:bodyPr/>
-                    <a:lstStyle/>
-                    <a:p>
-                      <a:pPr algn="r" indent="0" marL="0">
-                        <a:buNone/>
-                      </a:pPr>
-                      <a:r>
-                        <a:rPr lang="en-US" sz="1100" b="1" dirty="0">
-                          <a:solidFill>
-                            <a:srgbClr val="8C96AC"/>
-                          </a:solidFill>
-                          <a:latin typeface="Calibri" pitchFamily="34" charset="0"/>
-                          <a:ea typeface="Calibri" pitchFamily="34" charset="-122"/>
-                          <a:cs typeface="Calibri" pitchFamily="34" charset="-120"/>
-                        </a:rPr>
-                        <a:t>aiCR</a:t>
-                      </a:r>
-                      <a:endParaRPr lang="en-US" sz="1100" dirty="0">
-                        <a:latin typeface="Calibri" charset="0"/>
-                        <a:ea typeface="Calibri" charset="0"/>
-                        <a:cs typeface="Calibri" charset="0"/>
-                      </a:endParaRPr>
-                    </a:p>
-                  </a:txBody>
-                  <a:tcPr marL="73152" marR="73152" marT="36576" marB="36576">
-                    <a:lnL w="6350" cap="flat" cmpd="sng" algn="ctr">
-                      <a:solidFill>
-                        <a:srgbClr val="2A3449"/>
-                      </a:solidFill>
-                      <a:prstDash val="solid"/>
-                      <a:round/>
-                      <a:headEnd type="none" w="med" len="med"/>
-                      <a:tailEnd type="none" w="med" len="med"/>
-                    </a:lnL>
-                    <a:lnR w="6350" cap="flat" cmpd="sng" algn="ctr">
-                      <a:solidFill>
-                        <a:srgbClr val="2A3449"/>
-                      </a:solidFill>
-                      <a:prstDash val="solid"/>
-                      <a:round/>
-                      <a:headEnd type="none" w="med" len="med"/>
-                      <a:tailEnd type="none" w="med" len="med"/>
-                    </a:lnR>
-                    <a:lnT w="6350" cap="flat" cmpd="sng" algn="ctr">
-                      <a:solidFill>
-                        <a:srgbClr val="2A3449"/>
-                      </a:solidFill>
-                      <a:prstDash val="solid"/>
-                      <a:round/>
-                      <a:headEnd type="none" w="med" len="med"/>
-                      <a:tailEnd type="none" w="med" len="med"/>
-                    </a:lnT>
-                    <a:lnB w="6350" cap="flat" cmpd="sng" algn="ctr">
-                      <a:solidFill>
-                        <a:srgbClr val="2A3449"/>
-                      </a:solidFill>
-                      <a:prstDash val="solid"/>
-                      <a:round/>
-                      <a:headEnd type="none" w="med" len="med"/>
-                      <a:tailEnd type="none" w="med" len="med"/>
-                    </a:lnB>
-                  </a:tcPr>
-                </a:tc>
-                <a:tc>
-                  <a:txBody>
-                    <a:bodyPr/>
-                    <a:lstStyle/>
-                    <a:p>
-                      <a:pPr algn="r" indent="0" marL="0">
-                        <a:buNone/>
-                      </a:pPr>
-                      <a:r>
-                        <a:rPr lang="en-US" sz="1100" b="1" dirty="0">
-                          <a:solidFill>
-                            <a:srgbClr val="8C96AC"/>
-                          </a:solidFill>
-                          <a:latin typeface="Calibri" pitchFamily="34" charset="0"/>
-                          <a:ea typeface="Calibri" pitchFamily="34" charset="-122"/>
-                          <a:cs typeface="Calibri" pitchFamily="34" charset="-120"/>
-                        </a:rPr>
-                        <a:t>GSR</a:t>
-                      </a:r>
-                      <a:endParaRPr lang="en-US" sz="1100" dirty="0">
-                        <a:latin typeface="Calibri" charset="0"/>
-                        <a:ea typeface="Calibri" charset="0"/>
-                        <a:cs typeface="Calibri" charset="0"/>
-                      </a:endParaRPr>
-                    </a:p>
-                  </a:txBody>
-                  <a:tcPr marL="73152" marR="73152" marT="36576" marB="36576">
-                    <a:lnL w="6350" cap="flat" cmpd="sng" algn="ctr">
-                      <a:solidFill>
-                        <a:srgbClr val="2A3449"/>
-                      </a:solidFill>
-                      <a:prstDash val="solid"/>
-                      <a:round/>
-                      <a:headEnd type="none" w="med" len="med"/>
-                      <a:tailEnd type="none" w="med" len="med"/>
-                    </a:lnL>
-                    <a:lnR w="6350" cap="flat" cmpd="sng" algn="ctr">
-                      <a:solidFill>
-                        <a:srgbClr val="2A3449"/>
-                      </a:solidFill>
-                      <a:prstDash val="solid"/>
-                      <a:round/>
-                      <a:headEnd type="none" w="med" len="med"/>
-                      <a:tailEnd type="none" w="med" len="med"/>
-                    </a:lnR>
-                    <a:lnT w="6350" cap="flat" cmpd="sng" algn="ctr">
-                      <a:solidFill>
-                        <a:srgbClr val="2A3449"/>
-                      </a:solidFill>
-                      <a:prstDash val="solid"/>
-                      <a:round/>
-                      <a:headEnd type="none" w="med" len="med"/>
-                      <a:tailEnd type="none" w="med" len="med"/>
-                    </a:lnT>
-                    <a:lnB w="6350" cap="flat" cmpd="sng" algn="ctr">
-                      <a:solidFill>
-                        <a:srgbClr val="2A3449"/>
-                      </a:solidFill>
-                      <a:prstDash val="solid"/>
-                      <a:round/>
-                      <a:headEnd type="none" w="med" len="med"/>
-                      <a:tailEnd type="none" w="med" len="med"/>
-                    </a:lnB>
-                  </a:tcPr>
-                </a:tc>
-              </a:tr>
-              <a:tr h="347472">
-                <a:tc>
-                  <a:txBody>
-                    <a:bodyPr/>
-                    <a:lstStyle/>
-                    <a:p>
-                      <a:pPr algn="l" indent="0" marL="0">
-                        <a:buNone/>
-                      </a:pPr>
-                      <a:r>
-                        <a:rPr lang="en-US" sz="1200" b="1" dirty="0">
-                          <a:solidFill>
-                            <a:srgbClr val="FFFFFF"/>
-                          </a:solidFill>
-                          <a:latin typeface="Calibri" pitchFamily="34" charset="0"/>
-                          <a:ea typeface="Calibri" pitchFamily="34" charset="-122"/>
-                          <a:cs typeface="Calibri" pitchFamily="34" charset="-120"/>
-                        </a:rPr>
-                        <a:t>Mine, Temp 1</a:t>
-                      </a:r>
-                      <a:endParaRPr lang="en-US" sz="1200" dirty="0">
-                        <a:latin typeface="Calibri" charset="0"/>
-                        <a:ea typeface="Calibri" charset="0"/>
-                        <a:cs typeface="Calibri" charset="0"/>
-                      </a:endParaRPr>
-                    </a:p>
-                  </a:txBody>
-                  <a:tcPr marL="73152" marR="73152" marT="36576" marB="36576">
-                    <a:lnL w="6350" cap="flat" cmpd="sng" algn="ctr">
-                      <a:solidFill>
-                        <a:srgbClr val="2A3449"/>
-                      </a:solidFill>
-                      <a:prstDash val="solid"/>
-                      <a:round/>
-                      <a:headEnd type="none" w="med" len="med"/>
-                      <a:tailEnd type="none" w="med" len="med"/>
-                    </a:lnL>
-                    <a:lnR w="6350" cap="flat" cmpd="sng" algn="ctr">
-                      <a:solidFill>
-                        <a:srgbClr val="2A3449"/>
-                      </a:solidFill>
-                      <a:prstDash val="solid"/>
-                      <a:round/>
-                      <a:headEnd type="none" w="med" len="med"/>
-                      <a:tailEnd type="none" w="med" len="med"/>
-                    </a:lnR>
-                    <a:lnT w="6350" cap="flat" cmpd="sng" algn="ctr">
-                      <a:solidFill>
-                        <a:srgbClr val="2A3449"/>
-                      </a:solidFill>
-                      <a:prstDash val="solid"/>
-                      <a:round/>
-                      <a:headEnd type="none" w="med" len="med"/>
-                      <a:tailEnd type="none" w="med" len="med"/>
-                    </a:lnT>
-                    <a:lnB w="6350" cap="flat" cmpd="sng" algn="ctr">
-                      <a:solidFill>
-                        <a:srgbClr val="2A3449"/>
-                      </a:solidFill>
-                      <a:prstDash val="solid"/>
-                      <a:round/>
-                      <a:headEnd type="none" w="med" len="med"/>
-                      <a:tailEnd type="none" w="med" len="med"/>
-                    </a:lnB>
-                    <a:solidFill>
-                      <a:srgbClr val="1C2437"/>
-                    </a:solidFill>
-                  </a:tcPr>
-                </a:tc>
-                <a:tc>
-                  <a:txBody>
-                    <a:bodyPr/>
-                    <a:lstStyle/>
-                    <a:p>
-                      <a:pPr algn="r" indent="0" marL="0">
-                        <a:buNone/>
-                      </a:pPr>
-                      <a:r>
-                        <a:rPr lang="en-US" sz="1200" b="1" dirty="0">
-                          <a:solidFill>
-                            <a:srgbClr val="FFFFFF"/>
-                          </a:solidFill>
-                          <a:latin typeface="Calibri" pitchFamily="34" charset="0"/>
-                          <a:ea typeface="Calibri" pitchFamily="34" charset="-122"/>
-                          <a:cs typeface="Calibri" pitchFamily="34" charset="-120"/>
-                        </a:rPr>
-                        <a:t>10.4</a:t>
-                      </a:r>
-                      <a:endParaRPr lang="en-US" sz="1200" dirty="0">
-                        <a:latin typeface="Calibri" charset="0"/>
-                        <a:ea typeface="Calibri" charset="0"/>
-                        <a:cs typeface="Calibri" charset="0"/>
-                      </a:endParaRPr>
-                    </a:p>
-                  </a:txBody>
-                  <a:tcPr marL="73152" marR="73152" marT="36576" marB="36576">
-                    <a:lnL w="6350" cap="flat" cmpd="sng" algn="ctr">
-                      <a:solidFill>
-                        <a:srgbClr val="2A3449"/>
-                      </a:solidFill>
-                      <a:prstDash val="solid"/>
-                      <a:round/>
-                      <a:headEnd type="none" w="med" len="med"/>
-                      <a:tailEnd type="none" w="med" len="med"/>
-                    </a:lnL>
-                    <a:lnR w="6350" cap="flat" cmpd="sng" algn="ctr">
-                      <a:solidFill>
-                        <a:srgbClr val="2A3449"/>
-                      </a:solidFill>
-                      <a:prstDash val="solid"/>
-                      <a:round/>
-                      <a:headEnd type="none" w="med" len="med"/>
-                      <a:tailEnd type="none" w="med" len="med"/>
-                    </a:lnR>
-                    <a:lnT w="6350" cap="flat" cmpd="sng" algn="ctr">
-                      <a:solidFill>
-                        <a:srgbClr val="2A3449"/>
-                      </a:solidFill>
-                      <a:prstDash val="solid"/>
-                      <a:round/>
-                      <a:headEnd type="none" w="med" len="med"/>
-                      <a:tailEnd type="none" w="med" len="med"/>
-                    </a:lnT>
-                    <a:lnB w="6350" cap="flat" cmpd="sng" algn="ctr">
-                      <a:solidFill>
-                        <a:srgbClr val="2A3449"/>
-                      </a:solidFill>
-                      <a:prstDash val="solid"/>
-                      <a:round/>
-                      <a:headEnd type="none" w="med" len="med"/>
-                      <a:tailEnd type="none" w="med" len="med"/>
-                    </a:lnB>
-                    <a:solidFill>
-                      <a:srgbClr val="1C2437"/>
-                    </a:solidFill>
-                  </a:tcPr>
-                </a:tc>
-                <a:tc>
-                  <a:txBody>
-                    <a:bodyPr/>
-                    <a:lstStyle/>
-                    <a:p>
-                      <a:pPr algn="r" indent="0" marL="0">
-                        <a:buNone/>
-                      </a:pPr>
-                      <a:r>
-                        <a:rPr lang="en-US" sz="1200" b="1" dirty="0">
-                          <a:solidFill>
-                            <a:srgbClr val="FFFFFF"/>
-                          </a:solidFill>
-                          <a:latin typeface="Calibri" pitchFamily="34" charset="0"/>
-                          <a:ea typeface="Calibri" pitchFamily="34" charset="-122"/>
-                          <a:cs typeface="Calibri" pitchFamily="34" charset="-120"/>
-                        </a:rPr>
-                        <a:t>61.2%</a:t>
-                      </a:r>
-                      <a:endParaRPr lang="en-US" sz="1200" dirty="0">
-                        <a:latin typeface="Calibri" charset="0"/>
-                        <a:ea typeface="Calibri" charset="0"/>
-                        <a:cs typeface="Calibri" charset="0"/>
-                      </a:endParaRPr>
-                    </a:p>
-                  </a:txBody>
-                  <a:tcPr marL="73152" marR="73152" marT="36576" marB="36576">
-                    <a:lnL w="6350" cap="flat" cmpd="sng" algn="ctr">
-                      <a:solidFill>
-                        <a:srgbClr val="2A3449"/>
-                      </a:solidFill>
-                      <a:prstDash val="solid"/>
-                      <a:round/>
-                      <a:headEnd type="none" w="med" len="med"/>
-                      <a:tailEnd type="none" w="med" len="med"/>
-                    </a:lnL>
-                    <a:lnR w="6350" cap="flat" cmpd="sng" algn="ctr">
-                      <a:solidFill>
-                        <a:srgbClr val="2A3449"/>
-                      </a:solidFill>
-                      <a:prstDash val="solid"/>
-                      <a:round/>
-                      <a:headEnd type="none" w="med" len="med"/>
-                      <a:tailEnd type="none" w="med" len="med"/>
-                    </a:lnR>
-                    <a:lnT w="6350" cap="flat" cmpd="sng" algn="ctr">
-                      <a:solidFill>
-                        <a:srgbClr val="2A3449"/>
-                      </a:solidFill>
-                      <a:prstDash val="solid"/>
-                      <a:round/>
-                      <a:headEnd type="none" w="med" len="med"/>
-                      <a:tailEnd type="none" w="med" len="med"/>
-                    </a:lnT>
-                    <a:lnB w="6350" cap="flat" cmpd="sng" algn="ctr">
-                      <a:solidFill>
-                        <a:srgbClr val="2A3449"/>
-                      </a:solidFill>
-                      <a:prstDash val="solid"/>
-                      <a:round/>
-                      <a:headEnd type="none" w="med" len="med"/>
-                      <a:tailEnd type="none" w="med" len="med"/>
-                    </a:lnB>
-                    <a:solidFill>
-                      <a:srgbClr val="1C2437"/>
-                    </a:solidFill>
-                  </a:tcPr>
-                </a:tc>
-                <a:tc>
-                  <a:txBody>
-                    <a:bodyPr/>
-                    <a:lstStyle/>
-                    <a:p>
-                      <a:pPr algn="r" indent="0" marL="0">
-                        <a:buNone/>
-                      </a:pPr>
-                      <a:r>
-                        <a:rPr lang="en-US" sz="1200" b="1" dirty="0">
-                          <a:solidFill>
-                            <a:srgbClr val="FFFFFF"/>
-                          </a:solidFill>
-                          <a:latin typeface="Calibri" pitchFamily="34" charset="0"/>
-                          <a:ea typeface="Calibri" pitchFamily="34" charset="-122"/>
-                          <a:cs typeface="Calibri" pitchFamily="34" charset="-120"/>
-                        </a:rPr>
-                        <a:t>6.2%</a:t>
-                      </a:r>
-                      <a:endParaRPr lang="en-US" sz="1200" dirty="0">
-                        <a:latin typeface="Calibri" charset="0"/>
-                        <a:ea typeface="Calibri" charset="0"/>
-                        <a:cs typeface="Calibri" charset="0"/>
-                      </a:endParaRPr>
-                    </a:p>
-                  </a:txBody>
-                  <a:tcPr marL="73152" marR="73152" marT="36576" marB="36576">
-                    <a:lnL w="6350" cap="flat" cmpd="sng" algn="ctr">
-                      <a:solidFill>
-                        <a:srgbClr val="2A3449"/>
-                      </a:solidFill>
-                      <a:prstDash val="solid"/>
-                      <a:round/>
-                      <a:headEnd type="none" w="med" len="med"/>
-                      <a:tailEnd type="none" w="med" len="med"/>
-                    </a:lnL>
-                    <a:lnR w="6350" cap="flat" cmpd="sng" algn="ctr">
-                      <a:solidFill>
-                        <a:srgbClr val="2A3449"/>
-                      </a:solidFill>
-                      <a:prstDash val="solid"/>
-                      <a:round/>
-                      <a:headEnd type="none" w="med" len="med"/>
-                      <a:tailEnd type="none" w="med" len="med"/>
-                    </a:lnR>
-                    <a:lnT w="6350" cap="flat" cmpd="sng" algn="ctr">
-                      <a:solidFill>
-                        <a:srgbClr val="2A3449"/>
-                      </a:solidFill>
-                      <a:prstDash val="solid"/>
-                      <a:round/>
-                      <a:headEnd type="none" w="med" len="med"/>
-                      <a:tailEnd type="none" w="med" len="med"/>
-                    </a:lnT>
-                    <a:lnB w="6350" cap="flat" cmpd="sng" algn="ctr">
-                      <a:solidFill>
-                        <a:srgbClr val="2A3449"/>
-                      </a:solidFill>
-                      <a:prstDash val="solid"/>
-                      <a:round/>
-                      <a:headEnd type="none" w="med" len="med"/>
-                      <a:tailEnd type="none" w="med" len="med"/>
-                    </a:lnB>
-                    <a:solidFill>
-                      <a:srgbClr val="1C2437"/>
-                    </a:solidFill>
-                  </a:tcPr>
-                </a:tc>
-              </a:tr>
-              <a:tr h="347472">
-                <a:tc>
-                  <a:txBody>
-                    <a:bodyPr/>
-                    <a:lstStyle/>
-                    <a:p>
-                      <a:pPr algn="l" indent="0" marL="0">
-                        <a:buNone/>
-                      </a:pPr>
-                      <a:r>
-                        <a:rPr lang="en-US" sz="1200" dirty="0">
-                          <a:solidFill>
-                            <a:srgbClr val="FFFFFF"/>
-                          </a:solidFill>
-                          <a:latin typeface="Calibri" pitchFamily="34" charset="0"/>
-                          <a:ea typeface="Calibri" pitchFamily="34" charset="-122"/>
-                          <a:cs typeface="Calibri" pitchFamily="34" charset="-120"/>
-                        </a:rPr>
-                        <a:t>Wave Temp 2</a:t>
-                      </a:r>
-                      <a:endParaRPr lang="en-US" sz="1200" dirty="0">
-                        <a:latin typeface="Calibri" charset="0"/>
-                        <a:ea typeface="Calibri" charset="0"/>
-                        <a:cs typeface="Calibri" charset="0"/>
-                      </a:endParaRPr>
-                    </a:p>
-                  </a:txBody>
-                  <a:tcPr marL="73152" marR="73152" marT="36576" marB="36576">
-                    <a:lnL w="6350" cap="flat" cmpd="sng" algn="ctr">
-                      <a:solidFill>
-                        <a:srgbClr val="2A3449"/>
-                      </a:solidFill>
-                      <a:prstDash val="solid"/>
-                      <a:round/>
-                      <a:headEnd type="none" w="med" len="med"/>
-                      <a:tailEnd type="none" w="med" len="med"/>
-                    </a:lnL>
-                    <a:lnR w="6350" cap="flat" cmpd="sng" algn="ctr">
-                      <a:solidFill>
-                        <a:srgbClr val="2A3449"/>
-                      </a:solidFill>
-                      <a:prstDash val="solid"/>
-                      <a:round/>
-                      <a:headEnd type="none" w="med" len="med"/>
-                      <a:tailEnd type="none" w="med" len="med"/>
-                    </a:lnR>
-                    <a:lnT w="6350" cap="flat" cmpd="sng" algn="ctr">
-                      <a:solidFill>
-                        <a:srgbClr val="2A3449"/>
-                      </a:solidFill>
-                      <a:prstDash val="solid"/>
-                      <a:round/>
-                      <a:headEnd type="none" w="med" len="med"/>
-                      <a:tailEnd type="none" w="med" len="med"/>
-                    </a:lnT>
-                    <a:lnB w="6350" cap="flat" cmpd="sng" algn="ctr">
-                      <a:solidFill>
-                        <a:srgbClr val="2A3449"/>
-                      </a:solidFill>
-                      <a:prstDash val="solid"/>
-                      <a:round/>
-                      <a:headEnd type="none" w="med" len="med"/>
-                      <a:tailEnd type="none" w="med" len="med"/>
-                    </a:lnB>
-                  </a:tcPr>
-                </a:tc>
-                <a:tc>
-                  <a:txBody>
-                    <a:bodyPr/>
-                    <a:lstStyle/>
-                    <a:p>
-                      <a:pPr algn="r" indent="0" marL="0">
-                        <a:buNone/>
-                      </a:pPr>
-                      <a:r>
-                        <a:rPr lang="en-US" sz="1200" dirty="0">
-                          <a:solidFill>
-                            <a:srgbClr val="FFFFFF"/>
-                          </a:solidFill>
-                          <a:latin typeface="Calibri" pitchFamily="34" charset="0"/>
-                          <a:ea typeface="Calibri" pitchFamily="34" charset="-122"/>
-                          <a:cs typeface="Calibri" pitchFamily="34" charset="-120"/>
-                        </a:rPr>
-                        <a:t>11.5</a:t>
-                      </a:r>
-                      <a:endParaRPr lang="en-US" sz="1200" dirty="0">
-                        <a:latin typeface="Calibri" charset="0"/>
-                        <a:ea typeface="Calibri" charset="0"/>
-                        <a:cs typeface="Calibri" charset="0"/>
-                      </a:endParaRPr>
-                    </a:p>
-                  </a:txBody>
-                  <a:tcPr marL="73152" marR="73152" marT="36576" marB="36576">
-                    <a:lnL w="6350" cap="flat" cmpd="sng" algn="ctr">
-                      <a:solidFill>
-                        <a:srgbClr val="2A3449"/>
-                      </a:solidFill>
-                      <a:prstDash val="solid"/>
-                      <a:round/>
-                      <a:headEnd type="none" w="med" len="med"/>
-                      <a:tailEnd type="none" w="med" len="med"/>
-                    </a:lnL>
-                    <a:lnR w="6350" cap="flat" cmpd="sng" algn="ctr">
-                      <a:solidFill>
-                        <a:srgbClr val="2A3449"/>
-                      </a:solidFill>
-                      <a:prstDash val="solid"/>
-                      <a:round/>
-                      <a:headEnd type="none" w="med" len="med"/>
-                      <a:tailEnd type="none" w="med" len="med"/>
-                    </a:lnR>
-                    <a:lnT w="6350" cap="flat" cmpd="sng" algn="ctr">
-                      <a:solidFill>
-                        <a:srgbClr val="2A3449"/>
-                      </a:solidFill>
-                      <a:prstDash val="solid"/>
-                      <a:round/>
-                      <a:headEnd type="none" w="med" len="med"/>
-                      <a:tailEnd type="none" w="med" len="med"/>
-                    </a:lnT>
-                    <a:lnB w="6350" cap="flat" cmpd="sng" algn="ctr">
-                      <a:solidFill>
-                        <a:srgbClr val="2A3449"/>
-                      </a:solidFill>
-                      <a:prstDash val="solid"/>
-                      <a:round/>
-                      <a:headEnd type="none" w="med" len="med"/>
-                      <a:tailEnd type="none" w="med" len="med"/>
-                    </a:lnB>
-                  </a:tcPr>
-                </a:tc>
-                <a:tc>
-                  <a:txBody>
-                    <a:bodyPr/>
-                    <a:lstStyle/>
-                    <a:p>
-                      <a:pPr algn="r" indent="0" marL="0">
-                        <a:buNone/>
-                      </a:pPr>
-                      <a:r>
-                        <a:rPr lang="en-US" sz="1200" dirty="0">
-                          <a:solidFill>
-                            <a:srgbClr val="FFFFFF"/>
-                          </a:solidFill>
-                          <a:latin typeface="Calibri" pitchFamily="34" charset="0"/>
-                          <a:ea typeface="Calibri" pitchFamily="34" charset="-122"/>
-                          <a:cs typeface="Calibri" pitchFamily="34" charset="-120"/>
-                        </a:rPr>
-                        <a:t>58.2%</a:t>
-                      </a:r>
-                      <a:endParaRPr lang="en-US" sz="1200" dirty="0">
-                        <a:latin typeface="Calibri" charset="0"/>
-                        <a:ea typeface="Calibri" charset="0"/>
-                        <a:cs typeface="Calibri" charset="0"/>
-                      </a:endParaRPr>
-                    </a:p>
-                  </a:txBody>
-                  <a:tcPr marL="73152" marR="73152" marT="36576" marB="36576">
-                    <a:lnL w="6350" cap="flat" cmpd="sng" algn="ctr">
-                      <a:solidFill>
-                        <a:srgbClr val="2A3449"/>
-                      </a:solidFill>
-                      <a:prstDash val="solid"/>
-                      <a:round/>
-                      <a:headEnd type="none" w="med" len="med"/>
-                      <a:tailEnd type="none" w="med" len="med"/>
-                    </a:lnL>
-                    <a:lnR w="6350" cap="flat" cmpd="sng" algn="ctr">
-                      <a:solidFill>
-                        <a:srgbClr val="2A3449"/>
-                      </a:solidFill>
-                      <a:prstDash val="solid"/>
-                      <a:round/>
-                      <a:headEnd type="none" w="med" len="med"/>
-                      <a:tailEnd type="none" w="med" len="med"/>
-                    </a:lnR>
-                    <a:lnT w="6350" cap="flat" cmpd="sng" algn="ctr">
-                      <a:solidFill>
-                        <a:srgbClr val="2A3449"/>
-                      </a:solidFill>
-                      <a:prstDash val="solid"/>
-                      <a:round/>
-                      <a:headEnd type="none" w="med" len="med"/>
-                      <a:tailEnd type="none" w="med" len="med"/>
-                    </a:lnT>
-                    <a:lnB w="6350" cap="flat" cmpd="sng" algn="ctr">
-                      <a:solidFill>
-                        <a:srgbClr val="2A3449"/>
-                      </a:solidFill>
-                      <a:prstDash val="solid"/>
-                      <a:round/>
-                      <a:headEnd type="none" w="med" len="med"/>
-                      <a:tailEnd type="none" w="med" len="med"/>
-                    </a:lnB>
-                  </a:tcPr>
-                </a:tc>
-                <a:tc>
-                  <a:txBody>
-                    <a:bodyPr/>
-                    <a:lstStyle/>
-                    <a:p>
-                      <a:pPr algn="r" indent="0" marL="0">
-                        <a:buNone/>
-                      </a:pPr>
-                      <a:r>
-                        <a:rPr lang="en-US" sz="1200" dirty="0">
-                          <a:solidFill>
-                            <a:srgbClr val="FFFFFF"/>
-                          </a:solidFill>
-                          <a:latin typeface="Calibri" pitchFamily="34" charset="0"/>
-                          <a:ea typeface="Calibri" pitchFamily="34" charset="-122"/>
-                          <a:cs typeface="Calibri" pitchFamily="34" charset="-120"/>
-                        </a:rPr>
-                        <a:t>4.3%</a:t>
-                      </a:r>
-                      <a:endParaRPr lang="en-US" sz="1200" dirty="0">
-                        <a:latin typeface="Calibri" charset="0"/>
-                        <a:ea typeface="Calibri" charset="0"/>
-                        <a:cs typeface="Calibri" charset="0"/>
-                      </a:endParaRPr>
-                    </a:p>
-                  </a:txBody>
-                  <a:tcPr marL="73152" marR="73152" marT="36576" marB="36576">
-                    <a:lnL w="6350" cap="flat" cmpd="sng" algn="ctr">
-                      <a:solidFill>
-                        <a:srgbClr val="2A3449"/>
-                      </a:solidFill>
-                      <a:prstDash val="solid"/>
-                      <a:round/>
-                      <a:headEnd type="none" w="med" len="med"/>
-                      <a:tailEnd type="none" w="med" len="med"/>
-                    </a:lnL>
-                    <a:lnR w="6350" cap="flat" cmpd="sng" algn="ctr">
-                      <a:solidFill>
-                        <a:srgbClr val="2A3449"/>
-                      </a:solidFill>
-                      <a:prstDash val="solid"/>
-                      <a:round/>
-                      <a:headEnd type="none" w="med" len="med"/>
-                      <a:tailEnd type="none" w="med" len="med"/>
-                    </a:lnR>
-                    <a:lnT w="6350" cap="flat" cmpd="sng" algn="ctr">
-                      <a:solidFill>
-                        <a:srgbClr val="2A3449"/>
-                      </a:solidFill>
-                      <a:prstDash val="solid"/>
-                      <a:round/>
-                      <a:headEnd type="none" w="med" len="med"/>
-                      <a:tailEnd type="none" w="med" len="med"/>
-                    </a:lnT>
-                    <a:lnB w="6350" cap="flat" cmpd="sng" algn="ctr">
-                      <a:solidFill>
-                        <a:srgbClr val="2A3449"/>
-                      </a:solidFill>
-                      <a:prstDash val="solid"/>
-                      <a:round/>
-                      <a:headEnd type="none" w="med" len="med"/>
-                      <a:tailEnd type="none" w="med" len="med"/>
-                    </a:lnB>
-                  </a:tcPr>
-                </a:tc>
-              </a:tr>
-              <a:tr h="347472">
-                <a:tc>
-                  <a:txBody>
-                    <a:bodyPr/>
-                    <a:lstStyle/>
-                    <a:p>
-                      <a:pPr algn="l" indent="0" marL="0">
-                        <a:buNone/>
-                      </a:pPr>
-                      <a:r>
-                        <a:rPr lang="en-US" sz="1200" dirty="0">
-                          <a:solidFill>
-                            <a:srgbClr val="FFFFFF"/>
-                          </a:solidFill>
-                          <a:latin typeface="Calibri" pitchFamily="34" charset="0"/>
-                          <a:ea typeface="Calibri" pitchFamily="34" charset="-122"/>
-                          <a:cs typeface="Calibri" pitchFamily="34" charset="-120"/>
-                        </a:rPr>
-                        <a:t>Wave Temp 3</a:t>
-                      </a:r>
-                      <a:endParaRPr lang="en-US" sz="1200" dirty="0">
-                        <a:latin typeface="Calibri" charset="0"/>
-                        <a:ea typeface="Calibri" charset="0"/>
-                        <a:cs typeface="Calibri" charset="0"/>
-                      </a:endParaRPr>
-                    </a:p>
-                  </a:txBody>
-                  <a:tcPr marL="73152" marR="73152" marT="36576" marB="36576">
-                    <a:lnL w="6350" cap="flat" cmpd="sng" algn="ctr">
-                      <a:solidFill>
-                        <a:srgbClr val="2A3449"/>
-                      </a:solidFill>
-                      <a:prstDash val="solid"/>
-                      <a:round/>
-                      <a:headEnd type="none" w="med" len="med"/>
-                      <a:tailEnd type="none" w="med" len="med"/>
-                    </a:lnL>
-                    <a:lnR w="6350" cap="flat" cmpd="sng" algn="ctr">
-                      <a:solidFill>
-                        <a:srgbClr val="2A3449"/>
-                      </a:solidFill>
-                      <a:prstDash val="solid"/>
-                      <a:round/>
-                      <a:headEnd type="none" w="med" len="med"/>
-                      <a:tailEnd type="none" w="med" len="med"/>
-                    </a:lnR>
-                    <a:lnT w="6350" cap="flat" cmpd="sng" algn="ctr">
-                      <a:solidFill>
-                        <a:srgbClr val="2A3449"/>
-                      </a:solidFill>
-                      <a:prstDash val="solid"/>
-                      <a:round/>
-                      <a:headEnd type="none" w="med" len="med"/>
-                      <a:tailEnd type="none" w="med" len="med"/>
-                    </a:lnT>
-                    <a:lnB w="6350" cap="flat" cmpd="sng" algn="ctr">
-                      <a:solidFill>
-                        <a:srgbClr val="2A3449"/>
-                      </a:solidFill>
-                      <a:prstDash val="solid"/>
-                      <a:round/>
-                      <a:headEnd type="none" w="med" len="med"/>
-                      <a:tailEnd type="none" w="med" len="med"/>
-                    </a:lnB>
-                  </a:tcPr>
-                </a:tc>
-                <a:tc>
-                  <a:txBody>
-                    <a:bodyPr/>
-                    <a:lstStyle/>
-                    <a:p>
-                      <a:pPr algn="r" indent="0" marL="0">
-                        <a:buNone/>
-                      </a:pPr>
-                      <a:r>
-                        <a:rPr lang="en-US" sz="1200" dirty="0">
-                          <a:solidFill>
-                            <a:srgbClr val="FFFFFF"/>
-                          </a:solidFill>
-                          <a:latin typeface="Calibri" pitchFamily="34" charset="0"/>
-                          <a:ea typeface="Calibri" pitchFamily="34" charset="-122"/>
-                          <a:cs typeface="Calibri" pitchFamily="34" charset="-120"/>
-                        </a:rPr>
-                        <a:t>8.2</a:t>
-                      </a:r>
-                      <a:endParaRPr lang="en-US" sz="1200" dirty="0">
-                        <a:latin typeface="Calibri" charset="0"/>
-                        <a:ea typeface="Calibri" charset="0"/>
-                        <a:cs typeface="Calibri" charset="0"/>
-                      </a:endParaRPr>
-                    </a:p>
-                  </a:txBody>
-                  <a:tcPr marL="73152" marR="73152" marT="36576" marB="36576">
-                    <a:lnL w="6350" cap="flat" cmpd="sng" algn="ctr">
-                      <a:solidFill>
-                        <a:srgbClr val="2A3449"/>
-                      </a:solidFill>
-                      <a:prstDash val="solid"/>
-                      <a:round/>
-                      <a:headEnd type="none" w="med" len="med"/>
-                      <a:tailEnd type="none" w="med" len="med"/>
-                    </a:lnL>
-                    <a:lnR w="6350" cap="flat" cmpd="sng" algn="ctr">
-                      <a:solidFill>
-                        <a:srgbClr val="2A3449"/>
-                      </a:solidFill>
-                      <a:prstDash val="solid"/>
-                      <a:round/>
-                      <a:headEnd type="none" w="med" len="med"/>
-                      <a:tailEnd type="none" w="med" len="med"/>
-                    </a:lnR>
-                    <a:lnT w="6350" cap="flat" cmpd="sng" algn="ctr">
-                      <a:solidFill>
-                        <a:srgbClr val="2A3449"/>
-                      </a:solidFill>
-                      <a:prstDash val="solid"/>
-                      <a:round/>
-                      <a:headEnd type="none" w="med" len="med"/>
-                      <a:tailEnd type="none" w="med" len="med"/>
-                    </a:lnT>
-                    <a:lnB w="6350" cap="flat" cmpd="sng" algn="ctr">
-                      <a:solidFill>
-                        <a:srgbClr val="2A3449"/>
-                      </a:solidFill>
-                      <a:prstDash val="solid"/>
-                      <a:round/>
-                      <a:headEnd type="none" w="med" len="med"/>
-                      <a:tailEnd type="none" w="med" len="med"/>
-                    </a:lnB>
-                  </a:tcPr>
-                </a:tc>
-                <a:tc>
-                  <a:txBody>
-                    <a:bodyPr/>
-                    <a:lstStyle/>
-                    <a:p>
-                      <a:pPr algn="r" indent="0" marL="0">
-                        <a:buNone/>
-                      </a:pPr>
-                      <a:r>
-                        <a:rPr lang="en-US" sz="1200" dirty="0">
-                          <a:solidFill>
-                            <a:srgbClr val="FFFFFF"/>
-                          </a:solidFill>
-                          <a:latin typeface="Calibri" pitchFamily="34" charset="0"/>
-                          <a:ea typeface="Calibri" pitchFamily="34" charset="-122"/>
-                          <a:cs typeface="Calibri" pitchFamily="34" charset="-120"/>
-                        </a:rPr>
-                        <a:t>60.3%</a:t>
-                      </a:r>
-                      <a:endParaRPr lang="en-US" sz="1200" dirty="0">
-                        <a:latin typeface="Calibri" charset="0"/>
-                        <a:ea typeface="Calibri" charset="0"/>
-                        <a:cs typeface="Calibri" charset="0"/>
-                      </a:endParaRPr>
-                    </a:p>
-                  </a:txBody>
-                  <a:tcPr marL="73152" marR="73152" marT="36576" marB="36576">
-                    <a:lnL w="6350" cap="flat" cmpd="sng" algn="ctr">
-                      <a:solidFill>
-                        <a:srgbClr val="2A3449"/>
-                      </a:solidFill>
-                      <a:prstDash val="solid"/>
-                      <a:round/>
-                      <a:headEnd type="none" w="med" len="med"/>
-                      <a:tailEnd type="none" w="med" len="med"/>
-                    </a:lnL>
-                    <a:lnR w="6350" cap="flat" cmpd="sng" algn="ctr">
-                      <a:solidFill>
-                        <a:srgbClr val="2A3449"/>
-                      </a:solidFill>
-                      <a:prstDash val="solid"/>
-                      <a:round/>
-                      <a:headEnd type="none" w="med" len="med"/>
-                      <a:tailEnd type="none" w="med" len="med"/>
-                    </a:lnR>
-                    <a:lnT w="6350" cap="flat" cmpd="sng" algn="ctr">
-                      <a:solidFill>
-                        <a:srgbClr val="2A3449"/>
-                      </a:solidFill>
-                      <a:prstDash val="solid"/>
-                      <a:round/>
-                      <a:headEnd type="none" w="med" len="med"/>
-                      <a:tailEnd type="none" w="med" len="med"/>
-                    </a:lnT>
-                    <a:lnB w="6350" cap="flat" cmpd="sng" algn="ctr">
-                      <a:solidFill>
-                        <a:srgbClr val="2A3449"/>
-                      </a:solidFill>
-                      <a:prstDash val="solid"/>
-                      <a:round/>
-                      <a:headEnd type="none" w="med" len="med"/>
-                      <a:tailEnd type="none" w="med" len="med"/>
-                    </a:lnB>
-                  </a:tcPr>
-                </a:tc>
-                <a:tc>
-                  <a:txBody>
-                    <a:bodyPr/>
-                    <a:lstStyle/>
-                    <a:p>
-                      <a:pPr algn="r" indent="0" marL="0">
-                        <a:buNone/>
-                      </a:pPr>
-                      <a:r>
-                        <a:rPr lang="en-US" sz="1200" dirty="0">
-                          <a:solidFill>
-                            <a:srgbClr val="FFFFFF"/>
-                          </a:solidFill>
-                          <a:latin typeface="Calibri" pitchFamily="34" charset="0"/>
-                          <a:ea typeface="Calibri" pitchFamily="34" charset="-122"/>
-                          <a:cs typeface="Calibri" pitchFamily="34" charset="-120"/>
-                        </a:rPr>
-                        <a:t>4.7%</a:t>
-                      </a:r>
-                      <a:endParaRPr lang="en-US" sz="1200" dirty="0">
-                        <a:latin typeface="Calibri" charset="0"/>
-                        <a:ea typeface="Calibri" charset="0"/>
-                        <a:cs typeface="Calibri" charset="0"/>
-                      </a:endParaRPr>
-                    </a:p>
-                  </a:txBody>
-                  <a:tcPr marL="73152" marR="73152" marT="36576" marB="36576">
-                    <a:lnL w="6350" cap="flat" cmpd="sng" algn="ctr">
-                      <a:solidFill>
-                        <a:srgbClr val="2A3449"/>
-                      </a:solidFill>
-                      <a:prstDash val="solid"/>
-                      <a:round/>
-                      <a:headEnd type="none" w="med" len="med"/>
-                      <a:tailEnd type="none" w="med" len="med"/>
-                    </a:lnL>
-                    <a:lnR w="6350" cap="flat" cmpd="sng" algn="ctr">
-                      <a:solidFill>
-                        <a:srgbClr val="2A3449"/>
-                      </a:solidFill>
-                      <a:prstDash val="solid"/>
-                      <a:round/>
-                      <a:headEnd type="none" w="med" len="med"/>
-                      <a:tailEnd type="none" w="med" len="med"/>
-                    </a:lnR>
-                    <a:lnT w="6350" cap="flat" cmpd="sng" algn="ctr">
-                      <a:solidFill>
-                        <a:srgbClr val="2A3449"/>
-                      </a:solidFill>
-                      <a:prstDash val="solid"/>
-                      <a:round/>
-                      <a:headEnd type="none" w="med" len="med"/>
-                      <a:tailEnd type="none" w="med" len="med"/>
-                    </a:lnT>
-                    <a:lnB w="6350" cap="flat" cmpd="sng" algn="ctr">
-                      <a:solidFill>
-                        <a:srgbClr val="2A3449"/>
-                      </a:solidFill>
-                      <a:prstDash val="solid"/>
-                      <a:round/>
-                      <a:headEnd type="none" w="med" len="med"/>
-                      <a:tailEnd type="none" w="med" len="med"/>
-                    </a:lnB>
-                  </a:tcPr>
-                </a:tc>
-              </a:tr>
-              <a:tr h="347472">
-                <a:tc>
-                  <a:txBody>
-                    <a:bodyPr/>
-                    <a:lstStyle/>
-                    <a:p>
-                      <a:pPr algn="l" indent="0" marL="0">
-                        <a:buNone/>
-                      </a:pPr>
-                      <a:r>
-                        <a:rPr lang="en-US" sz="1200" dirty="0">
-                          <a:solidFill>
-                            <a:srgbClr val="FFFFFF"/>
-                          </a:solidFill>
-                          <a:latin typeface="Calibri" pitchFamily="34" charset="0"/>
-                          <a:ea typeface="Calibri" pitchFamily="34" charset="-122"/>
-                          <a:cs typeface="Calibri" pitchFamily="34" charset="-120"/>
-                        </a:rPr>
-                        <a:t>Temp 2 and 33</a:t>
-                      </a:r>
-                      <a:endParaRPr lang="en-US" sz="1200" dirty="0">
-                        <a:latin typeface="Calibri" charset="0"/>
-                        <a:ea typeface="Calibri" charset="0"/>
-                        <a:cs typeface="Calibri" charset="0"/>
-                      </a:endParaRPr>
-                    </a:p>
-                  </a:txBody>
-                  <a:tcPr marL="73152" marR="73152" marT="36576" marB="36576">
-                    <a:lnL w="6350" cap="flat" cmpd="sng" algn="ctr">
-                      <a:solidFill>
-                        <a:srgbClr val="2A3449"/>
-                      </a:solidFill>
-                      <a:prstDash val="solid"/>
-                      <a:round/>
-                      <a:headEnd type="none" w="med" len="med"/>
-                      <a:tailEnd type="none" w="med" len="med"/>
-                    </a:lnL>
-                    <a:lnR w="6350" cap="flat" cmpd="sng" algn="ctr">
-                      <a:solidFill>
-                        <a:srgbClr val="2A3449"/>
-                      </a:solidFill>
-                      <a:prstDash val="solid"/>
-                      <a:round/>
-                      <a:headEnd type="none" w="med" len="med"/>
-                      <a:tailEnd type="none" w="med" len="med"/>
-                    </a:lnR>
-                    <a:lnT w="6350" cap="flat" cmpd="sng" algn="ctr">
-                      <a:solidFill>
-                        <a:srgbClr val="2A3449"/>
-                      </a:solidFill>
-                      <a:prstDash val="solid"/>
-                      <a:round/>
-                      <a:headEnd type="none" w="med" len="med"/>
-                      <a:tailEnd type="none" w="med" len="med"/>
-                    </a:lnT>
-                    <a:lnB w="6350" cap="flat" cmpd="sng" algn="ctr">
-                      <a:solidFill>
-                        <a:srgbClr val="2A3449"/>
-                      </a:solidFill>
-                      <a:prstDash val="solid"/>
-                      <a:round/>
-                      <a:headEnd type="none" w="med" len="med"/>
-                      <a:tailEnd type="none" w="med" len="med"/>
-                    </a:lnB>
-                  </a:tcPr>
-                </a:tc>
-                <a:tc>
-                  <a:txBody>
-                    <a:bodyPr/>
-                    <a:lstStyle/>
-                    <a:p>
-                      <a:pPr algn="r" indent="0" marL="0">
-                        <a:buNone/>
-                      </a:pPr>
-                      <a:r>
-                        <a:rPr lang="en-US" sz="1200" dirty="0">
-                          <a:solidFill>
-                            <a:srgbClr val="FFFFFF"/>
-                          </a:solidFill>
-                          <a:latin typeface="Calibri" pitchFamily="34" charset="0"/>
-                          <a:ea typeface="Calibri" pitchFamily="34" charset="-122"/>
-                          <a:cs typeface="Calibri" pitchFamily="34" charset="-120"/>
-                        </a:rPr>
-                        <a:t>−14.6</a:t>
-                      </a:r>
-                      <a:endParaRPr lang="en-US" sz="1200" dirty="0">
-                        <a:latin typeface="Calibri" charset="0"/>
-                        <a:ea typeface="Calibri" charset="0"/>
-                        <a:cs typeface="Calibri" charset="0"/>
-                      </a:endParaRPr>
-                    </a:p>
-                  </a:txBody>
-                  <a:tcPr marL="73152" marR="73152" marT="36576" marB="36576">
-                    <a:lnL w="6350" cap="flat" cmpd="sng" algn="ctr">
-                      <a:solidFill>
-                        <a:srgbClr val="2A3449"/>
-                      </a:solidFill>
-                      <a:prstDash val="solid"/>
-                      <a:round/>
-                      <a:headEnd type="none" w="med" len="med"/>
-                      <a:tailEnd type="none" w="med" len="med"/>
-                    </a:lnL>
-                    <a:lnR w="6350" cap="flat" cmpd="sng" algn="ctr">
-                      <a:solidFill>
-                        <a:srgbClr val="2A3449"/>
-                      </a:solidFill>
-                      <a:prstDash val="solid"/>
-                      <a:round/>
-                      <a:headEnd type="none" w="med" len="med"/>
-                      <a:tailEnd type="none" w="med" len="med"/>
-                    </a:lnR>
-                    <a:lnT w="6350" cap="flat" cmpd="sng" algn="ctr">
-                      <a:solidFill>
-                        <a:srgbClr val="2A3449"/>
-                      </a:solidFill>
-                      <a:prstDash val="solid"/>
-                      <a:round/>
-                      <a:headEnd type="none" w="med" len="med"/>
-                      <a:tailEnd type="none" w="med" len="med"/>
-                    </a:lnT>
-                    <a:lnB w="6350" cap="flat" cmpd="sng" algn="ctr">
-                      <a:solidFill>
-                        <a:srgbClr val="2A3449"/>
-                      </a:solidFill>
-                      <a:prstDash val="solid"/>
-                      <a:round/>
-                      <a:headEnd type="none" w="med" len="med"/>
-                      <a:tailEnd type="none" w="med" len="med"/>
-                    </a:lnB>
-                  </a:tcPr>
-                </a:tc>
-                <a:tc>
-                  <a:txBody>
-                    <a:bodyPr/>
-                    <a:lstStyle/>
-                    <a:p>
-                      <a:pPr algn="r" indent="0" marL="0">
-                        <a:buNone/>
-                      </a:pPr>
-                      <a:r>
-                        <a:rPr lang="en-US" sz="1200" dirty="0">
-                          <a:solidFill>
-                            <a:srgbClr val="FFFFFF"/>
-                          </a:solidFill>
-                          <a:latin typeface="Calibri" pitchFamily="34" charset="0"/>
-                          <a:ea typeface="Calibri" pitchFamily="34" charset="-122"/>
-                          <a:cs typeface="Calibri" pitchFamily="34" charset="-120"/>
-                        </a:rPr>
-                        <a:t>58.4%</a:t>
-                      </a:r>
-                      <a:endParaRPr lang="en-US" sz="1200" dirty="0">
-                        <a:latin typeface="Calibri" charset="0"/>
-                        <a:ea typeface="Calibri" charset="0"/>
-                        <a:cs typeface="Calibri" charset="0"/>
-                      </a:endParaRPr>
-                    </a:p>
-                  </a:txBody>
-                  <a:tcPr marL="73152" marR="73152" marT="36576" marB="36576">
-                    <a:lnL w="6350" cap="flat" cmpd="sng" algn="ctr">
-                      <a:solidFill>
-                        <a:srgbClr val="2A3449"/>
-                      </a:solidFill>
-                      <a:prstDash val="solid"/>
-                      <a:round/>
-                      <a:headEnd type="none" w="med" len="med"/>
-                      <a:tailEnd type="none" w="med" len="med"/>
-                    </a:lnL>
-                    <a:lnR w="6350" cap="flat" cmpd="sng" algn="ctr">
-                      <a:solidFill>
-                        <a:srgbClr val="2A3449"/>
-                      </a:solidFill>
-                      <a:prstDash val="solid"/>
-                      <a:round/>
-                      <a:headEnd type="none" w="med" len="med"/>
-                      <a:tailEnd type="none" w="med" len="med"/>
-                    </a:lnR>
-                    <a:lnT w="6350" cap="flat" cmpd="sng" algn="ctr">
-                      <a:solidFill>
-                        <a:srgbClr val="2A3449"/>
-                      </a:solidFill>
-                      <a:prstDash val="solid"/>
-                      <a:round/>
-                      <a:headEnd type="none" w="med" len="med"/>
-                      <a:tailEnd type="none" w="med" len="med"/>
-                    </a:lnT>
-                    <a:lnB w="6350" cap="flat" cmpd="sng" algn="ctr">
-                      <a:solidFill>
-                        <a:srgbClr val="2A3449"/>
-                      </a:solidFill>
-                      <a:prstDash val="solid"/>
-                      <a:round/>
-                      <a:headEnd type="none" w="med" len="med"/>
-                      <a:tailEnd type="none" w="med" len="med"/>
-                    </a:lnB>
-                  </a:tcPr>
-                </a:tc>
-                <a:tc>
-                  <a:txBody>
-                    <a:bodyPr/>
-                    <a:lstStyle/>
-                    <a:p>
-                      <a:pPr algn="r" indent="0" marL="0">
-                        <a:buNone/>
-                      </a:pPr>
-                      <a:r>
-                        <a:rPr lang="en-US" sz="1200" dirty="0">
-                          <a:solidFill>
-                            <a:srgbClr val="FFFFFF"/>
-                          </a:solidFill>
-                          <a:latin typeface="Calibri" pitchFamily="34" charset="0"/>
-                          <a:ea typeface="Calibri" pitchFamily="34" charset="-122"/>
-                          <a:cs typeface="Calibri" pitchFamily="34" charset="-120"/>
-                        </a:rPr>
-                        <a:t>4.3%</a:t>
-                      </a:r>
-                      <a:endParaRPr lang="en-US" sz="1200" dirty="0">
-                        <a:latin typeface="Calibri" charset="0"/>
-                        <a:ea typeface="Calibri" charset="0"/>
-                        <a:cs typeface="Calibri" charset="0"/>
-                      </a:endParaRPr>
-                    </a:p>
-                  </a:txBody>
-                  <a:tcPr marL="73152" marR="73152" marT="36576" marB="36576">
-                    <a:lnL w="6350" cap="flat" cmpd="sng" algn="ctr">
-                      <a:solidFill>
-                        <a:srgbClr val="2A3449"/>
-                      </a:solidFill>
-                      <a:prstDash val="solid"/>
-                      <a:round/>
-                      <a:headEnd type="none" w="med" len="med"/>
-                      <a:tailEnd type="none" w="med" len="med"/>
-                    </a:lnL>
-                    <a:lnR w="6350" cap="flat" cmpd="sng" algn="ctr">
-                      <a:solidFill>
-                        <a:srgbClr val="2A3449"/>
-                      </a:solidFill>
-                      <a:prstDash val="solid"/>
-                      <a:round/>
-                      <a:headEnd type="none" w="med" len="med"/>
-                      <a:tailEnd type="none" w="med" len="med"/>
-                    </a:lnR>
-                    <a:lnT w="6350" cap="flat" cmpd="sng" algn="ctr">
-                      <a:solidFill>
-                        <a:srgbClr val="2A3449"/>
-                      </a:solidFill>
-                      <a:prstDash val="solid"/>
-                      <a:round/>
-                      <a:headEnd type="none" w="med" len="med"/>
-                      <a:tailEnd type="none" w="med" len="med"/>
-                    </a:lnT>
-                    <a:lnB w="6350" cap="flat" cmpd="sng" algn="ctr">
-                      <a:solidFill>
-                        <a:srgbClr val="2A3449"/>
-                      </a:solidFill>
-                      <a:prstDash val="solid"/>
-                      <a:round/>
-                      <a:headEnd type="none" w="med" len="med"/>
-                      <a:tailEnd type="none" w="med" len="med"/>
-                    </a:lnB>
-                  </a:tcPr>
-                </a:tc>
-              </a:tr>
-            </a:tbl>
+        <a:graphic xmlns:a="http://schemas.openxmlformats.org/drawingml/2006/main">
+          <a:graphicData uri="http://schemas.openxmlformats.org/drawingml/2006/chart">
+            <c:chart xmlns:c="http://schemas.openxmlformats.org/drawingml/2006/chart" r:id="rId2"/>
           </a:graphicData>
         </a:graphic>
       </p:graphicFrame>
-      <p:sp>
-        <p:nvSpPr>
-          <p:cNvPr id="10" name="Text 6"/>
-          <p:cNvSpPr txBox="1"/>
-          <p:nvPr/>
-        </p:nvSpPr>
-        <p:spPr>
-          <a:xfrm>
-            <a:off x="8092440" y="5349240"/>
-            <a:ext cx="3383280" cy="457200"/>
-          </a:xfrm>
-          <a:prstGeom prst="rect">
-            <a:avLst/>
-          </a:prstGeom>
-          <a:noFill/>
-          <a:ln/>
-        </p:spPr>
-        <p:txBody>
-          <a:bodyPr wrap="square" lIns="0" tIns="0" rIns="0" bIns="0" rtlCol="0" anchor="t"/>
-          <a:lstStyle/>
-          <a:p>
-            <a:pPr indent="0" marL="0">
-              <a:spcAft>
-                <a:spcPts val="400"/>
-              </a:spcAft>
-              <a:buNone/>
-            </a:pPr>
-            <a:r>
-              <a:rPr lang="en-US" sz="1250" i="1" dirty="0">
-                <a:solidFill>
-                  <a:srgbClr val="D9DDE6"/>
-                </a:solidFill>
-              </a:rPr>
-              <a:t>So tNPS is a tenure-stage problem, and the plan attacks it.</a:t>
-            </a:r>
-            <a:endParaRPr lang="en-US" sz="1250" dirty="0"/>
-          </a:p>
-        </p:txBody>
-      </p:sp>
       <p:sp>
         <p:nvSpPr>
           <p:cNvPr id="25" name="Slide Number Placeholder 0"/>
@@ -5450,14 +4959,14 @@
       </p:grpSpPr>
       <p:sp>
         <p:nvSpPr>
-          <p:cNvPr id="2" name="Text 0"/>
+          <p:cNvPr id="2" name="Eyebrow"/>
           <p:cNvSpPr txBox="1"/>
           <p:nvPr/>
         </p:nvSpPr>
         <p:spPr>
           <a:xfrm>
             <a:off x="548640" y="457200"/>
-            <a:ext cx="7315200" cy="274320"/>
+            <a:ext cx="8229600" cy="274320"/>
           </a:xfrm>
           <a:prstGeom prst="rect">
             <a:avLst/>
@@ -5516,22 +5025,36 @@
                   <a:schemeClr val="tx1"/>
                 </a:solidFill>
               </a:rPr>
-              <a:t>Data, then calls, then ask before I tell, then the cause, not the symptom</a:t>
+              <a:t>Data, then calls, then ask before I tell,</a:t>
             </a:r>
             <a:endParaRPr lang="en-US" sz="3200" dirty="0"/>
           </a:p>
-        </p:txBody>
-      </p:sp>
-      <p:sp>
-        <p:nvSpPr>
-          <p:cNvPr id="4" name="Shape 2"/>
+          <a:p>
+            <a:pPr algn="l" indent="0" marL="0">
+              <a:buNone/>
+            </a:pPr>
+            <a:r>
+              <a:rPr lang="en-US" sz="3200" b="1" dirty="0">
+                <a:solidFill>
+                  <a:schemeClr val="tx1"/>
+                </a:solidFill>
+              </a:rPr>
+              <a:t>then the cause, not the symptom</a:t>
+            </a:r>
+            <a:endParaRPr lang="en-US" sz="3200" dirty="0"/>
+          </a:p>
+        </p:txBody>
+      </p:sp>
+      <p:sp>
+        <p:nvSpPr>
+          <p:cNvPr id="4" name="Step 1 card"/>
           <p:cNvSpPr/>
           <p:nvPr/>
         </p:nvSpPr>
         <p:spPr>
           <a:xfrm>
             <a:off x="548640" y="2011680"/>
-            <a:ext cx="2567864" cy="2926080"/>
+            <a:ext cx="2567864" cy="2697480"/>
           </a:xfrm>
           <a:prstGeom prst="roundRect">
             <a:avLst>
@@ -5558,7 +5081,7 @@
       </p:sp>
       <p:sp>
         <p:nvSpPr>
-          <p:cNvPr id="5" name="Shape 3"/>
+          <p:cNvPr id="5" name="Icon circle"/>
           <p:cNvSpPr/>
           <p:nvPr/>
         </p:nvSpPr>
@@ -5573,17 +5096,12 @@
           <a:solidFill>
             <a:srgbClr val="FDE9DF"/>
           </a:solidFill>
-          <a:ln w="12700">
-            <a:solidFill>
-              <a:srgbClr val="FDE9DF"/>
-            </a:solidFill>
-            <a:prstDash val="solid"/>
-          </a:ln>
+          <a:ln/>
         </p:spPr>
       </p:sp>
       <p:pic>
         <p:nvPicPr>
-          <p:cNvPr id="6" name="Image 0" descr="preencoded.png">    </p:cNvPr>
+          <p:cNvPr id="6" name="Icon" descr="preencoded.png">    </p:cNvPr>
           <p:cNvPicPr>
             <a:picLocks noChangeAspect="1"/>
           </p:cNvPicPr>
@@ -5597,8 +5115,8 @@
         </p:blipFill>
         <p:spPr>
           <a:xfrm>
-            <a:off x="905256" y="2368296"/>
-            <a:ext cx="310896" cy="310896"/>
+            <a:off x="913303" y="2376343"/>
+            <a:ext cx="294803" cy="294803"/>
           </a:xfrm>
           <a:prstGeom prst="rect">
             <a:avLst/>
@@ -5607,14 +5125,14 @@
       </p:pic>
       <p:sp>
         <p:nvSpPr>
-          <p:cNvPr id="7" name="Text 4"/>
+          <p:cNvPr id="7" name="Step title"/>
           <p:cNvSpPr txBox="1"/>
           <p:nvPr/>
         </p:nvSpPr>
         <p:spPr>
           <a:xfrm>
             <a:off x="777240" y="2971800"/>
-            <a:ext cx="2110664" cy="411480"/>
+            <a:ext cx="2110664" cy="384048"/>
           </a:xfrm>
           <a:prstGeom prst="rect">
             <a:avLst/>
@@ -5632,10 +5150,21 @@
             <a:r>
               <a:rPr lang="en-US" sz="1600" b="1" dirty="0">
                 <a:solidFill>
+                  <a:srgbClr val="C94A10"/>
+                </a:solidFill>
+              </a:rPr>
+              <a:t>1</a:t>
+            </a:r>
+            <a:pPr indent="0" marL="0">
+              <a:buNone/>
+            </a:pPr>
+            <a:r>
+              <a:rPr lang="en-US" sz="1600" b="1" dirty="0">
+                <a:solidFill>
                   <a:srgbClr val="121826"/>
                 </a:solidFill>
               </a:rPr>
-              <a:t>1  Data</a:t>
+              <a:t>  Data</a:t>
             </a:r>
             <a:endParaRPr lang="en-US" sz="1600" dirty="0"/>
           </a:p>
@@ -5643,14 +5172,14 @@
       </p:sp>
       <p:sp>
         <p:nvSpPr>
-          <p:cNvPr id="8" name="Text 5"/>
+          <p:cNvPr id="8" name="Paragraph"/>
           <p:cNvSpPr txBox="1"/>
           <p:nvPr/>
         </p:nvSpPr>
         <p:spPr>
           <a:xfrm>
-            <a:off x="777240" y="3401568"/>
-            <a:ext cx="2110664" cy="1463040"/>
+            <a:off x="777240" y="3383280"/>
+            <a:ext cx="2110664" cy="1188720"/>
           </a:xfrm>
           <a:prstGeom prst="rect">
             <a:avLst/>
@@ -5682,14 +5211,14 @@
       </p:sp>
       <p:sp>
         <p:nvSpPr>
-          <p:cNvPr id="9" name="Shape 6"/>
+          <p:cNvPr id="9" name="Step 2 card"/>
           <p:cNvSpPr/>
           <p:nvPr/>
         </p:nvSpPr>
         <p:spPr>
           <a:xfrm>
             <a:off x="3390824" y="2011680"/>
-            <a:ext cx="2567864" cy="2926080"/>
+            <a:ext cx="2567864" cy="2697480"/>
           </a:xfrm>
           <a:prstGeom prst="roundRect">
             <a:avLst>
@@ -5716,7 +5245,7 @@
       </p:sp>
       <p:sp>
         <p:nvSpPr>
-          <p:cNvPr id="10" name="Shape 7"/>
+          <p:cNvPr id="10" name="Icon circle"/>
           <p:cNvSpPr/>
           <p:nvPr/>
         </p:nvSpPr>
@@ -5731,17 +5260,12 @@
           <a:solidFill>
             <a:srgbClr val="FDE9DF"/>
           </a:solidFill>
-          <a:ln w="12700">
-            <a:solidFill>
-              <a:srgbClr val="FDE9DF"/>
-            </a:solidFill>
-            <a:prstDash val="solid"/>
-          </a:ln>
+          <a:ln/>
         </p:spPr>
       </p:sp>
       <p:pic>
         <p:nvPicPr>
-          <p:cNvPr id="11" name="Image 1" descr="preencoded.png">    </p:cNvPr>
+          <p:cNvPr id="11" name="Icon" descr="preencoded.png">    </p:cNvPr>
           <p:cNvPicPr>
             <a:picLocks noChangeAspect="1"/>
           </p:cNvPicPr>
@@ -5755,8 +5279,8 @@
         </p:blipFill>
         <p:spPr>
           <a:xfrm>
-            <a:off x="3747440" y="2368296"/>
-            <a:ext cx="310896" cy="310896"/>
+            <a:off x="3755487" y="2376343"/>
+            <a:ext cx="294803" cy="294803"/>
           </a:xfrm>
           <a:prstGeom prst="rect">
             <a:avLst/>
@@ -5765,14 +5289,14 @@
       </p:pic>
       <p:sp>
         <p:nvSpPr>
-          <p:cNvPr id="12" name="Text 8"/>
+          <p:cNvPr id="12" name="Step title"/>
           <p:cNvSpPr txBox="1"/>
           <p:nvPr/>
         </p:nvSpPr>
         <p:spPr>
           <a:xfrm>
             <a:off x="3619424" y="2971800"/>
-            <a:ext cx="2110664" cy="411480"/>
+            <a:ext cx="2110664" cy="384048"/>
           </a:xfrm>
           <a:prstGeom prst="rect">
             <a:avLst/>
@@ -5790,10 +5314,21 @@
             <a:r>
               <a:rPr lang="en-US" sz="1600" b="1" dirty="0">
                 <a:solidFill>
+                  <a:srgbClr val="C94A10"/>
+                </a:solidFill>
+              </a:rPr>
+              <a:t>2</a:t>
+            </a:r>
+            <a:pPr indent="0" marL="0">
+              <a:buNone/>
+            </a:pPr>
+            <a:r>
+              <a:rPr lang="en-US" sz="1600" b="1" dirty="0">
+                <a:solidFill>
                   <a:srgbClr val="121826"/>
                 </a:solidFill>
               </a:rPr>
-              <a:t>2  Calls</a:t>
+              <a:t>  Calls</a:t>
             </a:r>
             <a:endParaRPr lang="en-US" sz="1600" dirty="0"/>
           </a:p>
@@ -5801,14 +5336,14 @@
       </p:sp>
       <p:sp>
         <p:nvSpPr>
-          <p:cNvPr id="13" name="Text 9"/>
+          <p:cNvPr id="13" name="Paragraph"/>
           <p:cNvSpPr txBox="1"/>
           <p:nvPr/>
         </p:nvSpPr>
         <p:spPr>
           <a:xfrm>
-            <a:off x="3619424" y="3401568"/>
-            <a:ext cx="2110664" cy="1463040"/>
+            <a:off x="3619424" y="3383280"/>
+            <a:ext cx="2110664" cy="1188720"/>
           </a:xfrm>
           <a:prstGeom prst="rect">
             <a:avLst/>
@@ -5840,14 +5375,14 @@
       </p:sp>
       <p:sp>
         <p:nvSpPr>
-          <p:cNvPr id="14" name="Shape 10"/>
+          <p:cNvPr id="14" name="Step 3 card"/>
           <p:cNvSpPr/>
           <p:nvPr/>
         </p:nvSpPr>
         <p:spPr>
           <a:xfrm>
             <a:off x="6233008" y="2011680"/>
-            <a:ext cx="2567864" cy="2926080"/>
+            <a:ext cx="2567864" cy="2697480"/>
           </a:xfrm>
           <a:prstGeom prst="roundRect">
             <a:avLst>
@@ -5874,7 +5409,7 @@
       </p:sp>
       <p:sp>
         <p:nvSpPr>
-          <p:cNvPr id="15" name="Shape 11"/>
+          <p:cNvPr id="15" name="Icon circle"/>
           <p:cNvSpPr/>
           <p:nvPr/>
         </p:nvSpPr>
@@ -5889,17 +5424,12 @@
           <a:solidFill>
             <a:srgbClr val="FDE9DF"/>
           </a:solidFill>
-          <a:ln w="12700">
-            <a:solidFill>
-              <a:srgbClr val="FDE9DF"/>
-            </a:solidFill>
-            <a:prstDash val="solid"/>
-          </a:ln>
+          <a:ln/>
         </p:spPr>
       </p:sp>
       <p:pic>
         <p:nvPicPr>
-          <p:cNvPr id="16" name="Image 2" descr="preencoded.png">    </p:cNvPr>
+          <p:cNvPr id="16" name="Icon" descr="preencoded.png">    </p:cNvPr>
           <p:cNvPicPr>
             <a:picLocks noChangeAspect="1"/>
           </p:cNvPicPr>
@@ -5913,8 +5443,8 @@
         </p:blipFill>
         <p:spPr>
           <a:xfrm>
-            <a:off x="6589624" y="2368296"/>
-            <a:ext cx="310896" cy="310896"/>
+            <a:off x="6597670" y="2376343"/>
+            <a:ext cx="294803" cy="294803"/>
           </a:xfrm>
           <a:prstGeom prst="rect">
             <a:avLst/>
@@ -5923,14 +5453,14 @@
       </p:pic>
       <p:sp>
         <p:nvSpPr>
-          <p:cNvPr id="17" name="Text 12"/>
+          <p:cNvPr id="17" name="Step title"/>
           <p:cNvSpPr txBox="1"/>
           <p:nvPr/>
         </p:nvSpPr>
         <p:spPr>
           <a:xfrm>
             <a:off x="6461608" y="2971800"/>
-            <a:ext cx="2110664" cy="411480"/>
+            <a:ext cx="2110664" cy="384048"/>
           </a:xfrm>
           <a:prstGeom prst="rect">
             <a:avLst/>
@@ -5948,10 +5478,21 @@
             <a:r>
               <a:rPr lang="en-US" sz="1600" b="1" dirty="0">
                 <a:solidFill>
+                  <a:srgbClr val="C94A10"/>
+                </a:solidFill>
+              </a:rPr>
+              <a:t>3</a:t>
+            </a:r>
+            <a:pPr indent="0" marL="0">
+              <a:buNone/>
+            </a:pPr>
+            <a:r>
+              <a:rPr lang="en-US" sz="1600" b="1" dirty="0">
+                <a:solidFill>
                   <a:srgbClr val="121826"/>
                 </a:solidFill>
               </a:rPr>
-              <a:t>3  Ask before I tell</a:t>
+              <a:t>  Ask before I tell</a:t>
             </a:r>
             <a:endParaRPr lang="en-US" sz="1600" dirty="0"/>
           </a:p>
@@ -5959,14 +5500,14 @@
       </p:sp>
       <p:sp>
         <p:nvSpPr>
-          <p:cNvPr id="18" name="Text 13"/>
+          <p:cNvPr id="18" name="Paragraph"/>
           <p:cNvSpPr txBox="1"/>
           <p:nvPr/>
         </p:nvSpPr>
         <p:spPr>
           <a:xfrm>
-            <a:off x="6461608" y="3401568"/>
-            <a:ext cx="2110664" cy="1463040"/>
+            <a:off x="6461608" y="3383280"/>
+            <a:ext cx="2110664" cy="1188720"/>
           </a:xfrm>
           <a:prstGeom prst="rect">
             <a:avLst/>
@@ -5998,14 +5539,14 @@
       </p:sp>
       <p:sp>
         <p:nvSpPr>
-          <p:cNvPr id="19" name="Shape 14"/>
+          <p:cNvPr id="19" name="Step 4 card"/>
           <p:cNvSpPr/>
           <p:nvPr/>
         </p:nvSpPr>
         <p:spPr>
           <a:xfrm>
             <a:off x="9075191" y="2011680"/>
-            <a:ext cx="2567864" cy="2926080"/>
+            <a:ext cx="2567864" cy="2697480"/>
           </a:xfrm>
           <a:prstGeom prst="roundRect">
             <a:avLst>
@@ -6032,7 +5573,7 @@
       </p:sp>
       <p:sp>
         <p:nvSpPr>
-          <p:cNvPr id="20" name="Shape 15"/>
+          <p:cNvPr id="20" name="Icon circle"/>
           <p:cNvSpPr/>
           <p:nvPr/>
         </p:nvSpPr>
@@ -6047,17 +5588,12 @@
           <a:solidFill>
             <a:srgbClr val="F26522"/>
           </a:solidFill>
-          <a:ln w="12700">
-            <a:solidFill>
-              <a:srgbClr val="F26522"/>
-            </a:solidFill>
-            <a:prstDash val="solid"/>
-          </a:ln>
+          <a:ln/>
         </p:spPr>
       </p:sp>
       <p:pic>
         <p:nvPicPr>
-          <p:cNvPr id="21" name="Image 3" descr="preencoded.png">    </p:cNvPr>
+          <p:cNvPr id="21" name="Icon" descr="preencoded.png">    </p:cNvPr>
           <p:cNvPicPr>
             <a:picLocks noChangeAspect="1"/>
           </p:cNvPicPr>
@@ -6071,8 +5607,8 @@
         </p:blipFill>
         <p:spPr>
           <a:xfrm>
-            <a:off x="9431807" y="2368296"/>
-            <a:ext cx="310896" cy="310896"/>
+            <a:off x="9439854" y="2376343"/>
+            <a:ext cx="294803" cy="294803"/>
           </a:xfrm>
           <a:prstGeom prst="rect">
             <a:avLst/>
@@ -6081,14 +5617,14 @@
       </p:pic>
       <p:sp>
         <p:nvSpPr>
-          <p:cNvPr id="22" name="Text 16"/>
+          <p:cNvPr id="22" name="Step title"/>
           <p:cNvSpPr txBox="1"/>
           <p:nvPr/>
         </p:nvSpPr>
         <p:spPr>
           <a:xfrm>
             <a:off x="9303791" y="2971800"/>
-            <a:ext cx="2110664" cy="411480"/>
+            <a:ext cx="2110664" cy="384048"/>
           </a:xfrm>
           <a:prstGeom prst="rect">
             <a:avLst/>
@@ -6106,10 +5642,21 @@
             <a:r>
               <a:rPr lang="en-US" sz="1600" b="1" dirty="0">
                 <a:solidFill>
+                  <a:srgbClr val="F26522"/>
+                </a:solidFill>
+              </a:rPr>
+              <a:t>4</a:t>
+            </a:r>
+            <a:pPr indent="0" marL="0">
+              <a:buNone/>
+            </a:pPr>
+            <a:r>
+              <a:rPr lang="en-US" sz="1600" b="1" dirty="0">
+                <a:solidFill>
                   <a:srgbClr val="FFFFFF"/>
                 </a:solidFill>
               </a:rPr>
-              <a:t>4  Cause, not symptom</a:t>
+              <a:t>  Cause, not symptom</a:t>
             </a:r>
             <a:endParaRPr lang="en-US" sz="1600" dirty="0"/>
           </a:p>
@@ -6117,14 +5664,14 @@
       </p:sp>
       <p:sp>
         <p:nvSpPr>
-          <p:cNvPr id="23" name="Text 17"/>
+          <p:cNvPr id="23" name="Paragraph"/>
           <p:cNvSpPr txBox="1"/>
           <p:nvPr/>
         </p:nvSpPr>
         <p:spPr>
           <a:xfrm>
-            <a:off x="9303791" y="3401568"/>
-            <a:ext cx="2110664" cy="1463040"/>
+            <a:off x="9303791" y="3383280"/>
+            <a:ext cx="2110664" cy="1188720"/>
           </a:xfrm>
           <a:prstGeom prst="rect">
             <a:avLst/>
@@ -6148,7 +5695,7 @@
                   <a:srgbClr val="D9DDE6"/>
                 </a:solidFill>
               </a:rPr>
-              <a:t>Long mutes looked like avoidance. He was searching for the answer, so I coached hold technique. Tentative wording looked like low confidence. It was ITG knowledge.</a:t>
+              <a:t>One agent’s long mutes looked like avoidance. He was searching, so I coached hold technique. Tentative wording looked like low confidence. It was ITG knowledge.</a:t>
             </a:r>
             <a:endParaRPr lang="en-US" sz="1250" dirty="0"/>
           </a:p>
@@ -6156,34 +5703,49 @@
       </p:sp>
       <p:sp>
         <p:nvSpPr>
-          <p:cNvPr id="24" name="Shape 18"/>
+          <p:cNvPr id="24" name="New-hire band"/>
           <p:cNvSpPr/>
           <p:nvPr/>
         </p:nvSpPr>
         <p:spPr>
           <a:xfrm>
-            <a:off x="548640" y="5212080"/>
-            <a:ext cx="11094415" cy="868680"/>
+            <a:off x="548640" y="4983480"/>
+            <a:ext cx="11094415" cy="1143000"/>
           </a:xfrm>
           <a:prstGeom prst="roundRect">
             <a:avLst>
-              <a:gd name="adj" fmla="val 15789"/>
+              <a:gd name="adj" fmla="val 12000"/>
             </a:avLst>
           </a:prstGeom>
           <a:solidFill>
             <a:srgbClr val="FDE9DF"/>
           </a:solidFill>
-          <a:ln w="12700">
-            <a:solidFill>
-              <a:srgbClr val="FDE9DF"/>
-            </a:solidFill>
-            <a:prstDash val="solid"/>
-          </a:ln>
+          <a:ln/>
+        </p:spPr>
+      </p:sp>
+      <p:sp>
+        <p:nvSpPr>
+          <p:cNvPr id="25" name="Icon circle"/>
+          <p:cNvSpPr/>
+          <p:nvPr/>
+        </p:nvSpPr>
+        <p:spPr>
+          <a:xfrm>
+            <a:off x="768096" y="5271516"/>
+            <a:ext cx="566928" cy="566928"/>
+          </a:xfrm>
+          <a:prstGeom prst="ellipse">
+            <a:avLst/>
+          </a:prstGeom>
+          <a:solidFill>
+            <a:srgbClr val="F26522"/>
+          </a:solidFill>
+          <a:ln/>
         </p:spPr>
       </p:sp>
       <p:pic>
         <p:nvPicPr>
-          <p:cNvPr id="25" name="Image 4" descr="preencoded.png">    </p:cNvPr>
+          <p:cNvPr id="26" name="Icon" descr="preencoded.png">    </p:cNvPr>
           <p:cNvPicPr>
             <a:picLocks noChangeAspect="1"/>
           </p:cNvPicPr>
@@ -6197,8 +5759,8 @@
         </p:blipFill>
         <p:spPr>
           <a:xfrm>
-            <a:off x="822960" y="5458968"/>
-            <a:ext cx="365760" cy="365760"/>
+            <a:off x="904159" y="5407579"/>
+            <a:ext cx="294803" cy="294803"/>
           </a:xfrm>
           <a:prstGeom prst="rect">
             <a:avLst/>
@@ -6207,14 +5769,14 @@
       </p:pic>
       <p:sp>
         <p:nvSpPr>
-          <p:cNvPr id="26" name="Text 19"/>
+          <p:cNvPr id="27" name="Band lead"/>
           <p:cNvSpPr txBox="1"/>
           <p:nvPr/>
         </p:nvSpPr>
         <p:spPr>
           <a:xfrm>
-            <a:off x="1371600" y="5285232"/>
-            <a:ext cx="9997135" cy="731520"/>
+            <a:off x="1554480" y="5093208"/>
+            <a:ext cx="4206240" cy="923544"/>
           </a:xfrm>
           <a:prstGeom prst="rect">
             <a:avLst/>
@@ -6230,7 +5792,7 @@
               <a:buNone/>
             </a:pPr>
             <a:r>
-              <a:rPr lang="en-US" sz="1350" b="1" dirty="0">
+              <a:rPr lang="en-US" sz="1250" b="1" dirty="0">
                 <a:solidFill>
                   <a:srgbClr val="121826"/>
                 </a:solidFill>
@@ -6241,14 +5803,230 @@
               <a:buNone/>
             </a:pPr>
             <a:r>
-              <a:rPr lang="en-US" sz="1350" dirty="0">
+              <a:rPr lang="en-US" sz="1250" dirty="0">
                 <a:solidFill>
                   <a:srgbClr val="121826"/>
                 </a:solidFill>
               </a:rPr>
-              <a:t>so I direct more and loop faster: 15 to 30 minutes per session, follow-up calls the same day or the next, two to three follow-ups for the bottom quartile.</a:t>
-            </a:r>
-            <a:endParaRPr lang="en-US" sz="1350" dirty="0"/>
+              <a:t>so I direct more and loop faster. Most blame the customer at first, so I let them try, then I direct, and I check the next calls fast.</a:t>
+            </a:r>
+            <a:endParaRPr lang="en-US" sz="1250" dirty="0"/>
+          </a:p>
+        </p:txBody>
+      </p:sp>
+      <p:sp>
+        <p:nvSpPr>
+          <p:cNvPr id="28" name="Stat number"/>
+          <p:cNvSpPr txBox="1"/>
+          <p:nvPr/>
+        </p:nvSpPr>
+        <p:spPr>
+          <a:xfrm>
+            <a:off x="6126480" y="5166360"/>
+            <a:ext cx="1671218" cy="440690"/>
+          </a:xfrm>
+          <a:prstGeom prst="rect">
+            <a:avLst/>
+          </a:prstGeom>
+          <a:noFill/>
+          <a:ln/>
+        </p:spPr>
+        <p:txBody>
+          <a:bodyPr wrap="square" lIns="0" tIns="0" rIns="0" bIns="0" rtlCol="0" anchor="b"/>
+          <a:lstStyle/>
+          <a:p>
+            <a:pPr indent="0" marL="0">
+              <a:buNone/>
+            </a:pPr>
+            <a:r>
+              <a:rPr lang="en-US" sz="2200" b="1" dirty="0">
+                <a:solidFill>
+                  <a:srgbClr val="C94A10"/>
+                </a:solidFill>
+              </a:rPr>
+              <a:t>15 to 30</a:t>
+            </a:r>
+            <a:endParaRPr lang="en-US" sz="2200" dirty="0"/>
+          </a:p>
+        </p:txBody>
+      </p:sp>
+      <p:sp>
+        <p:nvSpPr>
+          <p:cNvPr id="29" name="Stat caption"/>
+          <p:cNvSpPr txBox="1"/>
+          <p:nvPr/>
+        </p:nvSpPr>
+        <p:spPr>
+          <a:xfrm>
+            <a:off x="6126480" y="5625338"/>
+            <a:ext cx="1671218" cy="384048"/>
+          </a:xfrm>
+          <a:prstGeom prst="rect">
+            <a:avLst/>
+          </a:prstGeom>
+          <a:noFill/>
+          <a:ln/>
+        </p:spPr>
+        <p:txBody>
+          <a:bodyPr wrap="square" lIns="0" tIns="0" rIns="0" bIns="0" rtlCol="0" anchor="t"/>
+          <a:lstStyle/>
+          <a:p>
+            <a:pPr indent="0" marL="0">
+              <a:buNone/>
+            </a:pPr>
+            <a:r>
+              <a:rPr lang="en-US" sz="1100" dirty="0">
+                <a:solidFill>
+                  <a:srgbClr val="3D4453"/>
+                </a:solidFill>
+              </a:rPr>
+              <a:t>minutes per session, one focus</a:t>
+            </a:r>
+            <a:endParaRPr lang="en-US" sz="1100" dirty="0"/>
+          </a:p>
+        </p:txBody>
+      </p:sp>
+      <p:sp>
+        <p:nvSpPr>
+          <p:cNvPr id="30" name="Stat number"/>
+          <p:cNvSpPr txBox="1"/>
+          <p:nvPr/>
+        </p:nvSpPr>
+        <p:spPr>
+          <a:xfrm>
+            <a:off x="7934858" y="5166360"/>
+            <a:ext cx="1671218" cy="440690"/>
+          </a:xfrm>
+          <a:prstGeom prst="rect">
+            <a:avLst/>
+          </a:prstGeom>
+          <a:noFill/>
+          <a:ln/>
+        </p:spPr>
+        <p:txBody>
+          <a:bodyPr wrap="square" lIns="0" tIns="0" rIns="0" bIns="0" rtlCol="0" anchor="b"/>
+          <a:lstStyle/>
+          <a:p>
+            <a:pPr indent="0" marL="0">
+              <a:buNone/>
+            </a:pPr>
+            <a:r>
+              <a:rPr lang="en-US" sz="2200" b="1" dirty="0">
+                <a:solidFill>
+                  <a:srgbClr val="C94A10"/>
+                </a:solidFill>
+              </a:rPr>
+              <a:t>Same day</a:t>
+            </a:r>
+            <a:endParaRPr lang="en-US" sz="2200" dirty="0"/>
+          </a:p>
+        </p:txBody>
+      </p:sp>
+      <p:sp>
+        <p:nvSpPr>
+          <p:cNvPr id="31" name="Stat caption"/>
+          <p:cNvSpPr txBox="1"/>
+          <p:nvPr/>
+        </p:nvSpPr>
+        <p:spPr>
+          <a:xfrm>
+            <a:off x="7934858" y="5625338"/>
+            <a:ext cx="1671218" cy="384048"/>
+          </a:xfrm>
+          <a:prstGeom prst="rect">
+            <a:avLst/>
+          </a:prstGeom>
+          <a:noFill/>
+          <a:ln/>
+        </p:spPr>
+        <p:txBody>
+          <a:bodyPr wrap="square" lIns="0" tIns="0" rIns="0" bIns="0" rtlCol="0" anchor="t"/>
+          <a:lstStyle/>
+          <a:p>
+            <a:pPr indent="0" marL="0">
+              <a:buNone/>
+            </a:pPr>
+            <a:r>
+              <a:rPr lang="en-US" sz="1100" dirty="0">
+                <a:solidFill>
+                  <a:srgbClr val="3D4453"/>
+                </a:solidFill>
+              </a:rPr>
+              <a:t>or next day, follow-up calls</a:t>
+            </a:r>
+            <a:endParaRPr lang="en-US" sz="1100" dirty="0"/>
+          </a:p>
+        </p:txBody>
+      </p:sp>
+      <p:sp>
+        <p:nvSpPr>
+          <p:cNvPr id="32" name="Stat number"/>
+          <p:cNvSpPr txBox="1"/>
+          <p:nvPr/>
+        </p:nvSpPr>
+        <p:spPr>
+          <a:xfrm>
+            <a:off x="9743237" y="5166360"/>
+            <a:ext cx="1671218" cy="440690"/>
+          </a:xfrm>
+          <a:prstGeom prst="rect">
+            <a:avLst/>
+          </a:prstGeom>
+          <a:noFill/>
+          <a:ln/>
+        </p:spPr>
+        <p:txBody>
+          <a:bodyPr wrap="square" lIns="0" tIns="0" rIns="0" bIns="0" rtlCol="0" anchor="b"/>
+          <a:lstStyle/>
+          <a:p>
+            <a:pPr indent="0" marL="0">
+              <a:buNone/>
+            </a:pPr>
+            <a:r>
+              <a:rPr lang="en-US" sz="2200" b="1" dirty="0">
+                <a:solidFill>
+                  <a:srgbClr val="C94A10"/>
+                </a:solidFill>
+              </a:rPr>
+              <a:t>2 to 3</a:t>
+            </a:r>
+            <a:endParaRPr lang="en-US" sz="2200" dirty="0"/>
+          </a:p>
+        </p:txBody>
+      </p:sp>
+      <p:sp>
+        <p:nvSpPr>
+          <p:cNvPr id="33" name="Stat caption"/>
+          <p:cNvSpPr txBox="1"/>
+          <p:nvPr/>
+        </p:nvSpPr>
+        <p:spPr>
+          <a:xfrm>
+            <a:off x="9743237" y="5625338"/>
+            <a:ext cx="1671218" cy="384048"/>
+          </a:xfrm>
+          <a:prstGeom prst="rect">
+            <a:avLst/>
+          </a:prstGeom>
+          <a:noFill/>
+          <a:ln/>
+        </p:spPr>
+        <p:txBody>
+          <a:bodyPr wrap="square" lIns="0" tIns="0" rIns="0" bIns="0" rtlCol="0" anchor="t"/>
+          <a:lstStyle/>
+          <a:p>
+            <a:pPr indent="0" marL="0">
+              <a:buNone/>
+            </a:pPr>
+            <a:r>
+              <a:rPr lang="en-US" sz="1100" dirty="0">
+                <a:solidFill>
+                  <a:srgbClr val="3D4453"/>
+                </a:solidFill>
+              </a:rPr>
+              <a:t>follow-ups for the bottom quartile</a:t>
+            </a:r>
+            <a:endParaRPr lang="en-US" sz="1100" dirty="0"/>
           </a:p>
         </p:txBody>
       </p:sp>
@@ -6324,14 +6102,14 @@
       </p:grpSpPr>
       <p:sp>
         <p:nvSpPr>
-          <p:cNvPr id="2" name="Text 0"/>
+          <p:cNvPr id="2" name="Eyebrow"/>
           <p:cNvSpPr txBox="1"/>
           <p:nvPr/>
         </p:nvSpPr>
         <p:spPr>
           <a:xfrm>
             <a:off x="548640" y="457200"/>
-            <a:ext cx="7315200" cy="274320"/>
+            <a:ext cx="8229600" cy="274320"/>
           </a:xfrm>
           <a:prstGeom prst="rect">
             <a:avLst/>
@@ -6390,76 +6168,80 @@
                   <a:schemeClr val="bg1"/>
                 </a:solidFill>
               </a:rPr>
-              <a:t>Agent A, 25 days: one behavior, one cause, both sides commit, dates on everything</a:t>
+              <a:t>Kareem Gharib, 25 days: one behavior, one cause,</a:t>
             </a:r>
             <a:endParaRPr lang="en-US" sz="3200" dirty="0"/>
           </a:p>
-        </p:txBody>
-      </p:sp>
-      <p:sp>
-        <p:nvSpPr>
-          <p:cNvPr id="4" name="Shape 2"/>
+          <a:p>
+            <a:pPr algn="l" indent="0" marL="0">
+              <a:buNone/>
+            </a:pPr>
+            <a:r>
+              <a:rPr lang="en-US" sz="3200" b="1" dirty="0">
+                <a:solidFill>
+                  <a:schemeClr val="bg1"/>
+                </a:solidFill>
+              </a:rPr>
+              <a:t>both sides commit, dates on everything</a:t>
+            </a:r>
+            <a:endParaRPr lang="en-US" sz="3200" dirty="0"/>
+          </a:p>
+        </p:txBody>
+      </p:sp>
+      <p:sp>
+        <p:nvSpPr>
+          <p:cNvPr id="4" name="Session card"/>
           <p:cNvSpPr/>
           <p:nvPr/>
         </p:nvSpPr>
         <p:spPr>
           <a:xfrm>
-            <a:off x="548640" y="1965960"/>
-            <a:ext cx="5387188" cy="4160520"/>
+            <a:off x="548640" y="2011680"/>
+            <a:ext cx="5760720" cy="4114800"/>
           </a:xfrm>
           <a:prstGeom prst="roundRect">
             <a:avLst>
-              <a:gd name="adj" fmla="val 4396"/>
+              <a:gd name="adj" fmla="val 4444"/>
             </a:avLst>
           </a:prstGeom>
           <a:solidFill>
             <a:srgbClr val="1C2437"/>
           </a:solidFill>
-          <a:ln w="12700">
-            <a:solidFill>
-              <a:srgbClr val="1C2437"/>
-            </a:solidFill>
-            <a:prstDash val="solid"/>
-          </a:ln>
-        </p:spPr>
-      </p:sp>
-      <p:sp>
-        <p:nvSpPr>
-          <p:cNvPr id="5" name="Shape 3"/>
+          <a:ln/>
+        </p:spPr>
+      </p:sp>
+      <p:sp>
+        <p:nvSpPr>
+          <p:cNvPr id="5" name="Commitments card"/>
           <p:cNvSpPr/>
           <p:nvPr/>
         </p:nvSpPr>
         <p:spPr>
           <a:xfrm>
-            <a:off x="6255868" y="1965960"/>
-            <a:ext cx="5387188" cy="4160520"/>
+            <a:off x="6629400" y="2011680"/>
+            <a:ext cx="5013655" cy="4114800"/>
           </a:xfrm>
           <a:prstGeom prst="roundRect">
             <a:avLst>
-              <a:gd name="adj" fmla="val 4396"/>
+              <a:gd name="adj" fmla="val 4444"/>
             </a:avLst>
           </a:prstGeom>
           <a:solidFill>
             <a:srgbClr val="F6F3EE"/>
           </a:solidFill>
-          <a:ln w="12700">
-            <a:solidFill>
-              <a:srgbClr val="F6F3EE"/>
-            </a:solidFill>
-            <a:prstDash val="solid"/>
-          </a:ln>
-        </p:spPr>
-      </p:sp>
-      <p:sp>
-        <p:nvSpPr>
-          <p:cNvPr id="6" name="Text 4"/>
+          <a:ln/>
+        </p:spPr>
+      </p:sp>
+      <p:sp>
+        <p:nvSpPr>
+          <p:cNvPr id="6" name="Label"/>
           <p:cNvSpPr txBox="1"/>
           <p:nvPr/>
         </p:nvSpPr>
         <p:spPr>
           <a:xfrm>
-            <a:off x="822960" y="2194560"/>
-            <a:ext cx="4838548" cy="237744"/>
+            <a:off x="822960" y="2221992"/>
+            <a:ext cx="5212080" cy="237744"/>
           </a:xfrm>
           <a:prstGeom prst="rect">
             <a:avLst/>
@@ -6480,7 +6262,7 @@
                   <a:srgbClr val="F26522"/>
                 </a:solidFill>
               </a:rPr>
-              <a:t>DATA REVIEWED</a:t>
+              <a:t>DATA REVIEWED, OCTOBER MTD · BELOW TARGET ON ALL FOUR</a:t>
             </a:r>
             <a:endParaRPr lang="en-US" sz="1050" dirty="0"/>
           </a:p>
@@ -6488,14 +6270,390 @@
       </p:sp>
       <p:sp>
         <p:nvSpPr>
-          <p:cNvPr id="7" name="Text 5"/>
+          <p:cNvPr id="7" name="KPI tile"/>
+          <p:cNvSpPr/>
+          <p:nvPr/>
+        </p:nvSpPr>
+        <p:spPr>
+          <a:xfrm>
+            <a:off x="822960" y="2496312"/>
+            <a:ext cx="1234440" cy="694944"/>
+          </a:xfrm>
+          <a:prstGeom prst="roundRect">
+            <a:avLst>
+              <a:gd name="adj" fmla="val 13158"/>
+            </a:avLst>
+          </a:prstGeom>
+          <a:solidFill>
+            <a:srgbClr val="FDE9DF"/>
+          </a:solidFill>
+          <a:ln/>
+        </p:spPr>
+      </p:sp>
+      <p:sp>
+        <p:nvSpPr>
+          <p:cNvPr id="8" name="Tile number"/>
           <p:cNvSpPr txBox="1"/>
           <p:nvPr/>
         </p:nvSpPr>
         <p:spPr>
           <a:xfrm>
-            <a:off x="822960" y="2450592"/>
-            <a:ext cx="4838548" cy="685800"/>
+            <a:off x="859536" y="2542032"/>
+            <a:ext cx="1161288" cy="365760"/>
+          </a:xfrm>
+          <a:prstGeom prst="rect">
+            <a:avLst/>
+          </a:prstGeom>
+          <a:noFill/>
+          <a:ln/>
+        </p:spPr>
+        <p:txBody>
+          <a:bodyPr wrap="square" lIns="0" tIns="0" rIns="0" bIns="0" rtlCol="0" anchor="ctr"/>
+          <a:lstStyle/>
+          <a:p>
+            <a:pPr algn="ctr" indent="0" marL="0">
+              <a:buNone/>
+            </a:pPr>
+            <a:r>
+              <a:rPr lang="en-US" sz="2000" b="1" dirty="0">
+                <a:solidFill>
+                  <a:srgbClr val="B42318"/>
+                </a:solidFill>
+              </a:rPr>
+              <a:t>−20</a:t>
+            </a:r>
+            <a:endParaRPr lang="en-US" sz="2000" dirty="0"/>
+          </a:p>
+        </p:txBody>
+      </p:sp>
+      <p:sp>
+        <p:nvSpPr>
+          <p:cNvPr id="9" name="Tile caption"/>
+          <p:cNvSpPr txBox="1"/>
+          <p:nvPr/>
+        </p:nvSpPr>
+        <p:spPr>
+          <a:xfrm>
+            <a:off x="859536" y="2907792"/>
+            <a:ext cx="1161288" cy="237744"/>
+          </a:xfrm>
+          <a:prstGeom prst="rect">
+            <a:avLst/>
+          </a:prstGeom>
+          <a:noFill/>
+          <a:ln/>
+        </p:spPr>
+        <p:txBody>
+          <a:bodyPr wrap="square" lIns="0" tIns="0" rIns="0" bIns="0" rtlCol="0" anchor="ctr"/>
+          <a:lstStyle/>
+          <a:p>
+            <a:pPr algn="ctr" indent="0" marL="0">
+              <a:buNone/>
+            </a:pPr>
+            <a:r>
+              <a:rPr lang="en-US" sz="1100" dirty="0">
+                <a:solidFill>
+                  <a:srgbClr val="3D4453"/>
+                </a:solidFill>
+              </a:rPr>
+              <a:t>tNPS · 15 surveys</a:t>
+            </a:r>
+            <a:endParaRPr lang="en-US" sz="1100" dirty="0"/>
+          </a:p>
+        </p:txBody>
+      </p:sp>
+      <p:sp>
+        <p:nvSpPr>
+          <p:cNvPr id="10" name="KPI tile"/>
+          <p:cNvSpPr/>
+          <p:nvPr/>
+        </p:nvSpPr>
+        <p:spPr>
+          <a:xfrm>
+            <a:off x="2148840" y="2496312"/>
+            <a:ext cx="1234440" cy="694944"/>
+          </a:xfrm>
+          <a:prstGeom prst="roundRect">
+            <a:avLst>
+              <a:gd name="adj" fmla="val 13158"/>
+            </a:avLst>
+          </a:prstGeom>
+          <a:solidFill>
+            <a:srgbClr val="FDE9DF"/>
+          </a:solidFill>
+          <a:ln/>
+        </p:spPr>
+      </p:sp>
+      <p:sp>
+        <p:nvSpPr>
+          <p:cNvPr id="11" name="Tile number"/>
+          <p:cNvSpPr txBox="1"/>
+          <p:nvPr/>
+        </p:nvSpPr>
+        <p:spPr>
+          <a:xfrm>
+            <a:off x="2185416" y="2542032"/>
+            <a:ext cx="1161288" cy="365760"/>
+          </a:xfrm>
+          <a:prstGeom prst="rect">
+            <a:avLst/>
+          </a:prstGeom>
+          <a:noFill/>
+          <a:ln/>
+        </p:spPr>
+        <p:txBody>
+          <a:bodyPr wrap="square" lIns="0" tIns="0" rIns="0" bIns="0" rtlCol="0" anchor="ctr"/>
+          <a:lstStyle/>
+          <a:p>
+            <a:pPr algn="ctr" indent="0" marL="0">
+              <a:buNone/>
+            </a:pPr>
+            <a:r>
+              <a:rPr lang="en-US" sz="2000" b="1" dirty="0">
+                <a:solidFill>
+                  <a:srgbClr val="B42318"/>
+                </a:solidFill>
+              </a:rPr>
+              <a:t>53.4%</a:t>
+            </a:r>
+            <a:endParaRPr lang="en-US" sz="2000" dirty="0"/>
+          </a:p>
+        </p:txBody>
+      </p:sp>
+      <p:sp>
+        <p:nvSpPr>
+          <p:cNvPr id="12" name="Tile caption"/>
+          <p:cNvSpPr txBox="1"/>
+          <p:nvPr/>
+        </p:nvSpPr>
+        <p:spPr>
+          <a:xfrm>
+            <a:off x="2185416" y="2907792"/>
+            <a:ext cx="1161288" cy="237744"/>
+          </a:xfrm>
+          <a:prstGeom prst="rect">
+            <a:avLst/>
+          </a:prstGeom>
+          <a:noFill/>
+          <a:ln/>
+        </p:spPr>
+        <p:txBody>
+          <a:bodyPr wrap="square" lIns="0" tIns="0" rIns="0" bIns="0" rtlCol="0" anchor="ctr"/>
+          <a:lstStyle/>
+          <a:p>
+            <a:pPr algn="ctr" indent="0" marL="0">
+              <a:buNone/>
+            </a:pPr>
+            <a:r>
+              <a:rPr lang="en-US" sz="1100" dirty="0">
+                <a:solidFill>
+                  <a:srgbClr val="3D4453"/>
+                </a:solidFill>
+              </a:rPr>
+              <a:t>aiCR · target 62%</a:t>
+            </a:r>
+            <a:endParaRPr lang="en-US" sz="1100" dirty="0"/>
+          </a:p>
+        </p:txBody>
+      </p:sp>
+      <p:sp>
+        <p:nvSpPr>
+          <p:cNvPr id="13" name="KPI tile"/>
+          <p:cNvSpPr/>
+          <p:nvPr/>
+        </p:nvSpPr>
+        <p:spPr>
+          <a:xfrm>
+            <a:off x="3474720" y="2496312"/>
+            <a:ext cx="1234440" cy="694944"/>
+          </a:xfrm>
+          <a:prstGeom prst="roundRect">
+            <a:avLst>
+              <a:gd name="adj" fmla="val 13158"/>
+            </a:avLst>
+          </a:prstGeom>
+          <a:solidFill>
+            <a:srgbClr val="FDE9DF"/>
+          </a:solidFill>
+          <a:ln/>
+        </p:spPr>
+      </p:sp>
+      <p:sp>
+        <p:nvSpPr>
+          <p:cNvPr id="14" name="Tile number"/>
+          <p:cNvSpPr txBox="1"/>
+          <p:nvPr/>
+        </p:nvSpPr>
+        <p:spPr>
+          <a:xfrm>
+            <a:off x="3511296" y="2542032"/>
+            <a:ext cx="1161288" cy="365760"/>
+          </a:xfrm>
+          <a:prstGeom prst="rect">
+            <a:avLst/>
+          </a:prstGeom>
+          <a:noFill/>
+          <a:ln/>
+        </p:spPr>
+        <p:txBody>
+          <a:bodyPr wrap="square" lIns="0" tIns="0" rIns="0" bIns="0" rtlCol="0" anchor="ctr"/>
+          <a:lstStyle/>
+          <a:p>
+            <a:pPr algn="ctr" indent="0" marL="0">
+              <a:buNone/>
+            </a:pPr>
+            <a:r>
+              <a:rPr lang="en-US" sz="2000" b="1" dirty="0">
+                <a:solidFill>
+                  <a:srgbClr val="B42318"/>
+                </a:solidFill>
+              </a:rPr>
+              <a:t>0</a:t>
+            </a:r>
+            <a:endParaRPr lang="en-US" sz="2000" dirty="0"/>
+          </a:p>
+        </p:txBody>
+      </p:sp>
+      <p:sp>
+        <p:nvSpPr>
+          <p:cNvPr id="15" name="Tile caption"/>
+          <p:cNvSpPr txBox="1"/>
+          <p:nvPr/>
+        </p:nvSpPr>
+        <p:spPr>
+          <a:xfrm>
+            <a:off x="3511296" y="2907792"/>
+            <a:ext cx="1161288" cy="237744"/>
+          </a:xfrm>
+          <a:prstGeom prst="rect">
+            <a:avLst/>
+          </a:prstGeom>
+          <a:noFill/>
+          <a:ln/>
+        </p:spPr>
+        <p:txBody>
+          <a:bodyPr wrap="square" lIns="0" tIns="0" rIns="0" bIns="0" rtlCol="0" anchor="ctr"/>
+          <a:lstStyle/>
+          <a:p>
+            <a:pPr algn="ctr" indent="0" marL="0">
+              <a:buNone/>
+            </a:pPr>
+            <a:r>
+              <a:rPr lang="en-US" sz="1100" dirty="0">
+                <a:solidFill>
+                  <a:srgbClr val="3D4453"/>
+                </a:solidFill>
+              </a:rPr>
+              <a:t>XM lines · target 4</a:t>
+            </a:r>
+            <a:endParaRPr lang="en-US" sz="1100" dirty="0"/>
+          </a:p>
+        </p:txBody>
+      </p:sp>
+      <p:sp>
+        <p:nvSpPr>
+          <p:cNvPr id="16" name="KPI tile"/>
+          <p:cNvSpPr/>
+          <p:nvPr/>
+        </p:nvSpPr>
+        <p:spPr>
+          <a:xfrm>
+            <a:off x="4800600" y="2496312"/>
+            <a:ext cx="1234440" cy="694944"/>
+          </a:xfrm>
+          <a:prstGeom prst="roundRect">
+            <a:avLst>
+              <a:gd name="adj" fmla="val 13158"/>
+            </a:avLst>
+          </a:prstGeom>
+          <a:solidFill>
+            <a:srgbClr val="FDE9DF"/>
+          </a:solidFill>
+          <a:ln/>
+        </p:spPr>
+      </p:sp>
+      <p:sp>
+        <p:nvSpPr>
+          <p:cNvPr id="17" name="Tile number"/>
+          <p:cNvSpPr txBox="1"/>
+          <p:nvPr/>
+        </p:nvSpPr>
+        <p:spPr>
+          <a:xfrm>
+            <a:off x="4837176" y="2542032"/>
+            <a:ext cx="1161288" cy="365760"/>
+          </a:xfrm>
+          <a:prstGeom prst="rect">
+            <a:avLst/>
+          </a:prstGeom>
+          <a:noFill/>
+          <a:ln/>
+        </p:spPr>
+        <p:txBody>
+          <a:bodyPr wrap="square" lIns="0" tIns="0" rIns="0" bIns="0" rtlCol="0" anchor="ctr"/>
+          <a:lstStyle/>
+          <a:p>
+            <a:pPr algn="ctr" indent="0" marL="0">
+              <a:buNone/>
+            </a:pPr>
+            <a:r>
+              <a:rPr lang="en-US" sz="2000" b="1" dirty="0">
+                <a:solidFill>
+                  <a:srgbClr val="B42318"/>
+                </a:solidFill>
+              </a:rPr>
+              <a:t>1.4%</a:t>
+            </a:r>
+            <a:endParaRPr lang="en-US" sz="2000" dirty="0"/>
+          </a:p>
+        </p:txBody>
+      </p:sp>
+      <p:sp>
+        <p:nvSpPr>
+          <p:cNvPr id="18" name="Tile caption"/>
+          <p:cNvSpPr txBox="1"/>
+          <p:nvPr/>
+        </p:nvSpPr>
+        <p:spPr>
+          <a:xfrm>
+            <a:off x="4837176" y="2907792"/>
+            <a:ext cx="1161288" cy="237744"/>
+          </a:xfrm>
+          <a:prstGeom prst="rect">
+            <a:avLst/>
+          </a:prstGeom>
+          <a:noFill/>
+          <a:ln/>
+        </p:spPr>
+        <p:txBody>
+          <a:bodyPr wrap="square" lIns="0" tIns="0" rIns="0" bIns="0" rtlCol="0" anchor="ctr"/>
+          <a:lstStyle/>
+          <a:p>
+            <a:pPr algn="ctr" indent="0" marL="0">
+              <a:buNone/>
+            </a:pPr>
+            <a:r>
+              <a:rPr lang="en-US" sz="1100" dirty="0">
+                <a:solidFill>
+                  <a:srgbClr val="3D4453"/>
+                </a:solidFill>
+              </a:rPr>
+              <a:t>GSR · target 8%</a:t>
+            </a:r>
+            <a:endParaRPr lang="en-US" sz="1100" dirty="0"/>
+          </a:p>
+        </p:txBody>
+      </p:sp>
+      <p:sp>
+        <p:nvSpPr>
+          <p:cNvPr id="19" name="Paragraph"/>
+          <p:cNvSpPr txBox="1"/>
+          <p:nvPr/>
+        </p:nvSpPr>
+        <p:spPr>
+          <a:xfrm>
+            <a:off x="822960" y="3264408"/>
+            <a:ext cx="5212080" cy="237744"/>
           </a:xfrm>
           <a:prstGeom prst="rect">
             <a:avLst/>
@@ -6514,27 +6672,27 @@
               <a:buNone/>
             </a:pPr>
             <a:r>
-              <a:rPr lang="en-US" sz="1250" dirty="0">
-                <a:solidFill>
-                  <a:srgbClr val="D9DDE6"/>
-                </a:solidFill>
-              </a:rPr>
-              <a:t>aiCR 53.4% against 62. tNPS −20 on 15 surveys. XM 0. Three calls from October 13 and 14.</a:t>
-            </a:r>
-            <a:endParaRPr lang="en-US" sz="1250" dirty="0"/>
-          </a:p>
-        </p:txBody>
-      </p:sp>
-      <p:sp>
-        <p:nvSpPr>
-          <p:cNvPr id="8" name="Text 6"/>
+              <a:rPr lang="en-US" sz="1100" dirty="0">
+                <a:solidFill>
+                  <a:srgbClr val="8C96AC"/>
+                </a:solidFill>
+              </a:rPr>
+              <a:t>Rank 205 of 220 · 143 calls · three calls reviewed from October 13 and 14</a:t>
+            </a:r>
+            <a:endParaRPr lang="en-US" sz="1100" dirty="0"/>
+          </a:p>
+        </p:txBody>
+      </p:sp>
+      <p:sp>
+        <p:nvSpPr>
+          <p:cNvPr id="20" name="Label"/>
           <p:cNvSpPr txBox="1"/>
           <p:nvPr/>
         </p:nvSpPr>
         <p:spPr>
           <a:xfrm>
-            <a:off x="822960" y="3182112"/>
-            <a:ext cx="4838548" cy="237744"/>
+            <a:off x="822960" y="3648456"/>
+            <a:ext cx="5212080" cy="237744"/>
           </a:xfrm>
           <a:prstGeom prst="rect">
             <a:avLst/>
@@ -6563,14 +6721,14 @@
       </p:sp>
       <p:sp>
         <p:nvSpPr>
-          <p:cNvPr id="9" name="Text 7"/>
+          <p:cNvPr id="21" name="Paragraph"/>
           <p:cNvSpPr txBox="1"/>
           <p:nvPr/>
         </p:nvSpPr>
         <p:spPr>
           <a:xfrm>
-            <a:off x="822960" y="3438144"/>
-            <a:ext cx="4838548" cy="685800"/>
+            <a:off x="822960" y="3904488"/>
+            <a:ext cx="5212080" cy="245364"/>
           </a:xfrm>
           <a:prstGeom prst="rect">
             <a:avLst/>
@@ -6602,14 +6760,14 @@
       </p:sp>
       <p:sp>
         <p:nvSpPr>
-          <p:cNvPr id="10" name="Text 8"/>
+          <p:cNvPr id="22" name="Label"/>
           <p:cNvSpPr txBox="1"/>
           <p:nvPr/>
         </p:nvSpPr>
         <p:spPr>
           <a:xfrm>
-            <a:off x="822960" y="4169664"/>
-            <a:ext cx="4838548" cy="237744"/>
+            <a:off x="822960" y="4277868"/>
+            <a:ext cx="5212080" cy="237744"/>
           </a:xfrm>
           <a:prstGeom prst="rect">
             <a:avLst/>
@@ -6638,14 +6796,14 @@
       </p:sp>
       <p:sp>
         <p:nvSpPr>
-          <p:cNvPr id="11" name="Text 9"/>
+          <p:cNvPr id="23" name="Paragraph"/>
           <p:cNvSpPr txBox="1"/>
           <p:nvPr/>
         </p:nvSpPr>
         <p:spPr>
           <a:xfrm>
-            <a:off x="822960" y="4425696"/>
-            <a:ext cx="4838548" cy="685800"/>
+            <a:off x="822960" y="4533900"/>
+            <a:ext cx="5212080" cy="626364"/>
           </a:xfrm>
           <a:prstGeom prst="rect">
             <a:avLst/>
@@ -6669,7 +6827,7 @@
                   <a:srgbClr val="D9DDE6"/>
                 </a:solidFill>
               </a:rPr>
-              <a:t>Goes straight to troubleshooting with no acknowledgement, no restatement, no commitment. Focus: acknowledge, restate, assure before any step.</a:t>
+              <a:t>Goes straight to troubleshooting with no acknowledgment, no restatement, no commitment. Focus: acknowledge, restate, assure before any troubleshooting step.</a:t>
             </a:r>
             <a:endParaRPr lang="en-US" sz="1250" dirty="0"/>
           </a:p>
@@ -6677,14 +6835,14 @@
       </p:sp>
       <p:sp>
         <p:nvSpPr>
-          <p:cNvPr id="12" name="Text 10"/>
+          <p:cNvPr id="24" name="Label"/>
           <p:cNvSpPr txBox="1"/>
           <p:nvPr/>
         </p:nvSpPr>
         <p:spPr>
           <a:xfrm>
-            <a:off x="822960" y="5157216"/>
-            <a:ext cx="4838548" cy="237744"/>
+            <a:off x="822960" y="5288280"/>
+            <a:ext cx="5212080" cy="237744"/>
           </a:xfrm>
           <a:prstGeom prst="rect">
             <a:avLst/>
@@ -6713,14 +6871,14 @@
       </p:sp>
       <p:sp>
         <p:nvSpPr>
-          <p:cNvPr id="13" name="Text 11"/>
+          <p:cNvPr id="25" name="Paragraph"/>
           <p:cNvSpPr txBox="1"/>
           <p:nvPr/>
         </p:nvSpPr>
         <p:spPr>
           <a:xfrm>
-            <a:off x="822960" y="5413248"/>
-            <a:ext cx="4838548" cy="685800"/>
+            <a:off x="822960" y="5544312"/>
+            <a:ext cx="5212080" cy="435864"/>
           </a:xfrm>
           <a:prstGeom prst="rect">
             <a:avLst/>
@@ -6744,7 +6902,7 @@
                   <a:srgbClr val="D9DDE6"/>
                 </a:solidFill>
               </a:rPr>
-              <a:t>Asked what was in his head. Still searching for the right ITG, so no attention left for the customer. Knowledge, not attitude.</a:t>
+              <a:t>Asked what was in his head. Still searching for the right ITG, so no attention left for the customer. Knowledge and confidence, not attitude.</a:t>
             </a:r>
             <a:endParaRPr lang="en-US" sz="1250" dirty="0"/>
           </a:p>
@@ -6752,14 +6910,14 @@
       </p:sp>
       <p:sp>
         <p:nvSpPr>
-          <p:cNvPr id="14" name="Text 12"/>
+          <p:cNvPr id="26" name="Label"/>
           <p:cNvSpPr txBox="1"/>
           <p:nvPr/>
         </p:nvSpPr>
         <p:spPr>
           <a:xfrm>
-            <a:off x="6530188" y="2194560"/>
-            <a:ext cx="4838548" cy="237744"/>
+            <a:off x="6903720" y="2221992"/>
+            <a:ext cx="4465015" cy="237744"/>
           </a:xfrm>
           <a:prstGeom prst="rect">
             <a:avLst/>
@@ -6780,7 +6938,7 @@
                   <a:srgbClr val="C94A10"/>
                 </a:solidFill>
               </a:rPr>
-              <a:t>AGENT COMMITS TO</a:t>
+              <a:t>KAREEM COMMITS TO</a:t>
             </a:r>
             <a:endParaRPr lang="en-US" sz="1050" dirty="0"/>
           </a:p>
@@ -6788,14 +6946,14 @@
       </p:sp>
       <p:sp>
         <p:nvSpPr>
-          <p:cNvPr id="15" name="Text 13"/>
+          <p:cNvPr id="27" name="Paragraph"/>
           <p:cNvSpPr txBox="1"/>
           <p:nvPr/>
         </p:nvSpPr>
         <p:spPr>
           <a:xfrm>
-            <a:off x="6530188" y="2450592"/>
-            <a:ext cx="4838548" cy="685800"/>
+            <a:off x="6903720" y="2478024"/>
+            <a:ext cx="4465015" cy="435864"/>
           </a:xfrm>
           <a:prstGeom prst="rect">
             <a:avLst/>
@@ -6827,14 +6985,14 @@
       </p:sp>
       <p:sp>
         <p:nvSpPr>
-          <p:cNvPr id="16" name="Text 14"/>
+          <p:cNvPr id="28" name="Label"/>
           <p:cNvSpPr txBox="1"/>
           <p:nvPr/>
         </p:nvSpPr>
         <p:spPr>
           <a:xfrm>
-            <a:off x="6530188" y="3182112"/>
-            <a:ext cx="4838548" cy="237744"/>
+            <a:off x="6903720" y="3096768"/>
+            <a:ext cx="4465015" cy="237744"/>
           </a:xfrm>
           <a:prstGeom prst="rect">
             <a:avLst/>
@@ -6863,14 +7021,14 @@
       </p:sp>
       <p:sp>
         <p:nvSpPr>
-          <p:cNvPr id="17" name="Text 15"/>
+          <p:cNvPr id="29" name="Paragraph"/>
           <p:cNvSpPr txBox="1"/>
           <p:nvPr/>
         </p:nvSpPr>
         <p:spPr>
           <a:xfrm>
-            <a:off x="6530188" y="3438144"/>
-            <a:ext cx="4838548" cy="685800"/>
+            <a:off x="6903720" y="3352800"/>
+            <a:ext cx="4465015" cy="435864"/>
           </a:xfrm>
           <a:prstGeom prst="rect">
             <a:avLst/>
@@ -6902,14 +7060,14 @@
       </p:sp>
       <p:sp>
         <p:nvSpPr>
-          <p:cNvPr id="18" name="Text 16"/>
+          <p:cNvPr id="30" name="Label"/>
           <p:cNvSpPr txBox="1"/>
           <p:nvPr/>
         </p:nvSpPr>
         <p:spPr>
           <a:xfrm>
-            <a:off x="6530188" y="4169664"/>
-            <a:ext cx="4838548" cy="237744"/>
+            <a:off x="6903720" y="3971544"/>
+            <a:ext cx="4465015" cy="237744"/>
           </a:xfrm>
           <a:prstGeom prst="rect">
             <a:avLst/>
@@ -6938,14 +7096,14 @@
       </p:sp>
       <p:sp>
         <p:nvSpPr>
-          <p:cNvPr id="19" name="Text 17"/>
+          <p:cNvPr id="31" name="Paragraph"/>
           <p:cNvSpPr txBox="1"/>
           <p:nvPr/>
         </p:nvSpPr>
         <p:spPr>
           <a:xfrm>
-            <a:off x="6530188" y="4425696"/>
-            <a:ext cx="4838548" cy="685800"/>
+            <a:off x="6903720" y="4227576"/>
+            <a:ext cx="4465015" cy="626364"/>
           </a:xfrm>
           <a:prstGeom prst="rect">
             <a:avLst/>
@@ -6977,14 +7135,14 @@
       </p:sp>
       <p:sp>
         <p:nvSpPr>
-          <p:cNvPr id="20" name="Text 18"/>
+          <p:cNvPr id="32" name="Label"/>
           <p:cNvSpPr txBox="1"/>
           <p:nvPr/>
         </p:nvSpPr>
         <p:spPr>
           <a:xfrm>
-            <a:off x="6530188" y="5157216"/>
-            <a:ext cx="4838548" cy="237744"/>
+            <a:off x="6903720" y="5036820"/>
+            <a:ext cx="4465015" cy="237744"/>
           </a:xfrm>
           <a:prstGeom prst="rect">
             <a:avLst/>
@@ -7013,14 +7171,14 @@
       </p:sp>
       <p:sp>
         <p:nvSpPr>
-          <p:cNvPr id="21" name="Text 19"/>
+          <p:cNvPr id="33" name="Paragraph"/>
           <p:cNvSpPr txBox="1"/>
           <p:nvPr/>
         </p:nvSpPr>
         <p:spPr>
           <a:xfrm>
-            <a:off x="6530188" y="5413248"/>
-            <a:ext cx="4838548" cy="685800"/>
+            <a:off x="6903720" y="5292852"/>
+            <a:ext cx="4465015" cy="626364"/>
           </a:xfrm>
           <a:prstGeom prst="rect">
             <a:avLst/>
@@ -7044,7 +7202,7 @@
                   <a:srgbClr val="3D4453"/>
                 </a:solidFill>
               </a:rPr>
-              <a:t>Ten-minute check October 17, full session October 22. Fewer than 3 of 5: daily five-minute role plays for a week. Parked: rapport, opening. Sales starts once the fix holds.</a:t>
+              <a:t>Ten-minute check October 17, full session October 22. Fewer than 3 of 5: daily five-minute role plays for a week. Parked: rapport. Sales starts once the fix holds.</a:t>
             </a:r>
             <a:endParaRPr lang="en-US" sz="1250" dirty="0"/>
           </a:p>
@@ -7122,14 +7280,14 @@
       </p:grpSpPr>
       <p:sp>
         <p:nvSpPr>
-          <p:cNvPr id="2" name="Text 0"/>
+          <p:cNvPr id="2" name="Eyebrow"/>
           <p:cNvSpPr txBox="1"/>
           <p:nvPr/>
         </p:nvSpPr>
         <p:spPr>
           <a:xfrm>
             <a:off x="548640" y="457200"/>
-            <a:ext cx="7315200" cy="274320"/>
+            <a:ext cx="8229600" cy="274320"/>
           </a:xfrm>
           <a:prstGeom prst="rect">
             <a:avLst/>
@@ -7188,26 +7346,40 @@
                   <a:schemeClr val="tx1"/>
                 </a:solidFill>
               </a:rPr>
-              <a:t>Six agents carry the tNPS gap. Move them to zero and the team is at 20</a:t>
+              <a:t>Six agents carry the tNPS gap.</a:t>
             </a:r>
             <a:endParaRPr lang="en-US" sz="3200" dirty="0"/>
           </a:p>
-        </p:txBody>
-      </p:sp>
-      <p:sp>
-        <p:nvSpPr>
-          <p:cNvPr id="4" name="Shape 2"/>
+          <a:p>
+            <a:pPr algn="l" indent="0" marL="0">
+              <a:buNone/>
+            </a:pPr>
+            <a:r>
+              <a:rPr lang="en-US" sz="3200" b="1" dirty="0">
+                <a:solidFill>
+                  <a:schemeClr val="tx1"/>
+                </a:solidFill>
+              </a:rPr>
+              <a:t>Move them to zero and the team is at 20</a:t>
+            </a:r>
+            <a:endParaRPr lang="en-US" sz="3200" dirty="0"/>
+          </a:p>
+        </p:txBody>
+      </p:sp>
+      <p:sp>
+        <p:nvSpPr>
+          <p:cNvPr id="4" name="Stat card"/>
           <p:cNvSpPr/>
           <p:nvPr/>
         </p:nvSpPr>
         <p:spPr>
           <a:xfrm>
-            <a:off x="548640" y="1965960"/>
-            <a:ext cx="3246120" cy="1600200"/>
+            <a:off x="548640" y="2011680"/>
+            <a:ext cx="3246120" cy="1371600"/>
           </a:xfrm>
           <a:prstGeom prst="roundRect">
             <a:avLst>
-              <a:gd name="adj" fmla="val 11429"/>
+              <a:gd name="adj" fmla="val 13333"/>
             </a:avLst>
           </a:prstGeom>
           <a:solidFill>
@@ -7230,14 +7402,14 @@
       </p:sp>
       <p:sp>
         <p:nvSpPr>
-          <p:cNvPr id="5" name="Text 3"/>
+          <p:cNvPr id="5" name="Stat number"/>
           <p:cNvSpPr txBox="1"/>
           <p:nvPr/>
         </p:nvSpPr>
         <p:spPr>
           <a:xfrm>
             <a:off x="777240" y="2103120"/>
-            <a:ext cx="2788920" cy="731520"/>
+            <a:ext cx="2788920" cy="658368"/>
           </a:xfrm>
           <a:prstGeom prst="rect">
             <a:avLst/>
@@ -7266,14 +7438,14 @@
       </p:sp>
       <p:sp>
         <p:nvSpPr>
-          <p:cNvPr id="6" name="Text 4"/>
+          <p:cNvPr id="6" name="Paragraph"/>
           <p:cNvSpPr txBox="1"/>
           <p:nvPr/>
         </p:nvSpPr>
         <p:spPr>
           <a:xfrm>
-            <a:off x="777240" y="2852928"/>
-            <a:ext cx="2788920" cy="640080"/>
+            <a:off x="777240" y="2788920"/>
+            <a:ext cx="2788920" cy="502920"/>
           </a:xfrm>
           <a:prstGeom prst="rect">
             <a:avLst/>
@@ -7305,18 +7477,18 @@
       </p:sp>
       <p:sp>
         <p:nvSpPr>
-          <p:cNvPr id="7" name="Shape 5"/>
+          <p:cNvPr id="7" name="Stat card"/>
           <p:cNvSpPr/>
           <p:nvPr/>
         </p:nvSpPr>
         <p:spPr>
           <a:xfrm>
-            <a:off x="4069080" y="1965960"/>
-            <a:ext cx="3246120" cy="1600200"/>
+            <a:off x="4069080" y="2011680"/>
+            <a:ext cx="3246120" cy="1371600"/>
           </a:xfrm>
           <a:prstGeom prst="roundRect">
             <a:avLst>
-              <a:gd name="adj" fmla="val 11429"/>
+              <a:gd name="adj" fmla="val 13333"/>
             </a:avLst>
           </a:prstGeom>
           <a:solidFill>
@@ -7339,14 +7511,14 @@
       </p:sp>
       <p:sp>
         <p:nvSpPr>
-          <p:cNvPr id="8" name="Text 6"/>
+          <p:cNvPr id="8" name="Stat number"/>
           <p:cNvSpPr txBox="1"/>
           <p:nvPr/>
         </p:nvSpPr>
         <p:spPr>
           <a:xfrm>
             <a:off x="4297680" y="2103120"/>
-            <a:ext cx="2788920" cy="731520"/>
+            <a:ext cx="2788920" cy="658368"/>
           </a:xfrm>
           <a:prstGeom prst="rect">
             <a:avLst/>
@@ -7375,14 +7547,14 @@
       </p:sp>
       <p:sp>
         <p:nvSpPr>
-          <p:cNvPr id="9" name="Text 7"/>
+          <p:cNvPr id="9" name="Paragraph"/>
           <p:cNvSpPr txBox="1"/>
           <p:nvPr/>
         </p:nvSpPr>
         <p:spPr>
           <a:xfrm>
-            <a:off x="4297680" y="2852928"/>
-            <a:ext cx="2788920" cy="640080"/>
+            <a:off x="4297680" y="2788920"/>
+            <a:ext cx="2788920" cy="502920"/>
           </a:xfrm>
           <a:prstGeom prst="rect">
             <a:avLst/>
@@ -7414,34 +7586,49 @@
       </p:sp>
       <p:sp>
         <p:nvSpPr>
-          <p:cNvPr id="10" name="Shape 8"/>
+          <p:cNvPr id="10" name="Two conversations card"/>
           <p:cNvSpPr/>
           <p:nvPr/>
         </p:nvSpPr>
         <p:spPr>
           <a:xfrm>
-            <a:off x="548640" y="3840480"/>
-            <a:ext cx="6766560" cy="2286000"/>
+            <a:off x="548640" y="3657600"/>
+            <a:ext cx="6766560" cy="2468880"/>
           </a:xfrm>
           <a:prstGeom prst="roundRect">
             <a:avLst>
-              <a:gd name="adj" fmla="val 8000"/>
+              <a:gd name="adj" fmla="val 7407"/>
             </a:avLst>
           </a:prstGeom>
           <a:solidFill>
             <a:srgbClr val="121826"/>
           </a:solidFill>
-          <a:ln w="12700">
-            <a:solidFill>
-              <a:srgbClr val="121826"/>
-            </a:solidFill>
-            <a:prstDash val="solid"/>
-          </a:ln>
+          <a:ln/>
+        </p:spPr>
+      </p:sp>
+      <p:sp>
+        <p:nvSpPr>
+          <p:cNvPr id="11" name="Icon circle"/>
+          <p:cNvSpPr/>
+          <p:nvPr/>
+        </p:nvSpPr>
+        <p:spPr>
+          <a:xfrm>
+            <a:off x="777240" y="3822192"/>
+            <a:ext cx="457200" cy="457200"/>
+          </a:xfrm>
+          <a:prstGeom prst="ellipse">
+            <a:avLst/>
+          </a:prstGeom>
+          <a:solidFill>
+            <a:srgbClr val="F26522"/>
+          </a:solidFill>
+          <a:ln/>
         </p:spPr>
       </p:sp>
       <p:pic>
         <p:nvPicPr>
-          <p:cNvPr id="11" name="Image 0" descr="preencoded.png">    </p:cNvPr>
+          <p:cNvPr id="12" name="Icon" descr="preencoded.png">    </p:cNvPr>
           <p:cNvPicPr>
             <a:picLocks noChangeAspect="1"/>
           </p:cNvPicPr>
@@ -7455,8 +7642,8 @@
         </p:blipFill>
         <p:spPr>
           <a:xfrm>
-            <a:off x="777240" y="4041648"/>
-            <a:ext cx="310896" cy="310896"/>
+            <a:off x="886968" y="3931920"/>
+            <a:ext cx="237744" cy="237744"/>
           </a:xfrm>
           <a:prstGeom prst="rect">
             <a:avLst/>
@@ -7465,14 +7652,14 @@
       </p:pic>
       <p:sp>
         <p:nvSpPr>
-          <p:cNvPr id="12" name="Text 9"/>
+          <p:cNvPr id="13" name="Label"/>
           <p:cNvSpPr txBox="1"/>
           <p:nvPr/>
         </p:nvSpPr>
         <p:spPr>
           <a:xfrm>
-            <a:off x="1188720" y="4078224"/>
-            <a:ext cx="4572000" cy="237744"/>
+            <a:off x="1417320" y="3931920"/>
+            <a:ext cx="5669280" cy="237744"/>
           </a:xfrm>
           <a:prstGeom prst="rect">
             <a:avLst/>
@@ -7493,7 +7680,7 @@
                   <a:srgbClr val="F26522"/>
                 </a:solidFill>
               </a:rPr>
-              <a:t>TWO DIFFERENT CONVERSATIONS</a:t>
+              <a:t>SAME KPI, TWO DIFFERENT CONVERSATIONS</a:t>
             </a:r>
             <a:endParaRPr lang="en-US" sz="1050" dirty="0"/>
           </a:p>
@@ -7501,14 +7688,105 @@
       </p:sp>
       <p:sp>
         <p:nvSpPr>
-          <p:cNvPr id="13" name="Text 10"/>
+          <p:cNvPr id="14" name="Icon circle"/>
+          <p:cNvSpPr/>
+          <p:nvPr/>
+        </p:nvSpPr>
+        <p:spPr>
+          <a:xfrm>
+            <a:off x="777240" y="4389120"/>
+            <a:ext cx="384048" cy="384048"/>
+          </a:xfrm>
+          <a:prstGeom prst="ellipse">
+            <a:avLst/>
+          </a:prstGeom>
+          <a:solidFill>
+            <a:srgbClr val="B42318"/>
+          </a:solidFill>
+          <a:ln/>
+        </p:spPr>
+      </p:sp>
+      <p:pic>
+        <p:nvPicPr>
+          <p:cNvPr id="15" name="Icon" descr="preencoded.png">    </p:cNvPr>
+          <p:cNvPicPr>
+            <a:picLocks noChangeAspect="1"/>
+          </p:cNvPicPr>
+          <p:nvPr/>
+        </p:nvPicPr>
+        <p:blipFill>
+          <a:blip r:embed="rId2"/>
+          <a:stretch>
+            <a:fillRect/>
+          </a:stretch>
+        </p:blipFill>
+        <p:spPr>
+          <a:xfrm>
+            <a:off x="869412" y="4481292"/>
+            <a:ext cx="199705" cy="199705"/>
+          </a:xfrm>
+          <a:prstGeom prst="rect">
+            <a:avLst/>
+          </a:prstGeom>
+        </p:spPr>
+      </p:pic>
+      <p:sp>
+        <p:nvSpPr>
+          <p:cNvPr id="16" name="Agent name"/>
           <p:cNvSpPr txBox="1"/>
           <p:nvPr/>
         </p:nvSpPr>
         <p:spPr>
           <a:xfrm>
-            <a:off x="777240" y="4434840"/>
-            <a:ext cx="6309360" cy="1600200"/>
+            <a:off x="1280160" y="4398264"/>
+            <a:ext cx="2514600" cy="365760"/>
+          </a:xfrm>
+          <a:prstGeom prst="rect">
+            <a:avLst/>
+          </a:prstGeom>
+          <a:noFill/>
+          <a:ln/>
+        </p:spPr>
+        <p:txBody>
+          <a:bodyPr wrap="square" lIns="0" tIns="0" rIns="0" bIns="0" rtlCol="0" anchor="ctr"/>
+          <a:lstStyle/>
+          <a:p>
+            <a:pPr indent="0" marL="0">
+              <a:buNone/>
+            </a:pPr>
+            <a:r>
+              <a:rPr lang="en-US" sz="1400" b="1" dirty="0">
+                <a:solidFill>
+                  <a:srgbClr val="FFFFFF"/>
+                </a:solidFill>
+              </a:rPr>
+              <a:t>Kareem Gharib</a:t>
+            </a:r>
+            <a:pPr indent="0" marL="0">
+              <a:buNone/>
+            </a:pPr>
+            <a:r>
+              <a:rPr lang="en-US" sz="1100" dirty="0">
+                <a:solidFill>
+                  <a:srgbClr val="8C96AC"/>
+                </a:solidFill>
+              </a:rPr>
+              <a:t>  Rank 205 of 220</a:t>
+            </a:r>
+            <a:endParaRPr lang="en-US" sz="1400" dirty="0"/>
+          </a:p>
+        </p:txBody>
+      </p:sp>
+      <p:sp>
+        <p:nvSpPr>
+          <p:cNvPr id="17" name="Paragraph"/>
+          <p:cNvSpPr txBox="1"/>
+          <p:nvPr/>
+        </p:nvSpPr>
+        <p:spPr>
+          <a:xfrm>
+            <a:off x="777240" y="4837176"/>
+            <a:ext cx="3017520" cy="365760"/>
           </a:xfrm>
           <a:prstGeom prst="rect">
             <a:avLst/>
@@ -7522,62 +7800,259 @@
           <a:p>
             <a:pPr indent="0" marL="0">
               <a:spcAft>
-                <a:spcPts val="800"/>
+                <a:spcPts val="400"/>
               </a:spcAft>
               <a:buNone/>
             </a:pPr>
             <a:r>
-              <a:rPr lang="en-US" sz="1250" b="1" dirty="0">
-                <a:solidFill>
-                  <a:srgbClr val="D9DDE6"/>
-                </a:solidFill>
-              </a:rPr>
-              <a:t>Agent A</a:t>
-            </a:r>
+              <a:rPr lang="en-US" sz="1100" dirty="0">
+                <a:solidFill>
+                  <a:srgbClr val="8C96AC"/>
+                </a:solidFill>
+              </a:rPr>
+              <a:t>tNPS −20 on 15 surveys</a:t>
+            </a:r>
+            <a:endParaRPr lang="en-US" sz="1100" dirty="0"/>
+          </a:p>
+          <a:p>
             <a:pPr indent="0" marL="0">
               <a:spcAft>
-                <a:spcPts val="800"/>
+                <a:spcPts val="400"/>
               </a:spcAft>
               <a:buNone/>
             </a:pPr>
             <a:r>
-              <a:rPr lang="en-US" sz="1250" dirty="0">
-                <a:solidFill>
-                  <a:srgbClr val="D9DDE6"/>
-                </a:solidFill>
-              </a:rPr>
-              <a:t> is below target on all four KPIs: a knowledge gap, coached with ITG walkthroughs and the three-step opening.</a:t>
-            </a:r>
-            <a:endParaRPr lang="en-US" sz="1250" dirty="0"/>
-          </a:p>
+              <a:rPr lang="en-US" sz="1100" dirty="0">
+                <a:solidFill>
+                  <a:srgbClr val="8C96AC"/>
+                </a:solidFill>
+              </a:rPr>
+              <a:t>aiCR 53.4% · XM 0 · GSR 1.4%</a:t>
+            </a:r>
+            <a:endParaRPr lang="en-US" sz="1100" dirty="0"/>
+          </a:p>
+        </p:txBody>
+      </p:sp>
+      <p:sp>
+        <p:nvSpPr>
+          <p:cNvPr id="18" name="Paragraph"/>
+          <p:cNvSpPr txBox="1"/>
+          <p:nvPr/>
+        </p:nvSpPr>
+        <p:spPr>
+          <a:xfrm>
+            <a:off x="777240" y="5303520"/>
+            <a:ext cx="3017520" cy="658368"/>
+          </a:xfrm>
+          <a:prstGeom prst="rect">
+            <a:avLst/>
+          </a:prstGeom>
+          <a:noFill/>
+          <a:ln/>
+        </p:spPr>
+        <p:txBody>
+          <a:bodyPr wrap="square" lIns="0" tIns="0" rIns="0" bIns="0" rtlCol="0" anchor="t"/>
+          <a:lstStyle/>
           <a:p>
             <a:pPr indent="0" marL="0">
               <a:spcAft>
-                <a:spcPts val="800"/>
+                <a:spcPts val="400"/>
               </a:spcAft>
               <a:buNone/>
             </a:pPr>
             <a:r>
-              <a:rPr lang="en-US" sz="1250" b="1" dirty="0">
+              <a:rPr lang="en-US" sz="1250" dirty="0">
                 <a:solidFill>
                   <a:srgbClr val="D9DDE6"/>
                 </a:solidFill>
               </a:rPr>
-              <a:t>Agent B</a:t>
-            </a:r>
+              <a:t>Below target on all four KPIs: a knowledge gap, coached with ITG walkthroughs and the three-step opening.</a:t>
+            </a:r>
+            <a:endParaRPr lang="en-US" sz="1250" dirty="0"/>
+          </a:p>
+        </p:txBody>
+      </p:sp>
+      <p:sp>
+        <p:nvSpPr>
+          <p:cNvPr id="19" name="Icon circle"/>
+          <p:cNvSpPr/>
+          <p:nvPr/>
+        </p:nvSpPr>
+        <p:spPr>
+          <a:xfrm>
+            <a:off x="4069080" y="4389120"/>
+            <a:ext cx="384048" cy="384048"/>
+          </a:xfrm>
+          <a:prstGeom prst="ellipse">
+            <a:avLst/>
+          </a:prstGeom>
+          <a:solidFill>
+            <a:srgbClr val="1E7F5C"/>
+          </a:solidFill>
+          <a:ln/>
+        </p:spPr>
+      </p:sp>
+      <p:pic>
+        <p:nvPicPr>
+          <p:cNvPr id="20" name="Icon" descr="preencoded.png">    </p:cNvPr>
+          <p:cNvPicPr>
+            <a:picLocks noChangeAspect="1"/>
+          </p:cNvPicPr>
+          <p:nvPr/>
+        </p:nvPicPr>
+        <p:blipFill>
+          <a:blip r:embed="rId3"/>
+          <a:stretch>
+            <a:fillRect/>
+          </a:stretch>
+        </p:blipFill>
+        <p:spPr>
+          <a:xfrm>
+            <a:off x="4161252" y="4481292"/>
+            <a:ext cx="199705" cy="199705"/>
+          </a:xfrm>
+          <a:prstGeom prst="rect">
+            <a:avLst/>
+          </a:prstGeom>
+        </p:spPr>
+      </p:pic>
+      <p:sp>
+        <p:nvSpPr>
+          <p:cNvPr id="21" name="Agent name"/>
+          <p:cNvSpPr txBox="1"/>
+          <p:nvPr/>
+        </p:nvSpPr>
+        <p:spPr>
+          <a:xfrm>
+            <a:off x="4572000" y="4398264"/>
+            <a:ext cx="2514600" cy="365760"/>
+          </a:xfrm>
+          <a:prstGeom prst="rect">
+            <a:avLst/>
+          </a:prstGeom>
+          <a:noFill/>
+          <a:ln/>
+        </p:spPr>
+        <p:txBody>
+          <a:bodyPr wrap="square" lIns="0" tIns="0" rIns="0" bIns="0" rtlCol="0" anchor="ctr"/>
+          <a:lstStyle/>
+          <a:p>
+            <a:pPr indent="0" marL="0">
+              <a:buNone/>
+            </a:pPr>
+            <a:r>
+              <a:rPr lang="en-US" sz="1400" b="1" dirty="0">
+                <a:solidFill>
+                  <a:srgbClr val="FFFFFF"/>
+                </a:solidFill>
+              </a:rPr>
+              <a:t>Mohammed Ammar</a:t>
+            </a:r>
+            <a:pPr indent="0" marL="0">
+              <a:buNone/>
+            </a:pPr>
+            <a:r>
+              <a:rPr lang="en-US" sz="1100" dirty="0">
+                <a:solidFill>
+                  <a:srgbClr val="8C96AC"/>
+                </a:solidFill>
+              </a:rPr>
+              <a:t>  Rank 54 of 220</a:t>
+            </a:r>
+            <a:endParaRPr lang="en-US" sz="1400" dirty="0"/>
+          </a:p>
+        </p:txBody>
+      </p:sp>
+      <p:sp>
+        <p:nvSpPr>
+          <p:cNvPr id="22" name="Paragraph"/>
+          <p:cNvSpPr txBox="1"/>
+          <p:nvPr/>
+        </p:nvSpPr>
+        <p:spPr>
+          <a:xfrm>
+            <a:off x="4069080" y="4837176"/>
+            <a:ext cx="3017520" cy="365760"/>
+          </a:xfrm>
+          <a:prstGeom prst="rect">
+            <a:avLst/>
+          </a:prstGeom>
+          <a:noFill/>
+          <a:ln/>
+        </p:spPr>
+        <p:txBody>
+          <a:bodyPr wrap="square" lIns="0" tIns="0" rIns="0" bIns="0" rtlCol="0" anchor="t"/>
+          <a:lstStyle/>
+          <a:p>
             <a:pPr indent="0" marL="0">
               <a:spcAft>
-                <a:spcPts val="800"/>
+                <a:spcPts val="400"/>
               </a:spcAft>
               <a:buNone/>
             </a:pPr>
             <a:r>
+              <a:rPr lang="en-US" sz="1100" dirty="0">
+                <a:solidFill>
+                  <a:srgbClr val="8C96AC"/>
+                </a:solidFill>
+              </a:rPr>
+              <a:t>tNPS −37.5 on 16 surveys</a:t>
+            </a:r>
+            <a:endParaRPr lang="en-US" sz="1100" dirty="0"/>
+          </a:p>
+          <a:p>
+            <a:pPr indent="0" marL="0">
+              <a:spcAft>
+                <a:spcPts val="400"/>
+              </a:spcAft>
+              <a:buNone/>
+            </a:pPr>
+            <a:r>
+              <a:rPr lang="en-US" sz="1100" dirty="0">
+                <a:solidFill>
+                  <a:srgbClr val="8C96AC"/>
+                </a:solidFill>
+              </a:rPr>
+              <a:t>aiCR 61.3% · XM 5 · GSR 7.7%</a:t>
+            </a:r>
+            <a:endParaRPr lang="en-US" sz="1100" dirty="0"/>
+          </a:p>
+        </p:txBody>
+      </p:sp>
+      <p:sp>
+        <p:nvSpPr>
+          <p:cNvPr id="23" name="Paragraph"/>
+          <p:cNvSpPr txBox="1"/>
+          <p:nvPr/>
+        </p:nvSpPr>
+        <p:spPr>
+          <a:xfrm>
+            <a:off x="4069080" y="5303520"/>
+            <a:ext cx="3017520" cy="658368"/>
+          </a:xfrm>
+          <a:prstGeom prst="rect">
+            <a:avLst/>
+          </a:prstGeom>
+          <a:noFill/>
+          <a:ln/>
+        </p:spPr>
+        <p:txBody>
+          <a:bodyPr wrap="square" lIns="0" tIns="0" rIns="0" bIns="0" rtlCol="0" anchor="t"/>
+          <a:lstStyle/>
+          <a:p>
+            <a:pPr indent="0" marL="0">
+              <a:spcAft>
+                <a:spcPts val="400"/>
+              </a:spcAft>
+              <a:buNone/>
+            </a:pPr>
+            <a:r>
               <a:rPr lang="en-US" sz="1250" dirty="0">
                 <a:solidFill>
                   <a:srgbClr val="D9DDE6"/>
                 </a:solidFill>
               </a:rPr>
-              <a:t> resolves at 61% and sells 5 lines, yet sits at −38 on 16 surveys: a behavior gap on the call, coached on expectation setting and the close, not on knowledge.</a:t>
+              <a:t>Resolves and sells well, yet −37.5 on tNPS: a behavior gap, coached on expectation setting and the close, not knowledge.</a:t>
             </a:r>
             <a:endParaRPr lang="en-US" sz="1250" dirty="0"/>
           </a:p>
@@ -7585,14 +8060,14 @@
       </p:sp>
       <p:sp>
         <p:nvSpPr>
-          <p:cNvPr id="14" name="Shape 11"/>
+          <p:cNvPr id="24" name="Cadence card"/>
           <p:cNvSpPr/>
           <p:nvPr/>
         </p:nvSpPr>
         <p:spPr>
           <a:xfrm>
-            <a:off x="7589520" y="1965960"/>
-            <a:ext cx="4053535" cy="4160520"/>
+            <a:off x="7589520" y="2011680"/>
+            <a:ext cx="4053535" cy="4114800"/>
           </a:xfrm>
           <a:prstGeom prst="roundRect">
             <a:avLst>
@@ -7617,24 +8092,44 @@
           </a:effectLst>
         </p:spPr>
       </p:sp>
+      <p:sp>
+        <p:nvSpPr>
+          <p:cNvPr id="25" name="Icon circle"/>
+          <p:cNvSpPr/>
+          <p:nvPr/>
+        </p:nvSpPr>
+        <p:spPr>
+          <a:xfrm>
+            <a:off x="7818120" y="2194560"/>
+            <a:ext cx="457200" cy="457200"/>
+          </a:xfrm>
+          <a:prstGeom prst="ellipse">
+            <a:avLst/>
+          </a:prstGeom>
+          <a:solidFill>
+            <a:srgbClr val="FDE9DF"/>
+          </a:solidFill>
+          <a:ln/>
+        </p:spPr>
+      </p:sp>
       <p:pic>
         <p:nvPicPr>
-          <p:cNvPr id="15" name="Image 1" descr="preencoded.png">    </p:cNvPr>
+          <p:cNvPr id="26" name="Icon" descr="preencoded.png">    </p:cNvPr>
           <p:cNvPicPr>
             <a:picLocks noChangeAspect="1"/>
           </p:cNvPicPr>
           <p:nvPr/>
         </p:nvPicPr>
         <p:blipFill>
-          <a:blip r:embed="rId2"/>
+          <a:blip r:embed="rId4"/>
           <a:stretch>
             <a:fillRect/>
           </a:stretch>
         </p:blipFill>
         <p:spPr>
           <a:xfrm>
-            <a:off x="7818120" y="2148840"/>
-            <a:ext cx="274320" cy="274320"/>
+            <a:off x="7927848" y="2304288"/>
+            <a:ext cx="237744" cy="237744"/>
           </a:xfrm>
           <a:prstGeom prst="rect">
             <a:avLst/>
@@ -7643,14 +8138,14 @@
       </p:pic>
       <p:sp>
         <p:nvSpPr>
-          <p:cNvPr id="16" name="Text 12"/>
+          <p:cNvPr id="27" name="Cadence heading"/>
           <p:cNvSpPr txBox="1"/>
           <p:nvPr/>
         </p:nvSpPr>
         <p:spPr>
           <a:xfrm>
-            <a:off x="8183880" y="2103120"/>
-            <a:ext cx="3230575" cy="365760"/>
+            <a:off x="8412480" y="2240280"/>
+            <a:ext cx="3001975" cy="365760"/>
           </a:xfrm>
           <a:prstGeom prst="rect">
             <a:avLst/>
@@ -7679,14 +8174,14 @@
       </p:sp>
       <p:sp>
         <p:nvSpPr>
-          <p:cNvPr id="17" name="Text 13"/>
+          <p:cNvPr id="28" name="Cadence list"/>
           <p:cNvSpPr txBox="1"/>
           <p:nvPr/>
         </p:nvSpPr>
         <p:spPr>
           <a:xfrm>
-            <a:off x="7818120" y="2514600"/>
-            <a:ext cx="3596335" cy="1737360"/>
+            <a:off x="7818120" y="2743200"/>
+            <a:ext cx="3596335" cy="1691640"/>
           </a:xfrm>
           <a:prstGeom prst="rect">
             <a:avLst/>
@@ -7700,7 +8195,7 @@
           <a:p>
             <a:pPr marL="342900" indent="-342900">
               <a:spcAft>
-                <a:spcPts val="500"/>
+                <a:spcPts val="300"/>
               </a:spcAft>
               <a:buSzPct val="100000"/>
               <a:buChar char="•"/>
@@ -7718,7 +8213,7 @@
           <a:p>
             <a:pPr marL="342900" indent="-342900">
               <a:spcAft>
-                <a:spcPts val="500"/>
+                <a:spcPts val="300"/>
               </a:spcAft>
               <a:buSzPct val="100000"/>
               <a:buChar char="•"/>
@@ -7736,7 +8231,7 @@
           <a:p>
             <a:pPr marL="342900" indent="-342900">
               <a:spcAft>
-                <a:spcPts val="500"/>
+                <a:spcPts val="300"/>
               </a:spcAft>
               <a:buSzPct val="100000"/>
               <a:buChar char="•"/>
@@ -7747,14 +8242,14 @@
                   <a:srgbClr val="3D4453"/>
                 </a:solidFill>
               </a:rPr>
-              <a:t>ITG right guide picked and completed checked on every reviewed call</a:t>
+              <a:t>ITG checked on every reviewed call: right guide picked and completed</a:t>
             </a:r>
             <a:endParaRPr lang="en-US" sz="1250" dirty="0"/>
           </a:p>
           <a:p>
             <a:pPr marL="342900" indent="-342900">
               <a:spcAft>
-                <a:spcPts val="500"/>
+                <a:spcPts val="300"/>
               </a:spcAft>
               <a:buSzPct val="100000"/>
               <a:buChar char="•"/>
@@ -7771,24 +8266,44 @@
           </a:p>
         </p:txBody>
       </p:sp>
+      <p:sp>
+        <p:nvSpPr>
+          <p:cNvPr id="29" name="Icon circle"/>
+          <p:cNvSpPr/>
+          <p:nvPr/>
+        </p:nvSpPr>
+        <p:spPr>
+          <a:xfrm>
+            <a:off x="7818120" y="4617720"/>
+            <a:ext cx="457200" cy="457200"/>
+          </a:xfrm>
+          <a:prstGeom prst="ellipse">
+            <a:avLst/>
+          </a:prstGeom>
+          <a:solidFill>
+            <a:srgbClr val="FDE9DF"/>
+          </a:solidFill>
+          <a:ln/>
+        </p:spPr>
+      </p:sp>
       <p:pic>
         <p:nvPicPr>
-          <p:cNvPr id="18" name="Image 2" descr="preencoded.png">    </p:cNvPr>
+          <p:cNvPr id="30" name="Icon" descr="preencoded.png">    </p:cNvPr>
           <p:cNvPicPr>
             <a:picLocks noChangeAspect="1"/>
           </p:cNvPicPr>
           <p:nvPr/>
         </p:nvPicPr>
         <p:blipFill>
-          <a:blip r:embed="rId3"/>
+          <a:blip r:embed="rId5"/>
           <a:stretch>
             <a:fillRect/>
           </a:stretch>
         </p:blipFill>
         <p:spPr>
           <a:xfrm>
-            <a:off x="7818120" y="4434840"/>
-            <a:ext cx="274320" cy="274320"/>
+            <a:off x="7927848" y="4727448"/>
+            <a:ext cx="237744" cy="237744"/>
           </a:xfrm>
           <a:prstGeom prst="rect">
             <a:avLst/>
@@ -7797,14 +8312,14 @@
       </p:pic>
       <p:sp>
         <p:nvSpPr>
-          <p:cNvPr id="19" name="Text 14"/>
+          <p:cNvPr id="31" name="Asks heading"/>
           <p:cNvSpPr txBox="1"/>
           <p:nvPr/>
         </p:nvSpPr>
         <p:spPr>
           <a:xfrm>
-            <a:off x="8183880" y="4389120"/>
-            <a:ext cx="3230575" cy="365760"/>
+            <a:off x="8412480" y="4663440"/>
+            <a:ext cx="3001975" cy="365760"/>
           </a:xfrm>
           <a:prstGeom prst="rect">
             <a:avLst/>
@@ -7833,14 +8348,14 @@
       </p:sp>
       <p:sp>
         <p:nvSpPr>
-          <p:cNvPr id="20" name="Text 15"/>
+          <p:cNvPr id="32" name="Asks list"/>
           <p:cNvSpPr txBox="1"/>
           <p:nvPr/>
         </p:nvSpPr>
         <p:spPr>
           <a:xfrm>
-            <a:off x="7818120" y="4800600"/>
-            <a:ext cx="3596335" cy="1188720"/>
+            <a:off x="7818120" y="5166360"/>
+            <a:ext cx="3596335" cy="868680"/>
           </a:xfrm>
           <a:prstGeom prst="rect">
             <a:avLst/>
